--- a/deck/pres.pptx
+++ b/deck/pres.pptx
@@ -5,42 +5,41 @@
     <p:sldMasterId id="2147483648" r:id="rId4"/>
   </p:sldMasterIdLst>
   <p:notesMasterIdLst>
-    <p:notesMasterId r:id="rId38"/>
+    <p:notesMasterId r:id="rId37"/>
   </p:notesMasterIdLst>
   <p:sldIdLst>
-    <p:sldId id="319" r:id="rId5"/>
-    <p:sldId id="315" r:id="rId6"/>
-    <p:sldId id="328" r:id="rId7"/>
-    <p:sldId id="288" r:id="rId8"/>
-    <p:sldId id="329" r:id="rId9"/>
-    <p:sldId id="324" r:id="rId10"/>
-    <p:sldId id="317" r:id="rId11"/>
-    <p:sldId id="320" r:id="rId12"/>
-    <p:sldId id="322" r:id="rId13"/>
-    <p:sldId id="326" r:id="rId14"/>
-    <p:sldId id="325" r:id="rId15"/>
-    <p:sldId id="331" r:id="rId16"/>
-    <p:sldId id="330" r:id="rId17"/>
-    <p:sldId id="338" r:id="rId18"/>
-    <p:sldId id="339" r:id="rId19"/>
-    <p:sldId id="323" r:id="rId20"/>
-    <p:sldId id="318" r:id="rId21"/>
-    <p:sldId id="333" r:id="rId22"/>
-    <p:sldId id="334" r:id="rId23"/>
-    <p:sldId id="335" r:id="rId24"/>
-    <p:sldId id="340" r:id="rId25"/>
-    <p:sldId id="336" r:id="rId26"/>
-    <p:sldId id="337" r:id="rId27"/>
-    <p:sldId id="327" r:id="rId28"/>
-    <p:sldId id="289" r:id="rId29"/>
-    <p:sldId id="297" r:id="rId30"/>
-    <p:sldId id="298" r:id="rId31"/>
-    <p:sldId id="299" r:id="rId32"/>
-    <p:sldId id="300" r:id="rId33"/>
-    <p:sldId id="332" r:id="rId34"/>
-    <p:sldId id="302" r:id="rId35"/>
-    <p:sldId id="303" r:id="rId36"/>
-    <p:sldId id="304" r:id="rId37"/>
+    <p:sldId id="315" r:id="rId5"/>
+    <p:sldId id="328" r:id="rId6"/>
+    <p:sldId id="341" r:id="rId7"/>
+    <p:sldId id="342" r:id="rId8"/>
+    <p:sldId id="288" r:id="rId9"/>
+    <p:sldId id="329" r:id="rId10"/>
+    <p:sldId id="343" r:id="rId11"/>
+    <p:sldId id="344" r:id="rId12"/>
+    <p:sldId id="345" r:id="rId13"/>
+    <p:sldId id="346" r:id="rId14"/>
+    <p:sldId id="324" r:id="rId15"/>
+    <p:sldId id="317" r:id="rId16"/>
+    <p:sldId id="302" r:id="rId17"/>
+    <p:sldId id="303" r:id="rId18"/>
+    <p:sldId id="304" r:id="rId19"/>
+    <p:sldId id="348" r:id="rId20"/>
+    <p:sldId id="350" r:id="rId21"/>
+    <p:sldId id="349" r:id="rId22"/>
+    <p:sldId id="351" r:id="rId23"/>
+    <p:sldId id="352" r:id="rId24"/>
+    <p:sldId id="318" r:id="rId25"/>
+    <p:sldId id="353" r:id="rId26"/>
+    <p:sldId id="354" r:id="rId27"/>
+    <p:sldId id="355" r:id="rId28"/>
+    <p:sldId id="356" r:id="rId29"/>
+    <p:sldId id="327" r:id="rId30"/>
+    <p:sldId id="289" r:id="rId31"/>
+    <p:sldId id="297" r:id="rId32"/>
+    <p:sldId id="298" r:id="rId33"/>
+    <p:sldId id="299" r:id="rId34"/>
+    <p:sldId id="300" r:id="rId35"/>
+    <p:sldId id="357" r:id="rId36"/>
   </p:sldIdLst>
   <p:sldSz cx="12192000" cy="6858000"/>
   <p:notesSz cx="6858000" cy="9144000"/>
@@ -144,39 +143,38 @@
       <p14:sectionLst xmlns:p14="http://schemas.microsoft.com/office/powerpoint/2010/main">
         <p14:section name="Default Section" id="{DBBDBF82-4A2E-4EAB-BABB-4763F3EAE6ED}">
           <p14:sldIdLst>
-            <p14:sldId id="319"/>
             <p14:sldId id="315"/>
             <p14:sldId id="328"/>
+            <p14:sldId id="341"/>
+            <p14:sldId id="342"/>
             <p14:sldId id="288"/>
             <p14:sldId id="329"/>
+            <p14:sldId id="343"/>
+            <p14:sldId id="344"/>
+            <p14:sldId id="345"/>
+            <p14:sldId id="346"/>
             <p14:sldId id="324"/>
             <p14:sldId id="317"/>
-            <p14:sldId id="320"/>
-            <p14:sldId id="322"/>
-            <p14:sldId id="326"/>
-            <p14:sldId id="325"/>
-            <p14:sldId id="331"/>
-            <p14:sldId id="330"/>
-            <p14:sldId id="338"/>
-            <p14:sldId id="339"/>
-            <p14:sldId id="323"/>
+            <p14:sldId id="302"/>
+            <p14:sldId id="303"/>
+            <p14:sldId id="304"/>
+            <p14:sldId id="348"/>
+            <p14:sldId id="350"/>
+            <p14:sldId id="349"/>
+            <p14:sldId id="351"/>
+            <p14:sldId id="352"/>
             <p14:sldId id="318"/>
-            <p14:sldId id="333"/>
-            <p14:sldId id="334"/>
-            <p14:sldId id="335"/>
-            <p14:sldId id="340"/>
-            <p14:sldId id="336"/>
-            <p14:sldId id="337"/>
+            <p14:sldId id="353"/>
+            <p14:sldId id="354"/>
+            <p14:sldId id="355"/>
+            <p14:sldId id="356"/>
             <p14:sldId id="327"/>
             <p14:sldId id="289"/>
             <p14:sldId id="297"/>
             <p14:sldId id="298"/>
             <p14:sldId id="299"/>
             <p14:sldId id="300"/>
-            <p14:sldId id="332"/>
-            <p14:sldId id="302"/>
-            <p14:sldId id="303"/>
-            <p14:sldId id="304"/>
+            <p14:sldId id="357"/>
           </p14:sldIdLst>
         </p14:section>
       </p14:sectionLst>
@@ -3944,753 +3942,6 @@
 </file>
 
 <file path=ppt/diagrams/colors6.xml><?xml version="1.0" encoding="utf-8"?>
-<dgm:colorsDef xmlns:dgm="http://schemas.openxmlformats.org/drawingml/2006/diagram" xmlns:a="http://schemas.openxmlformats.org/drawingml/2006/main" uniqueId="urn:microsoft.com/office/officeart/2005/8/colors/accent1_2">
-  <dgm:title val=""/>
-  <dgm:desc val=""/>
-  <dgm:catLst>
-    <dgm:cat type="accent1" pri="11200"/>
-  </dgm:catLst>
-  <dgm:styleLbl name="node0">
-    <dgm:fillClrLst meth="repeat">
-      <a:schemeClr val="accent1"/>
-    </dgm:fillClrLst>
-    <dgm:linClrLst meth="repeat">
-      <a:schemeClr val="lt1"/>
-    </dgm:linClrLst>
-    <dgm:effectClrLst/>
-    <dgm:txLinClrLst/>
-    <dgm:txFillClrLst/>
-    <dgm:txEffectClrLst/>
-  </dgm:styleLbl>
-  <dgm:styleLbl name="alignNode1">
-    <dgm:fillClrLst meth="repeat">
-      <a:schemeClr val="accent1"/>
-    </dgm:fillClrLst>
-    <dgm:linClrLst meth="repeat">
-      <a:schemeClr val="accent1"/>
-    </dgm:linClrLst>
-    <dgm:effectClrLst/>
-    <dgm:txLinClrLst/>
-    <dgm:txFillClrLst/>
-    <dgm:txEffectClrLst/>
-  </dgm:styleLbl>
-  <dgm:styleLbl name="node1">
-    <dgm:fillClrLst meth="repeat">
-      <a:schemeClr val="accent1"/>
-    </dgm:fillClrLst>
-    <dgm:linClrLst meth="repeat">
-      <a:schemeClr val="lt1"/>
-    </dgm:linClrLst>
-    <dgm:effectClrLst/>
-    <dgm:txLinClrLst/>
-    <dgm:txFillClrLst/>
-    <dgm:txEffectClrLst/>
-  </dgm:styleLbl>
-  <dgm:styleLbl name="lnNode1">
-    <dgm:fillClrLst meth="repeat">
-      <a:schemeClr val="accent1"/>
-    </dgm:fillClrLst>
-    <dgm:linClrLst meth="repeat">
-      <a:schemeClr val="lt1"/>
-    </dgm:linClrLst>
-    <dgm:effectClrLst/>
-    <dgm:txLinClrLst/>
-    <dgm:txFillClrLst/>
-    <dgm:txEffectClrLst/>
-  </dgm:styleLbl>
-  <dgm:styleLbl name="vennNode1">
-    <dgm:fillClrLst meth="repeat">
-      <a:schemeClr val="accent1">
-        <a:alpha val="50000"/>
-      </a:schemeClr>
-    </dgm:fillClrLst>
-    <dgm:linClrLst meth="repeat">
-      <a:schemeClr val="lt1"/>
-    </dgm:linClrLst>
-    <dgm:effectClrLst/>
-    <dgm:txLinClrLst/>
-    <dgm:txFillClrLst/>
-    <dgm:txEffectClrLst/>
-  </dgm:styleLbl>
-  <dgm:styleLbl name="node2">
-    <dgm:fillClrLst meth="repeat">
-      <a:schemeClr val="accent1"/>
-    </dgm:fillClrLst>
-    <dgm:linClrLst meth="repeat">
-      <a:schemeClr val="lt1"/>
-    </dgm:linClrLst>
-    <dgm:effectClrLst/>
-    <dgm:txLinClrLst/>
-    <dgm:txFillClrLst/>
-    <dgm:txEffectClrLst/>
-  </dgm:styleLbl>
-  <dgm:styleLbl name="node3">
-    <dgm:fillClrLst meth="repeat">
-      <a:schemeClr val="accent1"/>
-    </dgm:fillClrLst>
-    <dgm:linClrLst meth="repeat">
-      <a:schemeClr val="lt1"/>
-    </dgm:linClrLst>
-    <dgm:effectClrLst/>
-    <dgm:txLinClrLst/>
-    <dgm:txFillClrLst/>
-    <dgm:txEffectClrLst/>
-  </dgm:styleLbl>
-  <dgm:styleLbl name="node4">
-    <dgm:fillClrLst meth="repeat">
-      <a:schemeClr val="accent1"/>
-    </dgm:fillClrLst>
-    <dgm:linClrLst meth="repeat">
-      <a:schemeClr val="lt1"/>
-    </dgm:linClrLst>
-    <dgm:effectClrLst/>
-    <dgm:txLinClrLst/>
-    <dgm:txFillClrLst/>
-    <dgm:txEffectClrLst/>
-  </dgm:styleLbl>
-  <dgm:styleLbl name="fgImgPlace1">
-    <dgm:fillClrLst meth="repeat">
-      <a:schemeClr val="accent1">
-        <a:tint val="50000"/>
-      </a:schemeClr>
-    </dgm:fillClrLst>
-    <dgm:linClrLst meth="repeat">
-      <a:schemeClr val="lt1"/>
-    </dgm:linClrLst>
-    <dgm:effectClrLst/>
-    <dgm:txLinClrLst/>
-    <dgm:txFillClrLst meth="repeat">
-      <a:schemeClr val="lt1"/>
-    </dgm:txFillClrLst>
-    <dgm:txEffectClrLst/>
-  </dgm:styleLbl>
-  <dgm:styleLbl name="alignImgPlace1">
-    <dgm:fillClrLst meth="repeat">
-      <a:schemeClr val="accent1">
-        <a:tint val="50000"/>
-      </a:schemeClr>
-    </dgm:fillClrLst>
-    <dgm:linClrLst meth="repeat">
-      <a:schemeClr val="lt1"/>
-    </dgm:linClrLst>
-    <dgm:effectClrLst/>
-    <dgm:txLinClrLst/>
-    <dgm:txFillClrLst meth="repeat">
-      <a:schemeClr val="lt1"/>
-    </dgm:txFillClrLst>
-    <dgm:txEffectClrLst/>
-  </dgm:styleLbl>
-  <dgm:styleLbl name="bgImgPlace1">
-    <dgm:fillClrLst meth="repeat">
-      <a:schemeClr val="accent1">
-        <a:tint val="50000"/>
-      </a:schemeClr>
-    </dgm:fillClrLst>
-    <dgm:linClrLst meth="repeat">
-      <a:schemeClr val="lt1"/>
-    </dgm:linClrLst>
-    <dgm:effectClrLst/>
-    <dgm:txLinClrLst/>
-    <dgm:txFillClrLst meth="repeat">
-      <a:schemeClr val="lt1"/>
-    </dgm:txFillClrLst>
-    <dgm:txEffectClrLst/>
-  </dgm:styleLbl>
-  <dgm:styleLbl name="sibTrans2D1">
-    <dgm:fillClrLst meth="repeat">
-      <a:schemeClr val="accent1">
-        <a:tint val="60000"/>
-      </a:schemeClr>
-    </dgm:fillClrLst>
-    <dgm:linClrLst meth="repeat">
-      <a:schemeClr val="accent1">
-        <a:tint val="60000"/>
-      </a:schemeClr>
-    </dgm:linClrLst>
-    <dgm:effectClrLst/>
-    <dgm:txLinClrLst/>
-    <dgm:txFillClrLst/>
-    <dgm:txEffectClrLst/>
-  </dgm:styleLbl>
-  <dgm:styleLbl name="fgSibTrans2D1">
-    <dgm:fillClrLst meth="repeat">
-      <a:schemeClr val="accent1">
-        <a:tint val="60000"/>
-      </a:schemeClr>
-    </dgm:fillClrLst>
-    <dgm:linClrLst meth="repeat">
-      <a:schemeClr val="accent1">
-        <a:tint val="60000"/>
-      </a:schemeClr>
-    </dgm:linClrLst>
-    <dgm:effectClrLst/>
-    <dgm:txLinClrLst/>
-    <dgm:txFillClrLst/>
-    <dgm:txEffectClrLst/>
-  </dgm:styleLbl>
-  <dgm:styleLbl name="bgSibTrans2D1">
-    <dgm:fillClrLst meth="repeat">
-      <a:schemeClr val="accent1">
-        <a:tint val="60000"/>
-      </a:schemeClr>
-    </dgm:fillClrLst>
-    <dgm:linClrLst meth="repeat">
-      <a:schemeClr val="accent1">
-        <a:tint val="60000"/>
-      </a:schemeClr>
-    </dgm:linClrLst>
-    <dgm:effectClrLst/>
-    <dgm:txLinClrLst/>
-    <dgm:txFillClrLst/>
-    <dgm:txEffectClrLst/>
-  </dgm:styleLbl>
-  <dgm:styleLbl name="sibTrans1D1">
-    <dgm:fillClrLst meth="repeat">
-      <a:schemeClr val="accent1"/>
-    </dgm:fillClrLst>
-    <dgm:linClrLst meth="repeat">
-      <a:schemeClr val="accent1"/>
-    </dgm:linClrLst>
-    <dgm:effectClrLst/>
-    <dgm:txLinClrLst/>
-    <dgm:txFillClrLst meth="repeat">
-      <a:schemeClr val="tx1"/>
-    </dgm:txFillClrLst>
-    <dgm:txEffectClrLst/>
-  </dgm:styleLbl>
-  <dgm:styleLbl name="callout">
-    <dgm:fillClrLst meth="repeat">
-      <a:schemeClr val="accent1"/>
-    </dgm:fillClrLst>
-    <dgm:linClrLst meth="repeat">
-      <a:schemeClr val="accent1">
-        <a:tint val="50000"/>
-      </a:schemeClr>
-    </dgm:linClrLst>
-    <dgm:effectClrLst/>
-    <dgm:txLinClrLst/>
-    <dgm:txFillClrLst meth="repeat">
-      <a:schemeClr val="tx1"/>
-    </dgm:txFillClrLst>
-    <dgm:txEffectClrLst/>
-  </dgm:styleLbl>
-  <dgm:styleLbl name="asst0">
-    <dgm:fillClrLst meth="repeat">
-      <a:schemeClr val="accent1"/>
-    </dgm:fillClrLst>
-    <dgm:linClrLst meth="repeat">
-      <a:schemeClr val="lt1"/>
-    </dgm:linClrLst>
-    <dgm:effectClrLst/>
-    <dgm:txLinClrLst/>
-    <dgm:txFillClrLst/>
-    <dgm:txEffectClrLst/>
-  </dgm:styleLbl>
-  <dgm:styleLbl name="asst1">
-    <dgm:fillClrLst meth="repeat">
-      <a:schemeClr val="accent1"/>
-    </dgm:fillClrLst>
-    <dgm:linClrLst meth="repeat">
-      <a:schemeClr val="lt1"/>
-    </dgm:linClrLst>
-    <dgm:effectClrLst/>
-    <dgm:txLinClrLst/>
-    <dgm:txFillClrLst/>
-    <dgm:txEffectClrLst/>
-  </dgm:styleLbl>
-  <dgm:styleLbl name="asst2">
-    <dgm:fillClrLst meth="repeat">
-      <a:schemeClr val="accent1"/>
-    </dgm:fillClrLst>
-    <dgm:linClrLst meth="repeat">
-      <a:schemeClr val="lt1"/>
-    </dgm:linClrLst>
-    <dgm:effectClrLst/>
-    <dgm:txLinClrLst/>
-    <dgm:txFillClrLst/>
-    <dgm:txEffectClrLst/>
-  </dgm:styleLbl>
-  <dgm:styleLbl name="asst3">
-    <dgm:fillClrLst meth="repeat">
-      <a:schemeClr val="accent1"/>
-    </dgm:fillClrLst>
-    <dgm:linClrLst meth="repeat">
-      <a:schemeClr val="lt1"/>
-    </dgm:linClrLst>
-    <dgm:effectClrLst/>
-    <dgm:txLinClrLst/>
-    <dgm:txFillClrLst/>
-    <dgm:txEffectClrLst/>
-  </dgm:styleLbl>
-  <dgm:styleLbl name="asst4">
-    <dgm:fillClrLst meth="repeat">
-      <a:schemeClr val="accent1"/>
-    </dgm:fillClrLst>
-    <dgm:linClrLst meth="repeat">
-      <a:schemeClr val="lt1"/>
-    </dgm:linClrLst>
-    <dgm:effectClrLst/>
-    <dgm:txLinClrLst/>
-    <dgm:txFillClrLst/>
-    <dgm:txEffectClrLst/>
-  </dgm:styleLbl>
-  <dgm:styleLbl name="parChTrans2D1">
-    <dgm:fillClrLst meth="repeat">
-      <a:schemeClr val="accent1">
-        <a:tint val="60000"/>
-      </a:schemeClr>
-    </dgm:fillClrLst>
-    <dgm:linClrLst meth="repeat">
-      <a:schemeClr val="accent1">
-        <a:tint val="60000"/>
-      </a:schemeClr>
-    </dgm:linClrLst>
-    <dgm:effectClrLst/>
-    <dgm:txLinClrLst/>
-    <dgm:txFillClrLst meth="repeat">
-      <a:schemeClr val="lt1"/>
-    </dgm:txFillClrLst>
-    <dgm:txEffectClrLst/>
-  </dgm:styleLbl>
-  <dgm:styleLbl name="parChTrans2D2">
-    <dgm:fillClrLst meth="repeat">
-      <a:schemeClr val="accent1"/>
-    </dgm:fillClrLst>
-    <dgm:linClrLst meth="repeat">
-      <a:schemeClr val="accent1"/>
-    </dgm:linClrLst>
-    <dgm:effectClrLst/>
-    <dgm:txLinClrLst/>
-    <dgm:txFillClrLst meth="repeat">
-      <a:schemeClr val="lt1"/>
-    </dgm:txFillClrLst>
-    <dgm:txEffectClrLst/>
-  </dgm:styleLbl>
-  <dgm:styleLbl name="parChTrans2D3">
-    <dgm:fillClrLst meth="repeat">
-      <a:schemeClr val="accent1"/>
-    </dgm:fillClrLst>
-    <dgm:linClrLst meth="repeat">
-      <a:schemeClr val="accent1"/>
-    </dgm:linClrLst>
-    <dgm:effectClrLst/>
-    <dgm:txLinClrLst/>
-    <dgm:txFillClrLst meth="repeat">
-      <a:schemeClr val="lt1"/>
-    </dgm:txFillClrLst>
-    <dgm:txEffectClrLst/>
-  </dgm:styleLbl>
-  <dgm:styleLbl name="parChTrans2D4">
-    <dgm:fillClrLst meth="repeat">
-      <a:schemeClr val="accent1"/>
-    </dgm:fillClrLst>
-    <dgm:linClrLst meth="repeat">
-      <a:schemeClr val="accent1"/>
-    </dgm:linClrLst>
-    <dgm:effectClrLst/>
-    <dgm:txLinClrLst/>
-    <dgm:txFillClrLst meth="repeat">
-      <a:schemeClr val="lt1"/>
-    </dgm:txFillClrLst>
-    <dgm:txEffectClrLst/>
-  </dgm:styleLbl>
-  <dgm:styleLbl name="parChTrans1D1">
-    <dgm:fillClrLst meth="repeat">
-      <a:schemeClr val="accent1"/>
-    </dgm:fillClrLst>
-    <dgm:linClrLst meth="repeat">
-      <a:schemeClr val="accent1">
-        <a:shade val="60000"/>
-      </a:schemeClr>
-    </dgm:linClrLst>
-    <dgm:effectClrLst/>
-    <dgm:txLinClrLst/>
-    <dgm:txFillClrLst meth="repeat">
-      <a:schemeClr val="tx1"/>
-    </dgm:txFillClrLst>
-    <dgm:txEffectClrLst/>
-  </dgm:styleLbl>
-  <dgm:styleLbl name="parChTrans1D2">
-    <dgm:fillClrLst meth="repeat">
-      <a:schemeClr val="accent1"/>
-    </dgm:fillClrLst>
-    <dgm:linClrLst meth="repeat">
-      <a:schemeClr val="accent1">
-        <a:shade val="60000"/>
-      </a:schemeClr>
-    </dgm:linClrLst>
-    <dgm:effectClrLst/>
-    <dgm:txLinClrLst/>
-    <dgm:txFillClrLst meth="repeat">
-      <a:schemeClr val="tx1"/>
-    </dgm:txFillClrLst>
-    <dgm:txEffectClrLst/>
-  </dgm:styleLbl>
-  <dgm:styleLbl name="parChTrans1D3">
-    <dgm:fillClrLst meth="repeat">
-      <a:schemeClr val="accent1"/>
-    </dgm:fillClrLst>
-    <dgm:linClrLst meth="repeat">
-      <a:schemeClr val="accent1">
-        <a:shade val="80000"/>
-      </a:schemeClr>
-    </dgm:linClrLst>
-    <dgm:effectClrLst/>
-    <dgm:txLinClrLst/>
-    <dgm:txFillClrLst meth="repeat">
-      <a:schemeClr val="tx1"/>
-    </dgm:txFillClrLst>
-    <dgm:txEffectClrLst/>
-  </dgm:styleLbl>
-  <dgm:styleLbl name="parChTrans1D4">
-    <dgm:fillClrLst meth="repeat">
-      <a:schemeClr val="accent1"/>
-    </dgm:fillClrLst>
-    <dgm:linClrLst meth="repeat">
-      <a:schemeClr val="accent1">
-        <a:shade val="80000"/>
-      </a:schemeClr>
-    </dgm:linClrLst>
-    <dgm:effectClrLst/>
-    <dgm:txLinClrLst/>
-    <dgm:txFillClrLst meth="repeat">
-      <a:schemeClr val="tx1"/>
-    </dgm:txFillClrLst>
-    <dgm:txEffectClrLst/>
-  </dgm:styleLbl>
-  <dgm:styleLbl name="fgAcc1">
-    <dgm:fillClrLst meth="repeat">
-      <a:schemeClr val="lt1">
-        <a:alpha val="90000"/>
-      </a:schemeClr>
-    </dgm:fillClrLst>
-    <dgm:linClrLst meth="repeat">
-      <a:schemeClr val="accent1"/>
-    </dgm:linClrLst>
-    <dgm:effectClrLst/>
-    <dgm:txLinClrLst/>
-    <dgm:txFillClrLst meth="repeat">
-      <a:schemeClr val="dk1"/>
-    </dgm:txFillClrLst>
-    <dgm:txEffectClrLst/>
-  </dgm:styleLbl>
-  <dgm:styleLbl name="conFgAcc1">
-    <dgm:fillClrLst meth="repeat">
-      <a:schemeClr val="lt1">
-        <a:alpha val="90000"/>
-      </a:schemeClr>
-    </dgm:fillClrLst>
-    <dgm:linClrLst meth="repeat">
-      <a:schemeClr val="accent1"/>
-    </dgm:linClrLst>
-    <dgm:effectClrLst/>
-    <dgm:txLinClrLst/>
-    <dgm:txFillClrLst meth="repeat">
-      <a:schemeClr val="dk1"/>
-    </dgm:txFillClrLst>
-    <dgm:txEffectClrLst/>
-  </dgm:styleLbl>
-  <dgm:styleLbl name="alignAcc1">
-    <dgm:fillClrLst meth="repeat">
-      <a:schemeClr val="lt1">
-        <a:alpha val="90000"/>
-      </a:schemeClr>
-    </dgm:fillClrLst>
-    <dgm:linClrLst meth="repeat">
-      <a:schemeClr val="accent1"/>
-    </dgm:linClrLst>
-    <dgm:effectClrLst/>
-    <dgm:txLinClrLst/>
-    <dgm:txFillClrLst meth="repeat">
-      <a:schemeClr val="dk1"/>
-    </dgm:txFillClrLst>
-    <dgm:txEffectClrLst/>
-  </dgm:styleLbl>
-  <dgm:styleLbl name="trAlignAcc1">
-    <dgm:fillClrLst meth="repeat">
-      <a:schemeClr val="lt1">
-        <a:alpha val="40000"/>
-      </a:schemeClr>
-    </dgm:fillClrLst>
-    <dgm:linClrLst meth="repeat">
-      <a:schemeClr val="accent1"/>
-    </dgm:linClrLst>
-    <dgm:effectClrLst/>
-    <dgm:txLinClrLst/>
-    <dgm:txFillClrLst meth="repeat">
-      <a:schemeClr val="dk1"/>
-    </dgm:txFillClrLst>
-    <dgm:txEffectClrLst/>
-  </dgm:styleLbl>
-  <dgm:styleLbl name="bgAcc1">
-    <dgm:fillClrLst meth="repeat">
-      <a:schemeClr val="lt1">
-        <a:alpha val="90000"/>
-      </a:schemeClr>
-    </dgm:fillClrLst>
-    <dgm:linClrLst meth="repeat">
-      <a:schemeClr val="accent1"/>
-    </dgm:linClrLst>
-    <dgm:effectClrLst/>
-    <dgm:txLinClrLst/>
-    <dgm:txFillClrLst meth="repeat">
-      <a:schemeClr val="dk1"/>
-    </dgm:txFillClrLst>
-    <dgm:txEffectClrLst/>
-  </dgm:styleLbl>
-  <dgm:styleLbl name="solidFgAcc1">
-    <dgm:fillClrLst meth="repeat">
-      <a:schemeClr val="lt1"/>
-    </dgm:fillClrLst>
-    <dgm:linClrLst meth="repeat">
-      <a:schemeClr val="accent1"/>
-    </dgm:linClrLst>
-    <dgm:effectClrLst/>
-    <dgm:txLinClrLst/>
-    <dgm:txFillClrLst meth="repeat">
-      <a:schemeClr val="dk1"/>
-    </dgm:txFillClrLst>
-    <dgm:txEffectClrLst/>
-  </dgm:styleLbl>
-  <dgm:styleLbl name="solidAlignAcc1">
-    <dgm:fillClrLst meth="repeat">
-      <a:schemeClr val="lt1"/>
-    </dgm:fillClrLst>
-    <dgm:linClrLst meth="repeat">
-      <a:schemeClr val="accent1"/>
-    </dgm:linClrLst>
-    <dgm:effectClrLst/>
-    <dgm:txLinClrLst/>
-    <dgm:txFillClrLst meth="repeat">
-      <a:schemeClr val="dk1"/>
-    </dgm:txFillClrLst>
-    <dgm:txEffectClrLst/>
-  </dgm:styleLbl>
-  <dgm:styleLbl name="solidBgAcc1">
-    <dgm:fillClrLst meth="repeat">
-      <a:schemeClr val="lt1"/>
-    </dgm:fillClrLst>
-    <dgm:linClrLst meth="repeat">
-      <a:schemeClr val="accent1"/>
-    </dgm:linClrLst>
-    <dgm:effectClrLst/>
-    <dgm:txLinClrLst/>
-    <dgm:txFillClrLst meth="repeat">
-      <a:schemeClr val="dk1"/>
-    </dgm:txFillClrLst>
-    <dgm:txEffectClrLst/>
-  </dgm:styleLbl>
-  <dgm:styleLbl name="fgAccFollowNode1">
-    <dgm:fillClrLst meth="repeat">
-      <a:schemeClr val="accent1">
-        <a:alpha val="90000"/>
-        <a:tint val="40000"/>
-      </a:schemeClr>
-    </dgm:fillClrLst>
-    <dgm:linClrLst meth="repeat">
-      <a:schemeClr val="accent1">
-        <a:alpha val="90000"/>
-        <a:tint val="40000"/>
-      </a:schemeClr>
-    </dgm:linClrLst>
-    <dgm:effectClrLst/>
-    <dgm:txLinClrLst/>
-    <dgm:txFillClrLst meth="repeat">
-      <a:schemeClr val="dk1"/>
-    </dgm:txFillClrLst>
-    <dgm:txEffectClrLst/>
-  </dgm:styleLbl>
-  <dgm:styleLbl name="alignAccFollowNode1">
-    <dgm:fillClrLst meth="repeat">
-      <a:schemeClr val="accent1">
-        <a:alpha val="90000"/>
-        <a:tint val="40000"/>
-      </a:schemeClr>
-    </dgm:fillClrLst>
-    <dgm:linClrLst meth="repeat">
-      <a:schemeClr val="accent1">
-        <a:alpha val="90000"/>
-        <a:tint val="40000"/>
-      </a:schemeClr>
-    </dgm:linClrLst>
-    <dgm:effectClrLst/>
-    <dgm:txLinClrLst/>
-    <dgm:txFillClrLst meth="repeat">
-      <a:schemeClr val="dk1"/>
-    </dgm:txFillClrLst>
-    <dgm:txEffectClrLst/>
-  </dgm:styleLbl>
-  <dgm:styleLbl name="bgAccFollowNode1">
-    <dgm:fillClrLst meth="repeat">
-      <a:schemeClr val="accent1">
-        <a:alpha val="90000"/>
-        <a:tint val="40000"/>
-      </a:schemeClr>
-    </dgm:fillClrLst>
-    <dgm:linClrLst meth="repeat">
-      <a:schemeClr val="accent1">
-        <a:alpha val="90000"/>
-        <a:tint val="40000"/>
-      </a:schemeClr>
-    </dgm:linClrLst>
-    <dgm:effectClrLst/>
-    <dgm:txLinClrLst/>
-    <dgm:txFillClrLst meth="repeat">
-      <a:schemeClr val="dk1"/>
-    </dgm:txFillClrLst>
-    <dgm:txEffectClrLst/>
-  </dgm:styleLbl>
-  <dgm:styleLbl name="fgAcc0">
-    <dgm:fillClrLst meth="repeat">
-      <a:schemeClr val="lt1">
-        <a:alpha val="90000"/>
-      </a:schemeClr>
-    </dgm:fillClrLst>
-    <dgm:linClrLst meth="repeat">
-      <a:schemeClr val="accent1"/>
-    </dgm:linClrLst>
-    <dgm:effectClrLst/>
-    <dgm:txLinClrLst/>
-    <dgm:txFillClrLst meth="repeat">
-      <a:schemeClr val="dk1"/>
-    </dgm:txFillClrLst>
-    <dgm:txEffectClrLst/>
-  </dgm:styleLbl>
-  <dgm:styleLbl name="fgAcc2">
-    <dgm:fillClrLst meth="repeat">
-      <a:schemeClr val="lt1">
-        <a:alpha val="90000"/>
-      </a:schemeClr>
-    </dgm:fillClrLst>
-    <dgm:linClrLst meth="repeat">
-      <a:schemeClr val="accent1"/>
-    </dgm:linClrLst>
-    <dgm:effectClrLst/>
-    <dgm:txLinClrLst/>
-    <dgm:txFillClrLst meth="repeat">
-      <a:schemeClr val="dk1"/>
-    </dgm:txFillClrLst>
-    <dgm:txEffectClrLst/>
-  </dgm:styleLbl>
-  <dgm:styleLbl name="fgAcc3">
-    <dgm:fillClrLst meth="repeat">
-      <a:schemeClr val="lt1">
-        <a:alpha val="90000"/>
-      </a:schemeClr>
-    </dgm:fillClrLst>
-    <dgm:linClrLst meth="repeat">
-      <a:schemeClr val="accent1"/>
-    </dgm:linClrLst>
-    <dgm:effectClrLst/>
-    <dgm:txLinClrLst/>
-    <dgm:txFillClrLst meth="repeat">
-      <a:schemeClr val="dk1"/>
-    </dgm:txFillClrLst>
-    <dgm:txEffectClrLst/>
-  </dgm:styleLbl>
-  <dgm:styleLbl name="fgAcc4">
-    <dgm:fillClrLst meth="repeat">
-      <a:schemeClr val="lt1">
-        <a:alpha val="90000"/>
-      </a:schemeClr>
-    </dgm:fillClrLst>
-    <dgm:linClrLst meth="repeat">
-      <a:schemeClr val="accent1"/>
-    </dgm:linClrLst>
-    <dgm:effectClrLst/>
-    <dgm:txLinClrLst/>
-    <dgm:txFillClrLst meth="repeat">
-      <a:schemeClr val="dk1"/>
-    </dgm:txFillClrLst>
-    <dgm:txEffectClrLst/>
-  </dgm:styleLbl>
-  <dgm:styleLbl name="bgShp">
-    <dgm:fillClrLst meth="repeat">
-      <a:schemeClr val="accent1">
-        <a:tint val="40000"/>
-      </a:schemeClr>
-    </dgm:fillClrLst>
-    <dgm:linClrLst meth="repeat">
-      <a:schemeClr val="accent1"/>
-    </dgm:linClrLst>
-    <dgm:effectClrLst/>
-    <dgm:txLinClrLst/>
-    <dgm:txFillClrLst meth="repeat">
-      <a:schemeClr val="dk1"/>
-    </dgm:txFillClrLst>
-    <dgm:txEffectClrLst/>
-  </dgm:styleLbl>
-  <dgm:styleLbl name="dkBgShp">
-    <dgm:fillClrLst meth="repeat">
-      <a:schemeClr val="accent1">
-        <a:shade val="80000"/>
-      </a:schemeClr>
-    </dgm:fillClrLst>
-    <dgm:linClrLst meth="repeat">
-      <a:schemeClr val="accent1"/>
-    </dgm:linClrLst>
-    <dgm:effectClrLst/>
-    <dgm:txLinClrLst/>
-    <dgm:txFillClrLst meth="repeat">
-      <a:schemeClr val="lt1"/>
-    </dgm:txFillClrLst>
-    <dgm:txEffectClrLst/>
-  </dgm:styleLbl>
-  <dgm:styleLbl name="trBgShp">
-    <dgm:fillClrLst meth="repeat">
-      <a:schemeClr val="accent1">
-        <a:tint val="50000"/>
-        <a:alpha val="40000"/>
-      </a:schemeClr>
-    </dgm:fillClrLst>
-    <dgm:linClrLst meth="repeat">
-      <a:schemeClr val="accent1"/>
-    </dgm:linClrLst>
-    <dgm:effectClrLst/>
-    <dgm:txLinClrLst/>
-    <dgm:txFillClrLst meth="repeat">
-      <a:schemeClr val="lt1"/>
-    </dgm:txFillClrLst>
-    <dgm:txEffectClrLst/>
-  </dgm:styleLbl>
-  <dgm:styleLbl name="fgShp">
-    <dgm:fillClrLst meth="repeat">
-      <a:schemeClr val="accent1">
-        <a:tint val="60000"/>
-      </a:schemeClr>
-    </dgm:fillClrLst>
-    <dgm:linClrLst meth="repeat">
-      <a:schemeClr val="lt1"/>
-    </dgm:linClrLst>
-    <dgm:effectClrLst/>
-    <dgm:txLinClrLst/>
-    <dgm:txFillClrLst meth="repeat">
-      <a:schemeClr val="dk1"/>
-    </dgm:txFillClrLst>
-    <dgm:txEffectClrLst/>
-  </dgm:styleLbl>
-  <dgm:styleLbl name="revTx">
-    <dgm:fillClrLst meth="repeat">
-      <a:schemeClr val="lt1">
-        <a:alpha val="0"/>
-      </a:schemeClr>
-    </dgm:fillClrLst>
-    <dgm:linClrLst meth="repeat">
-      <a:schemeClr val="dk1">
-        <a:alpha val="0"/>
-      </a:schemeClr>
-    </dgm:linClrLst>
-    <dgm:effectClrLst/>
-    <dgm:txLinClrLst/>
-    <dgm:txFillClrLst meth="repeat">
-      <a:schemeClr val="tx1"/>
-    </dgm:txFillClrLst>
-    <dgm:txEffectClrLst/>
-  </dgm:styleLbl>
-</dgm:colorsDef>
-</file>
-
-<file path=ppt/diagrams/colors7.xml><?xml version="1.0" encoding="utf-8"?>
 <dgm:colorsDef xmlns:dgm="http://schemas.openxmlformats.org/drawingml/2006/diagram" xmlns:a="http://schemas.openxmlformats.org/drawingml/2006/main" uniqueId="urn:microsoft.com/office/officeart/2005/8/colors/accent1_2">
   <dgm:title val=""/>
   <dgm:desc val=""/>
@@ -6388,230 +5639,6 @@
       </dgm:t>
     </dgm:pt>
     <dgm:pt modelId="{8365AE08-8594-40F3-956B-E021AAEF9087}">
-      <dgm:prSet phldrT="[Text]"/>
-      <dgm:spPr>
-        <a:solidFill>
-          <a:schemeClr val="accent1">
-            <a:lumMod val="20000"/>
-            <a:lumOff val="80000"/>
-          </a:schemeClr>
-        </a:solidFill>
-      </dgm:spPr>
-      <dgm:t>
-        <a:bodyPr/>
-        <a:lstStyle/>
-        <a:p>
-          <a:endParaRPr lang="en-US" dirty="0"/>
-        </a:p>
-      </dgm:t>
-    </dgm:pt>
-    <dgm:pt modelId="{02B8A1AA-C4AC-4C1C-8360-EEE49739CB1C}" type="parTrans" cxnId="{243FA7B7-57AC-442C-B667-354C90D77267}">
-      <dgm:prSet/>
-      <dgm:spPr/>
-      <dgm:t>
-        <a:bodyPr/>
-        <a:lstStyle/>
-        <a:p>
-          <a:endParaRPr lang="en-US"/>
-        </a:p>
-      </dgm:t>
-    </dgm:pt>
-    <dgm:pt modelId="{A42E658F-490F-4353-A46D-311609AD3C09}" type="sibTrans" cxnId="{243FA7B7-57AC-442C-B667-354C90D77267}">
-      <dgm:prSet custT="1"/>
-      <dgm:spPr>
-        <a:solidFill>
-          <a:srgbClr val="E6D5F3"/>
-        </a:solidFill>
-      </dgm:spPr>
-      <dgm:t>
-        <a:bodyPr/>
-        <a:lstStyle/>
-        <a:p>
-          <a:endParaRPr lang="en-US" sz="3200" dirty="0"/>
-        </a:p>
-      </dgm:t>
-    </dgm:pt>
-    <dgm:pt modelId="{BB77D3F0-9858-4979-87EB-420E9F454B41}">
-      <dgm:prSet phldrT="[Text]" custT="1"/>
-      <dgm:spPr>
-        <a:solidFill>
-          <a:schemeClr val="accent1">
-            <a:lumMod val="60000"/>
-            <a:lumOff val="40000"/>
-          </a:schemeClr>
-        </a:solidFill>
-      </dgm:spPr>
-      <dgm:t>
-        <a:bodyPr/>
-        <a:lstStyle/>
-        <a:p>
-          <a:r>
-            <a:rPr lang="en-US" sz="3200" dirty="0"/>
-            <a:t>Graphic</a:t>
-          </a:r>
-        </a:p>
-      </dgm:t>
-    </dgm:pt>
-    <dgm:pt modelId="{8396CBC7-929F-4467-9635-B9B31908B80B}" type="parTrans" cxnId="{CC73E615-7CAD-4EF0-A712-10D86BEE4F60}">
-      <dgm:prSet/>
-      <dgm:spPr/>
-      <dgm:t>
-        <a:bodyPr/>
-        <a:lstStyle/>
-        <a:p>
-          <a:endParaRPr lang="en-US"/>
-        </a:p>
-      </dgm:t>
-    </dgm:pt>
-    <dgm:pt modelId="{D6C97DBD-282A-44E5-8DFF-52CD0A59D9D6}" type="sibTrans" cxnId="{CC73E615-7CAD-4EF0-A712-10D86BEE4F60}">
-      <dgm:prSet/>
-      <dgm:spPr/>
-      <dgm:t>
-        <a:bodyPr/>
-        <a:lstStyle/>
-        <a:p>
-          <a:endParaRPr lang="en-US"/>
-        </a:p>
-      </dgm:t>
-    </dgm:pt>
-    <dgm:pt modelId="{14AA8ABC-10EE-4B49-AAE0-DB6791DE9087}" type="pres">
-      <dgm:prSet presAssocID="{5AAC971C-1A25-4BFB-9FCB-42A98A74511D}" presName="Name0" presStyleCnt="0">
-        <dgm:presLayoutVars>
-          <dgm:dir/>
-          <dgm:resizeHandles val="exact"/>
-        </dgm:presLayoutVars>
-      </dgm:prSet>
-      <dgm:spPr/>
-    </dgm:pt>
-    <dgm:pt modelId="{C294CFFA-E549-47B0-8FD2-94FC8751C701}" type="pres">
-      <dgm:prSet presAssocID="{302AFE82-08D6-475A-B4DC-820A812A6BE3}" presName="node" presStyleLbl="node1" presStyleIdx="0" presStyleCnt="3" custScaleX="33145" custScaleY="25007">
-        <dgm:presLayoutVars>
-          <dgm:bulletEnabled val="1"/>
-        </dgm:presLayoutVars>
-      </dgm:prSet>
-      <dgm:spPr/>
-    </dgm:pt>
-    <dgm:pt modelId="{8CFAA49F-A07B-4B0C-9CA8-672084BBEEDF}" type="pres">
-      <dgm:prSet presAssocID="{14C5DB5F-3CFD-447F-ADC9-CF8B1B9E7047}" presName="sibTrans" presStyleLbl="sibTrans2D1" presStyleIdx="0" presStyleCnt="2" custScaleX="172749"/>
-      <dgm:spPr/>
-    </dgm:pt>
-    <dgm:pt modelId="{E3688F8C-EC6A-4D90-9E2B-4CD426EB7C55}" type="pres">
-      <dgm:prSet presAssocID="{14C5DB5F-3CFD-447F-ADC9-CF8B1B9E7047}" presName="connectorText" presStyleLbl="sibTrans2D1" presStyleIdx="0" presStyleCnt="2"/>
-      <dgm:spPr/>
-    </dgm:pt>
-    <dgm:pt modelId="{5A43F8F3-E093-481F-A76F-6203D71E1A8B}" type="pres">
-      <dgm:prSet presAssocID="{8365AE08-8594-40F3-956B-E021AAEF9087}" presName="node" presStyleLbl="node1" presStyleIdx="1" presStyleCnt="3" custScaleX="43982" custScaleY="26020">
-        <dgm:presLayoutVars>
-          <dgm:bulletEnabled val="1"/>
-        </dgm:presLayoutVars>
-      </dgm:prSet>
-      <dgm:spPr/>
-    </dgm:pt>
-    <dgm:pt modelId="{FFE92FEF-BA66-4C38-A9A2-03C20915F77E}" type="pres">
-      <dgm:prSet presAssocID="{A42E658F-490F-4353-A46D-311609AD3C09}" presName="sibTrans" presStyleLbl="sibTrans2D1" presStyleIdx="1" presStyleCnt="2" custScaleX="178557"/>
-      <dgm:spPr/>
-    </dgm:pt>
-    <dgm:pt modelId="{69E91630-959B-4EFB-A67E-71C79932BBE9}" type="pres">
-      <dgm:prSet presAssocID="{A42E658F-490F-4353-A46D-311609AD3C09}" presName="connectorText" presStyleLbl="sibTrans2D1" presStyleIdx="1" presStyleCnt="2"/>
-      <dgm:spPr/>
-    </dgm:pt>
-    <dgm:pt modelId="{FFDAAB04-1AB4-400F-B26F-668649ED7C59}" type="pres">
-      <dgm:prSet presAssocID="{BB77D3F0-9858-4979-87EB-420E9F454B41}" presName="node" presStyleLbl="node1" presStyleIdx="2" presStyleCnt="3" custScaleX="36380" custScaleY="30911">
-        <dgm:presLayoutVars>
-          <dgm:bulletEnabled val="1"/>
-        </dgm:presLayoutVars>
-      </dgm:prSet>
-      <dgm:spPr/>
-    </dgm:pt>
-  </dgm:ptLst>
-  <dgm:cxnLst>
-    <dgm:cxn modelId="{3481370A-6F97-4DF3-AAC4-2F6511C99785}" type="presOf" srcId="{302AFE82-08D6-475A-B4DC-820A812A6BE3}" destId="{C294CFFA-E549-47B0-8FD2-94FC8751C701}" srcOrd="0" destOrd="0" presId="urn:microsoft.com/office/officeart/2005/8/layout/process1"/>
-    <dgm:cxn modelId="{CC73E615-7CAD-4EF0-A712-10D86BEE4F60}" srcId="{5AAC971C-1A25-4BFB-9FCB-42A98A74511D}" destId="{BB77D3F0-9858-4979-87EB-420E9F454B41}" srcOrd="2" destOrd="0" parTransId="{8396CBC7-929F-4467-9635-B9B31908B80B}" sibTransId="{D6C97DBD-282A-44E5-8DFF-52CD0A59D9D6}"/>
-    <dgm:cxn modelId="{1263762C-7715-4D1C-8C2B-8459F19B1A07}" type="presOf" srcId="{8365AE08-8594-40F3-956B-E021AAEF9087}" destId="{5A43F8F3-E093-481F-A76F-6203D71E1A8B}" srcOrd="0" destOrd="0" presId="urn:microsoft.com/office/officeart/2005/8/layout/process1"/>
-    <dgm:cxn modelId="{7BFF99B6-EC53-4868-A32B-E9B3FD483629}" type="presOf" srcId="{14C5DB5F-3CFD-447F-ADC9-CF8B1B9E7047}" destId="{8CFAA49F-A07B-4B0C-9CA8-672084BBEEDF}" srcOrd="0" destOrd="0" presId="urn:microsoft.com/office/officeart/2005/8/layout/process1"/>
-    <dgm:cxn modelId="{243FA7B7-57AC-442C-B667-354C90D77267}" srcId="{5AAC971C-1A25-4BFB-9FCB-42A98A74511D}" destId="{8365AE08-8594-40F3-956B-E021AAEF9087}" srcOrd="1" destOrd="0" parTransId="{02B8A1AA-C4AC-4C1C-8360-EEE49739CB1C}" sibTransId="{A42E658F-490F-4353-A46D-311609AD3C09}"/>
-    <dgm:cxn modelId="{5F1560C7-FF74-4FFD-B2EA-EDC1E62EC3DB}" type="presOf" srcId="{A42E658F-490F-4353-A46D-311609AD3C09}" destId="{69E91630-959B-4EFB-A67E-71C79932BBE9}" srcOrd="1" destOrd="0" presId="urn:microsoft.com/office/officeart/2005/8/layout/process1"/>
-    <dgm:cxn modelId="{65E5B7CD-BE39-4CB3-84BC-9F28E13788CF}" type="presOf" srcId="{A42E658F-490F-4353-A46D-311609AD3C09}" destId="{FFE92FEF-BA66-4C38-A9A2-03C20915F77E}" srcOrd="0" destOrd="0" presId="urn:microsoft.com/office/officeart/2005/8/layout/process1"/>
-    <dgm:cxn modelId="{D29FC6DC-C71B-4AC3-97E1-AA1CD2501E26}" type="presOf" srcId="{14C5DB5F-3CFD-447F-ADC9-CF8B1B9E7047}" destId="{E3688F8C-EC6A-4D90-9E2B-4CD426EB7C55}" srcOrd="1" destOrd="0" presId="urn:microsoft.com/office/officeart/2005/8/layout/process1"/>
-    <dgm:cxn modelId="{7B8A6DE1-4E1C-4867-B1F7-A579C08D229A}" type="presOf" srcId="{5AAC971C-1A25-4BFB-9FCB-42A98A74511D}" destId="{14AA8ABC-10EE-4B49-AAE0-DB6791DE9087}" srcOrd="0" destOrd="0" presId="urn:microsoft.com/office/officeart/2005/8/layout/process1"/>
-    <dgm:cxn modelId="{DC432FF9-69F1-409F-97CC-5D8BA3D4121F}" type="presOf" srcId="{BB77D3F0-9858-4979-87EB-420E9F454B41}" destId="{FFDAAB04-1AB4-400F-B26F-668649ED7C59}" srcOrd="0" destOrd="0" presId="urn:microsoft.com/office/officeart/2005/8/layout/process1"/>
-    <dgm:cxn modelId="{2EE925FD-2A35-4135-A471-C9E4B3907D19}" srcId="{5AAC971C-1A25-4BFB-9FCB-42A98A74511D}" destId="{302AFE82-08D6-475A-B4DC-820A812A6BE3}" srcOrd="0" destOrd="0" parTransId="{A911A876-5527-4EBC-B629-CBF8A24353C3}" sibTransId="{14C5DB5F-3CFD-447F-ADC9-CF8B1B9E7047}"/>
-    <dgm:cxn modelId="{C0C847F9-716E-43F2-AED2-69EB0A545BF8}" type="presParOf" srcId="{14AA8ABC-10EE-4B49-AAE0-DB6791DE9087}" destId="{C294CFFA-E549-47B0-8FD2-94FC8751C701}" srcOrd="0" destOrd="0" presId="urn:microsoft.com/office/officeart/2005/8/layout/process1"/>
-    <dgm:cxn modelId="{075CEF52-CFF5-4018-BEAC-4A06270F1DD8}" type="presParOf" srcId="{14AA8ABC-10EE-4B49-AAE0-DB6791DE9087}" destId="{8CFAA49F-A07B-4B0C-9CA8-672084BBEEDF}" srcOrd="1" destOrd="0" presId="urn:microsoft.com/office/officeart/2005/8/layout/process1"/>
-    <dgm:cxn modelId="{6DB033C3-09F0-442F-8C64-7C18201292E7}" type="presParOf" srcId="{8CFAA49F-A07B-4B0C-9CA8-672084BBEEDF}" destId="{E3688F8C-EC6A-4D90-9E2B-4CD426EB7C55}" srcOrd="0" destOrd="0" presId="urn:microsoft.com/office/officeart/2005/8/layout/process1"/>
-    <dgm:cxn modelId="{E821EF25-8233-440D-A3D0-77D0344278AD}" type="presParOf" srcId="{14AA8ABC-10EE-4B49-AAE0-DB6791DE9087}" destId="{5A43F8F3-E093-481F-A76F-6203D71E1A8B}" srcOrd="2" destOrd="0" presId="urn:microsoft.com/office/officeart/2005/8/layout/process1"/>
-    <dgm:cxn modelId="{0A52137D-A6BB-4EED-B754-531C03C25AF2}" type="presParOf" srcId="{14AA8ABC-10EE-4B49-AAE0-DB6791DE9087}" destId="{FFE92FEF-BA66-4C38-A9A2-03C20915F77E}" srcOrd="3" destOrd="0" presId="urn:microsoft.com/office/officeart/2005/8/layout/process1"/>
-    <dgm:cxn modelId="{CAD47085-2A59-468E-8553-FE3F97183F76}" type="presParOf" srcId="{FFE92FEF-BA66-4C38-A9A2-03C20915F77E}" destId="{69E91630-959B-4EFB-A67E-71C79932BBE9}" srcOrd="0" destOrd="0" presId="urn:microsoft.com/office/officeart/2005/8/layout/process1"/>
-    <dgm:cxn modelId="{8CCB838F-A9E6-4B2E-B418-47A1AF50E559}" type="presParOf" srcId="{14AA8ABC-10EE-4B49-AAE0-DB6791DE9087}" destId="{FFDAAB04-1AB4-400F-B26F-668649ED7C59}" srcOrd="4" destOrd="0" presId="urn:microsoft.com/office/officeart/2005/8/layout/process1"/>
-  </dgm:cxnLst>
-  <dgm:bg/>
-  <dgm:whole/>
-  <dgm:extLst>
-    <a:ext uri="http://schemas.microsoft.com/office/drawing/2008/diagram">
-      <dsp:dataModelExt xmlns:dsp="http://schemas.microsoft.com/office/drawing/2008/diagram" relId="rId6" minVer="http://schemas.openxmlformats.org/drawingml/2006/diagram"/>
-    </a:ext>
-  </dgm:extLst>
-</dgm:dataModel>
-</file>
-
-<file path=ppt/diagrams/data6.xml><?xml version="1.0" encoding="utf-8"?>
-<dgm:dataModel xmlns:dgm="http://schemas.openxmlformats.org/drawingml/2006/diagram" xmlns:a="http://schemas.openxmlformats.org/drawingml/2006/main">
-  <dgm:ptLst>
-    <dgm:pt modelId="{5AAC971C-1A25-4BFB-9FCB-42A98A74511D}" type="doc">
-      <dgm:prSet loTypeId="urn:microsoft.com/office/officeart/2005/8/layout/process1" loCatId="process" qsTypeId="urn:microsoft.com/office/officeart/2005/8/quickstyle/simple1" qsCatId="simple" csTypeId="urn:microsoft.com/office/officeart/2005/8/colors/accent1_2" csCatId="accent1" phldr="1"/>
-      <dgm:spPr/>
-    </dgm:pt>
-    <dgm:pt modelId="{302AFE82-08D6-475A-B4DC-820A812A6BE3}">
-      <dgm:prSet phldrT="[Text]" custT="1"/>
-      <dgm:spPr>
-        <a:solidFill>
-          <a:schemeClr val="accent1">
-            <a:lumMod val="60000"/>
-            <a:lumOff val="40000"/>
-          </a:schemeClr>
-        </a:solidFill>
-      </dgm:spPr>
-      <dgm:t>
-        <a:bodyPr/>
-        <a:lstStyle/>
-        <a:p>
-          <a:r>
-            <a:rPr lang="en-US" sz="3200" dirty="0"/>
-            <a:t>Data</a:t>
-          </a:r>
-        </a:p>
-      </dgm:t>
-    </dgm:pt>
-    <dgm:pt modelId="{A911A876-5527-4EBC-B629-CBF8A24353C3}" type="parTrans" cxnId="{2EE925FD-2A35-4135-A471-C9E4B3907D19}">
-      <dgm:prSet/>
-      <dgm:spPr/>
-      <dgm:t>
-        <a:bodyPr/>
-        <a:lstStyle/>
-        <a:p>
-          <a:endParaRPr lang="en-US"/>
-        </a:p>
-      </dgm:t>
-    </dgm:pt>
-    <dgm:pt modelId="{14C5DB5F-3CFD-447F-ADC9-CF8B1B9E7047}" type="sibTrans" cxnId="{2EE925FD-2A35-4135-A471-C9E4B3907D19}">
-      <dgm:prSet/>
-      <dgm:spPr>
-        <a:solidFill>
-          <a:schemeClr val="accent3">
-            <a:lumMod val="20000"/>
-            <a:lumOff val="80000"/>
-          </a:schemeClr>
-        </a:solidFill>
-      </dgm:spPr>
-      <dgm:t>
-        <a:bodyPr/>
-        <a:lstStyle/>
-        <a:p>
-          <a:endParaRPr lang="en-US" dirty="0"/>
-        </a:p>
-      </dgm:t>
-    </dgm:pt>
-    <dgm:pt modelId="{8365AE08-8594-40F3-956B-E021AAEF9087}">
       <dgm:prSet phldrT="[Text]" custT="1"/>
       <dgm:spPr>
         <a:solidFill>
@@ -6784,7 +5811,7 @@
 </dgm:dataModel>
 </file>
 
-<file path=ppt/diagrams/data7.xml><?xml version="1.0" encoding="utf-8"?>
+<file path=ppt/diagrams/data6.xml><?xml version="1.0" encoding="utf-8"?>
 <dgm:dataModel xmlns:dgm="http://schemas.openxmlformats.org/drawingml/2006/diagram" xmlns:a="http://schemas.openxmlformats.org/drawingml/2006/main">
   <dgm:ptLst>
     <dgm:pt modelId="{5AAC971C-1A25-4BFB-9FCB-42A98A74511D}" type="doc">
@@ -8525,380 +7552,6 @@
       </dsp:nvSpPr>
       <dsp:spPr>
         <a:xfrm>
-          <a:off x="1786" y="1091796"/>
-          <a:ext cx="1800560" cy="815084"/>
-        </a:xfrm>
-        <a:prstGeom prst="roundRect">
-          <a:avLst>
-            <a:gd name="adj" fmla="val 10000"/>
-          </a:avLst>
-        </a:prstGeom>
-        <a:solidFill>
-          <a:schemeClr val="accent1">
-            <a:lumMod val="60000"/>
-            <a:lumOff val="40000"/>
-          </a:schemeClr>
-        </a:solidFill>
-        <a:ln w="12700" cap="flat" cmpd="sng" algn="ctr">
-          <a:solidFill>
-            <a:schemeClr val="lt1">
-              <a:hueOff val="0"/>
-              <a:satOff val="0"/>
-              <a:lumOff val="0"/>
-              <a:alphaOff val="0"/>
-            </a:schemeClr>
-          </a:solidFill>
-          <a:prstDash val="solid"/>
-          <a:miter lim="800000"/>
-        </a:ln>
-        <a:effectLst/>
-      </dsp:spPr>
-      <dsp:style>
-        <a:lnRef idx="2">
-          <a:scrgbClr r="0" g="0" b="0"/>
-        </a:lnRef>
-        <a:fillRef idx="1">
-          <a:scrgbClr r="0" g="0" b="0"/>
-        </a:fillRef>
-        <a:effectRef idx="0">
-          <a:scrgbClr r="0" g="0" b="0"/>
-        </a:effectRef>
-        <a:fontRef idx="minor">
-          <a:schemeClr val="lt1"/>
-        </a:fontRef>
-      </dsp:style>
-      <dsp:txBody>
-        <a:bodyPr spcFirstLastPara="0" vert="horz" wrap="square" lIns="121920" tIns="121920" rIns="121920" bIns="121920" numCol="1" spcCol="1270" anchor="ctr" anchorCtr="0">
-          <a:noAutofit/>
-        </a:bodyPr>
-        <a:lstStyle/>
-        <a:p>
-          <a:pPr marL="0" lvl="0" indent="0" algn="ctr" defTabSz="1422400">
-            <a:lnSpc>
-              <a:spcPct val="90000"/>
-            </a:lnSpc>
-            <a:spcBef>
-              <a:spcPct val="0"/>
-            </a:spcBef>
-            <a:spcAft>
-              <a:spcPct val="35000"/>
-            </a:spcAft>
-            <a:buNone/>
-          </a:pPr>
-          <a:r>
-            <a:rPr lang="en-US" sz="3200" kern="1200" dirty="0"/>
-            <a:t>Data</a:t>
-          </a:r>
-        </a:p>
-      </dsp:txBody>
-      <dsp:txXfrm>
-        <a:off x="25659" y="1115669"/>
-        <a:ext cx="1752814" cy="767338"/>
-      </dsp:txXfrm>
-    </dsp:sp>
-    <dsp:sp modelId="{8CFAA49F-A07B-4B0C-9CA8-672084BBEEDF}">
-      <dsp:nvSpPr>
-        <dsp:cNvPr id="0" name=""/>
-        <dsp:cNvSpPr/>
-      </dsp:nvSpPr>
-      <dsp:spPr>
-        <a:xfrm>
-          <a:off x="1926673" y="825723"/>
-          <a:ext cx="1989487" cy="1347229"/>
-        </a:xfrm>
-        <a:prstGeom prst="rightArrow">
-          <a:avLst>
-            <a:gd name="adj1" fmla="val 60000"/>
-            <a:gd name="adj2" fmla="val 50000"/>
-          </a:avLst>
-        </a:prstGeom>
-        <a:solidFill>
-          <a:schemeClr val="accent3">
-            <a:lumMod val="20000"/>
-            <a:lumOff val="80000"/>
-          </a:schemeClr>
-        </a:solidFill>
-        <a:ln>
-          <a:noFill/>
-        </a:ln>
-        <a:effectLst/>
-      </dsp:spPr>
-      <dsp:style>
-        <a:lnRef idx="0">
-          <a:scrgbClr r="0" g="0" b="0"/>
-        </a:lnRef>
-        <a:fillRef idx="1">
-          <a:scrgbClr r="0" g="0" b="0"/>
-        </a:fillRef>
-        <a:effectRef idx="0">
-          <a:scrgbClr r="0" g="0" b="0"/>
-        </a:effectRef>
-        <a:fontRef idx="minor">
-          <a:schemeClr val="lt1"/>
-        </a:fontRef>
-      </dsp:style>
-      <dsp:txBody>
-        <a:bodyPr spcFirstLastPara="0" vert="horz" wrap="square" lIns="0" tIns="0" rIns="0" bIns="0" numCol="1" spcCol="1270" anchor="ctr" anchorCtr="0">
-          <a:noAutofit/>
-        </a:bodyPr>
-        <a:lstStyle/>
-        <a:p>
-          <a:pPr marL="0" lvl="0" indent="0" algn="ctr" defTabSz="2444750">
-            <a:lnSpc>
-              <a:spcPct val="90000"/>
-            </a:lnSpc>
-            <a:spcBef>
-              <a:spcPct val="0"/>
-            </a:spcBef>
-            <a:spcAft>
-              <a:spcPct val="35000"/>
-            </a:spcAft>
-            <a:buNone/>
-          </a:pPr>
-          <a:endParaRPr lang="en-US" sz="5500" kern="1200" dirty="0"/>
-        </a:p>
-      </dsp:txBody>
-      <dsp:txXfrm>
-        <a:off x="1926673" y="1095169"/>
-        <a:ext cx="1585318" cy="808337"/>
-      </dsp:txXfrm>
-    </dsp:sp>
-    <dsp:sp modelId="{5A43F8F3-E093-481F-A76F-6203D71E1A8B}">
-      <dsp:nvSpPr>
-        <dsp:cNvPr id="0" name=""/>
-        <dsp:cNvSpPr/>
-      </dsp:nvSpPr>
-      <dsp:spPr>
-        <a:xfrm>
-          <a:off x="3975297" y="1075287"/>
-          <a:ext cx="2389267" cy="848102"/>
-        </a:xfrm>
-        <a:prstGeom prst="roundRect">
-          <a:avLst>
-            <a:gd name="adj" fmla="val 10000"/>
-          </a:avLst>
-        </a:prstGeom>
-        <a:solidFill>
-          <a:schemeClr val="accent1">
-            <a:lumMod val="20000"/>
-            <a:lumOff val="80000"/>
-          </a:schemeClr>
-        </a:solidFill>
-        <a:ln w="12700" cap="flat" cmpd="sng" algn="ctr">
-          <a:solidFill>
-            <a:schemeClr val="lt1">
-              <a:hueOff val="0"/>
-              <a:satOff val="0"/>
-              <a:lumOff val="0"/>
-              <a:alphaOff val="0"/>
-            </a:schemeClr>
-          </a:solidFill>
-          <a:prstDash val="solid"/>
-          <a:miter lim="800000"/>
-        </a:ln>
-        <a:effectLst/>
-      </dsp:spPr>
-      <dsp:style>
-        <a:lnRef idx="2">
-          <a:scrgbClr r="0" g="0" b="0"/>
-        </a:lnRef>
-        <a:fillRef idx="1">
-          <a:scrgbClr r="0" g="0" b="0"/>
-        </a:fillRef>
-        <a:effectRef idx="0">
-          <a:scrgbClr r="0" g="0" b="0"/>
-        </a:effectRef>
-        <a:fontRef idx="minor">
-          <a:schemeClr val="lt1"/>
-        </a:fontRef>
-      </dsp:style>
-      <dsp:txBody>
-        <a:bodyPr spcFirstLastPara="0" vert="horz" wrap="square" lIns="140970" tIns="140970" rIns="140970" bIns="140970" numCol="1" spcCol="1270" anchor="ctr" anchorCtr="0">
-          <a:noAutofit/>
-        </a:bodyPr>
-        <a:lstStyle/>
-        <a:p>
-          <a:pPr marL="0" lvl="0" indent="0" algn="ctr" defTabSz="1644650">
-            <a:lnSpc>
-              <a:spcPct val="90000"/>
-            </a:lnSpc>
-            <a:spcBef>
-              <a:spcPct val="0"/>
-            </a:spcBef>
-            <a:spcAft>
-              <a:spcPct val="35000"/>
-            </a:spcAft>
-            <a:buNone/>
-          </a:pPr>
-          <a:endParaRPr lang="en-US" sz="3700" kern="1200" dirty="0"/>
-        </a:p>
-      </dsp:txBody>
-      <dsp:txXfrm>
-        <a:off x="4000137" y="1100127"/>
-        <a:ext cx="2339587" cy="798422"/>
-      </dsp:txXfrm>
-    </dsp:sp>
-    <dsp:sp modelId="{FFE92FEF-BA66-4C38-A9A2-03C20915F77E}">
-      <dsp:nvSpPr>
-        <dsp:cNvPr id="0" name=""/>
-        <dsp:cNvSpPr/>
-      </dsp:nvSpPr>
-      <dsp:spPr>
-        <a:xfrm>
-          <a:off x="6455446" y="825723"/>
-          <a:ext cx="2056375" cy="1347229"/>
-        </a:xfrm>
-        <a:prstGeom prst="rightArrow">
-          <a:avLst>
-            <a:gd name="adj1" fmla="val 60000"/>
-            <a:gd name="adj2" fmla="val 50000"/>
-          </a:avLst>
-        </a:prstGeom>
-        <a:solidFill>
-          <a:srgbClr val="E6D5F3"/>
-        </a:solidFill>
-        <a:ln>
-          <a:noFill/>
-        </a:ln>
-        <a:effectLst/>
-      </dsp:spPr>
-      <dsp:style>
-        <a:lnRef idx="0">
-          <a:scrgbClr r="0" g="0" b="0"/>
-        </a:lnRef>
-        <a:fillRef idx="1">
-          <a:scrgbClr r="0" g="0" b="0"/>
-        </a:fillRef>
-        <a:effectRef idx="0">
-          <a:scrgbClr r="0" g="0" b="0"/>
-        </a:effectRef>
-        <a:fontRef idx="minor">
-          <a:schemeClr val="lt1"/>
-        </a:fontRef>
-      </dsp:style>
-      <dsp:txBody>
-        <a:bodyPr spcFirstLastPara="0" vert="horz" wrap="square" lIns="0" tIns="0" rIns="0" bIns="0" numCol="1" spcCol="1270" anchor="ctr" anchorCtr="0">
-          <a:noAutofit/>
-        </a:bodyPr>
-        <a:lstStyle/>
-        <a:p>
-          <a:pPr marL="0" lvl="0" indent="0" algn="ctr" defTabSz="1422400">
-            <a:lnSpc>
-              <a:spcPct val="90000"/>
-            </a:lnSpc>
-            <a:spcBef>
-              <a:spcPct val="0"/>
-            </a:spcBef>
-            <a:spcAft>
-              <a:spcPct val="35000"/>
-            </a:spcAft>
-            <a:buNone/>
-          </a:pPr>
-          <a:endParaRPr lang="en-US" sz="3200" kern="1200" dirty="0"/>
-        </a:p>
-      </dsp:txBody>
-      <dsp:txXfrm>
-        <a:off x="6455446" y="1095169"/>
-        <a:ext cx="1652206" cy="808337"/>
-      </dsp:txXfrm>
-    </dsp:sp>
-    <dsp:sp modelId="{FFDAAB04-1AB4-400F-B26F-668649ED7C59}">
-      <dsp:nvSpPr>
-        <dsp:cNvPr id="0" name=""/>
-        <dsp:cNvSpPr/>
-      </dsp:nvSpPr>
-      <dsp:spPr>
-        <a:xfrm>
-          <a:off x="8537515" y="995578"/>
-          <a:ext cx="1976298" cy="1007520"/>
-        </a:xfrm>
-        <a:prstGeom prst="roundRect">
-          <a:avLst>
-            <a:gd name="adj" fmla="val 10000"/>
-          </a:avLst>
-        </a:prstGeom>
-        <a:solidFill>
-          <a:schemeClr val="accent1">
-            <a:lumMod val="60000"/>
-            <a:lumOff val="40000"/>
-          </a:schemeClr>
-        </a:solidFill>
-        <a:ln w="12700" cap="flat" cmpd="sng" algn="ctr">
-          <a:solidFill>
-            <a:schemeClr val="lt1">
-              <a:hueOff val="0"/>
-              <a:satOff val="0"/>
-              <a:lumOff val="0"/>
-              <a:alphaOff val="0"/>
-            </a:schemeClr>
-          </a:solidFill>
-          <a:prstDash val="solid"/>
-          <a:miter lim="800000"/>
-        </a:ln>
-        <a:effectLst/>
-      </dsp:spPr>
-      <dsp:style>
-        <a:lnRef idx="2">
-          <a:scrgbClr r="0" g="0" b="0"/>
-        </a:lnRef>
-        <a:fillRef idx="1">
-          <a:scrgbClr r="0" g="0" b="0"/>
-        </a:fillRef>
-        <a:effectRef idx="0">
-          <a:scrgbClr r="0" g="0" b="0"/>
-        </a:effectRef>
-        <a:fontRef idx="minor">
-          <a:schemeClr val="lt1"/>
-        </a:fontRef>
-      </dsp:style>
-      <dsp:txBody>
-        <a:bodyPr spcFirstLastPara="0" vert="horz" wrap="square" lIns="121920" tIns="121920" rIns="121920" bIns="121920" numCol="1" spcCol="1270" anchor="ctr" anchorCtr="0">
-          <a:noAutofit/>
-        </a:bodyPr>
-        <a:lstStyle/>
-        <a:p>
-          <a:pPr marL="0" lvl="0" indent="0" algn="ctr" defTabSz="1422400">
-            <a:lnSpc>
-              <a:spcPct val="90000"/>
-            </a:lnSpc>
-            <a:spcBef>
-              <a:spcPct val="0"/>
-            </a:spcBef>
-            <a:spcAft>
-              <a:spcPct val="35000"/>
-            </a:spcAft>
-            <a:buNone/>
-          </a:pPr>
-          <a:r>
-            <a:rPr lang="en-US" sz="3200" kern="1200" dirty="0"/>
-            <a:t>Graphic</a:t>
-          </a:r>
-        </a:p>
-      </dsp:txBody>
-      <dsp:txXfrm>
-        <a:off x="8567024" y="1025087"/>
-        <a:ext cx="1917280" cy="948502"/>
-      </dsp:txXfrm>
-    </dsp:sp>
-  </dsp:spTree>
-</dsp:drawing>
-</file>
-
-<file path=ppt/diagrams/drawing6.xml><?xml version="1.0" encoding="utf-8"?>
-<dsp:drawing xmlns:dgm="http://schemas.openxmlformats.org/drawingml/2006/diagram" xmlns:dsp="http://schemas.microsoft.com/office/drawing/2008/diagram" xmlns:a="http://schemas.openxmlformats.org/drawingml/2006/main">
-  <dsp:spTree>
-    <dsp:nvGrpSpPr>
-      <dsp:cNvPr id="0" name=""/>
-      <dsp:cNvGrpSpPr/>
-    </dsp:nvGrpSpPr>
-    <dsp:grpSpPr/>
-    <dsp:sp modelId="{C294CFFA-E549-47B0-8FD2-94FC8751C701}">
-      <dsp:nvSpPr>
-        <dsp:cNvPr id="0" name=""/>
-        <dsp:cNvSpPr/>
-      </dsp:nvSpPr>
-      <dsp:spPr>
-        <a:xfrm>
           <a:off x="1083" y="1085596"/>
           <a:ext cx="1746101" cy="827483"/>
         </a:xfrm>
@@ -9264,7 +7917,7 @@
 </dsp:drawing>
 </file>
 
-<file path=ppt/diagrams/drawing7.xml><?xml version="1.0" encoding="utf-8"?>
+<file path=ppt/diagrams/drawing6.xml><?xml version="1.0" encoding="utf-8"?>
 <dsp:drawing xmlns:dgm="http://schemas.openxmlformats.org/drawingml/2006/diagram" xmlns:dsp="http://schemas.microsoft.com/office/drawing/2008/diagram" xmlns:a="http://schemas.openxmlformats.org/drawingml/2006/main">
   <dsp:spTree>
     <dsp:nvGrpSpPr>
@@ -10511,152 +9164,6 @@
 </dgm:layoutDef>
 </file>
 
-<file path=ppt/diagrams/layout7.xml><?xml version="1.0" encoding="utf-8"?>
-<dgm:layoutDef xmlns:dgm="http://schemas.openxmlformats.org/drawingml/2006/diagram" xmlns:a="http://schemas.openxmlformats.org/drawingml/2006/main" uniqueId="urn:microsoft.com/office/officeart/2005/8/layout/process1">
-  <dgm:title val=""/>
-  <dgm:desc val=""/>
-  <dgm:catLst>
-    <dgm:cat type="process" pri="1000"/>
-    <dgm:cat type="convert" pri="15000"/>
-  </dgm:catLst>
-  <dgm:sampData useDef="1">
-    <dgm:dataModel>
-      <dgm:ptLst/>
-      <dgm:bg/>
-      <dgm:whole/>
-    </dgm:dataModel>
-  </dgm:sampData>
-  <dgm:styleData>
-    <dgm:dataModel>
-      <dgm:ptLst>
-        <dgm:pt modelId="0" type="doc"/>
-        <dgm:pt modelId="1"/>
-        <dgm:pt modelId="2"/>
-      </dgm:ptLst>
-      <dgm:cxnLst>
-        <dgm:cxn modelId="3" srcId="0" destId="1" srcOrd="0" destOrd="0"/>
-        <dgm:cxn modelId="4" srcId="0" destId="2" srcOrd="1" destOrd="0"/>
-      </dgm:cxnLst>
-      <dgm:bg/>
-      <dgm:whole/>
-    </dgm:dataModel>
-  </dgm:styleData>
-  <dgm:clrData>
-    <dgm:dataModel>
-      <dgm:ptLst>
-        <dgm:pt modelId="0" type="doc"/>
-        <dgm:pt modelId="1"/>
-        <dgm:pt modelId="2"/>
-        <dgm:pt modelId="3"/>
-        <dgm:pt modelId="4"/>
-      </dgm:ptLst>
-      <dgm:cxnLst>
-        <dgm:cxn modelId="5" srcId="0" destId="1" srcOrd="0" destOrd="0"/>
-        <dgm:cxn modelId="6" srcId="0" destId="2" srcOrd="1" destOrd="0"/>
-        <dgm:cxn modelId="7" srcId="0" destId="3" srcOrd="2" destOrd="0"/>
-        <dgm:cxn modelId="8" srcId="0" destId="4" srcOrd="3" destOrd="0"/>
-      </dgm:cxnLst>
-      <dgm:bg/>
-      <dgm:whole/>
-    </dgm:dataModel>
-  </dgm:clrData>
-  <dgm:layoutNode name="Name0">
-    <dgm:varLst>
-      <dgm:dir/>
-      <dgm:resizeHandles val="exact"/>
-    </dgm:varLst>
-    <dgm:choose name="Name1">
-      <dgm:if name="Name2" func="var" arg="dir" op="equ" val="norm">
-        <dgm:alg type="lin"/>
-      </dgm:if>
-      <dgm:else name="Name3">
-        <dgm:alg type="lin">
-          <dgm:param type="linDir" val="fromR"/>
-        </dgm:alg>
-      </dgm:else>
-    </dgm:choose>
-    <dgm:shape xmlns:r="http://schemas.openxmlformats.org/officeDocument/2006/relationships" r:blip="">
-      <dgm:adjLst/>
-    </dgm:shape>
-    <dgm:presOf/>
-    <dgm:constrLst>
-      <dgm:constr type="w" for="ch" ptType="node" refType="w"/>
-      <dgm:constr type="h" for="ch" ptType="node" op="equ"/>
-      <dgm:constr type="primFontSz" for="ch" ptType="node" op="equ" val="65"/>
-      <dgm:constr type="w" for="ch" ptType="sibTrans" refType="w" refFor="ch" refPtType="node" op="equ" fact="0.4"/>
-      <dgm:constr type="h" for="ch" ptType="sibTrans" op="equ"/>
-      <dgm:constr type="primFontSz" for="des" forName="connectorText" op="equ" val="55"/>
-      <dgm:constr type="primFontSz" for="des" forName="connectorText" refType="primFontSz" refFor="ch" refPtType="node" op="lte" fact="0.8"/>
-    </dgm:constrLst>
-    <dgm:ruleLst/>
-    <dgm:forEach name="nodesForEach" axis="ch" ptType="node">
-      <dgm:layoutNode name="node">
-        <dgm:varLst>
-          <dgm:bulletEnabled val="1"/>
-        </dgm:varLst>
-        <dgm:alg type="tx"/>
-        <dgm:shape xmlns:r="http://schemas.openxmlformats.org/officeDocument/2006/relationships" type="roundRect" r:blip="">
-          <dgm:adjLst>
-            <dgm:adj idx="1" val="0.1"/>
-          </dgm:adjLst>
-        </dgm:shape>
-        <dgm:presOf axis="desOrSelf" ptType="node"/>
-        <dgm:constrLst>
-          <dgm:constr type="h" refType="w" fact="0.6"/>
-          <dgm:constr type="tMarg" refType="primFontSz" fact="0.3"/>
-          <dgm:constr type="bMarg" refType="primFontSz" fact="0.3"/>
-          <dgm:constr type="lMarg" refType="primFontSz" fact="0.3"/>
-          <dgm:constr type="rMarg" refType="primFontSz" fact="0.3"/>
-        </dgm:constrLst>
-        <dgm:ruleLst>
-          <dgm:rule type="primFontSz" val="18" fact="NaN" max="NaN"/>
-          <dgm:rule type="h" val="NaN" fact="1.5" max="NaN"/>
-          <dgm:rule type="primFontSz" val="5" fact="NaN" max="NaN"/>
-          <dgm:rule type="h" val="INF" fact="NaN" max="NaN"/>
-        </dgm:ruleLst>
-      </dgm:layoutNode>
-      <dgm:forEach name="sibTransForEach" axis="followSib" ptType="sibTrans" cnt="1">
-        <dgm:layoutNode name="sibTrans">
-          <dgm:alg type="conn">
-            <dgm:param type="begPts" val="auto"/>
-            <dgm:param type="endPts" val="auto"/>
-          </dgm:alg>
-          <dgm:shape xmlns:r="http://schemas.openxmlformats.org/officeDocument/2006/relationships" type="conn" r:blip="">
-            <dgm:adjLst/>
-          </dgm:shape>
-          <dgm:presOf axis="self"/>
-          <dgm:constrLst>
-            <dgm:constr type="h" refType="w" fact="0.62"/>
-            <dgm:constr type="connDist"/>
-            <dgm:constr type="begPad" refType="connDist" fact="0.25"/>
-            <dgm:constr type="endPad" refType="connDist" fact="0.22"/>
-          </dgm:constrLst>
-          <dgm:ruleLst/>
-          <dgm:layoutNode name="connectorText">
-            <dgm:alg type="tx">
-              <dgm:param type="autoTxRot" val="grav"/>
-            </dgm:alg>
-            <dgm:shape xmlns:r="http://schemas.openxmlformats.org/officeDocument/2006/relationships" type="conn" r:blip="" hideGeom="1">
-              <dgm:adjLst/>
-            </dgm:shape>
-            <dgm:presOf axis="self"/>
-            <dgm:constrLst>
-              <dgm:constr type="lMarg"/>
-              <dgm:constr type="rMarg"/>
-              <dgm:constr type="tMarg"/>
-              <dgm:constr type="bMarg"/>
-            </dgm:constrLst>
-            <dgm:ruleLst>
-              <dgm:rule type="primFontSz" val="5" fact="NaN" max="NaN"/>
-            </dgm:ruleLst>
-          </dgm:layoutNode>
-        </dgm:layoutNode>
-      </dgm:forEach>
-    </dgm:forEach>
-  </dgm:layoutNode>
-</dgm:layoutDef>
-</file>
-
 <file path=ppt/diagrams/quickStyle1.xml><?xml version="1.0" encoding="utf-8"?>
 <dgm:styleDef xmlns:dgm="http://schemas.openxmlformats.org/drawingml/2006/diagram" xmlns:a="http://schemas.openxmlformats.org/drawingml/2006/main" uniqueId="urn:microsoft.com/office/officeart/2005/8/quickstyle/simple1">
   <dgm:title val=""/>
@@ -15828,1040 +14335,6 @@
 </file>
 
 <file path=ppt/diagrams/quickStyle6.xml><?xml version="1.0" encoding="utf-8"?>
-<dgm:styleDef xmlns:dgm="http://schemas.openxmlformats.org/drawingml/2006/diagram" xmlns:a="http://schemas.openxmlformats.org/drawingml/2006/main" uniqueId="urn:microsoft.com/office/officeart/2005/8/quickstyle/simple1">
-  <dgm:title val=""/>
-  <dgm:desc val=""/>
-  <dgm:catLst>
-    <dgm:cat type="simple" pri="10100"/>
-  </dgm:catLst>
-  <dgm:scene3d>
-    <a:camera prst="orthographicFront"/>
-    <a:lightRig rig="threePt" dir="t"/>
-  </dgm:scene3d>
-  <dgm:styleLbl name="node0">
-    <dgm:scene3d>
-      <a:camera prst="orthographicFront"/>
-      <a:lightRig rig="threePt" dir="t"/>
-    </dgm:scene3d>
-    <dgm:sp3d/>
-    <dgm:txPr/>
-    <dgm:style>
-      <a:lnRef idx="2">
-        <a:scrgbClr r="0" g="0" b="0"/>
-      </a:lnRef>
-      <a:fillRef idx="1">
-        <a:scrgbClr r="0" g="0" b="0"/>
-      </a:fillRef>
-      <a:effectRef idx="0">
-        <a:scrgbClr r="0" g="0" b="0"/>
-      </a:effectRef>
-      <a:fontRef idx="minor">
-        <a:schemeClr val="lt1"/>
-      </a:fontRef>
-    </dgm:style>
-  </dgm:styleLbl>
-  <dgm:styleLbl name="lnNode1">
-    <dgm:scene3d>
-      <a:camera prst="orthographicFront"/>
-      <a:lightRig rig="threePt" dir="t"/>
-    </dgm:scene3d>
-    <dgm:sp3d/>
-    <dgm:txPr/>
-    <dgm:style>
-      <a:lnRef idx="2">
-        <a:scrgbClr r="0" g="0" b="0"/>
-      </a:lnRef>
-      <a:fillRef idx="1">
-        <a:scrgbClr r="0" g="0" b="0"/>
-      </a:fillRef>
-      <a:effectRef idx="0">
-        <a:scrgbClr r="0" g="0" b="0"/>
-      </a:effectRef>
-      <a:fontRef idx="minor">
-        <a:schemeClr val="lt1"/>
-      </a:fontRef>
-    </dgm:style>
-  </dgm:styleLbl>
-  <dgm:styleLbl name="vennNode1">
-    <dgm:scene3d>
-      <a:camera prst="orthographicFront"/>
-      <a:lightRig rig="threePt" dir="t"/>
-    </dgm:scene3d>
-    <dgm:sp3d/>
-    <dgm:txPr/>
-    <dgm:style>
-      <a:lnRef idx="2">
-        <a:scrgbClr r="0" g="0" b="0"/>
-      </a:lnRef>
-      <a:fillRef idx="1">
-        <a:scrgbClr r="0" g="0" b="0"/>
-      </a:fillRef>
-      <a:effectRef idx="0">
-        <a:scrgbClr r="0" g="0" b="0"/>
-      </a:effectRef>
-      <a:fontRef idx="minor">
-        <a:schemeClr val="tx1"/>
-      </a:fontRef>
-    </dgm:style>
-  </dgm:styleLbl>
-  <dgm:styleLbl name="alignNode1">
-    <dgm:scene3d>
-      <a:camera prst="orthographicFront"/>
-      <a:lightRig rig="threePt" dir="t"/>
-    </dgm:scene3d>
-    <dgm:sp3d/>
-    <dgm:txPr/>
-    <dgm:style>
-      <a:lnRef idx="2">
-        <a:scrgbClr r="0" g="0" b="0"/>
-      </a:lnRef>
-      <a:fillRef idx="1">
-        <a:scrgbClr r="0" g="0" b="0"/>
-      </a:fillRef>
-      <a:effectRef idx="0">
-        <a:scrgbClr r="0" g="0" b="0"/>
-      </a:effectRef>
-      <a:fontRef idx="minor">
-        <a:schemeClr val="lt1"/>
-      </a:fontRef>
-    </dgm:style>
-  </dgm:styleLbl>
-  <dgm:styleLbl name="node1">
-    <dgm:scene3d>
-      <a:camera prst="orthographicFront"/>
-      <a:lightRig rig="threePt" dir="t"/>
-    </dgm:scene3d>
-    <dgm:sp3d/>
-    <dgm:txPr/>
-    <dgm:style>
-      <a:lnRef idx="2">
-        <a:scrgbClr r="0" g="0" b="0"/>
-      </a:lnRef>
-      <a:fillRef idx="1">
-        <a:scrgbClr r="0" g="0" b="0"/>
-      </a:fillRef>
-      <a:effectRef idx="0">
-        <a:scrgbClr r="0" g="0" b="0"/>
-      </a:effectRef>
-      <a:fontRef idx="minor">
-        <a:schemeClr val="lt1"/>
-      </a:fontRef>
-    </dgm:style>
-  </dgm:styleLbl>
-  <dgm:styleLbl name="node2">
-    <dgm:scene3d>
-      <a:camera prst="orthographicFront"/>
-      <a:lightRig rig="threePt" dir="t"/>
-    </dgm:scene3d>
-    <dgm:sp3d/>
-    <dgm:txPr/>
-    <dgm:style>
-      <a:lnRef idx="2">
-        <a:scrgbClr r="0" g="0" b="0"/>
-      </a:lnRef>
-      <a:fillRef idx="1">
-        <a:scrgbClr r="0" g="0" b="0"/>
-      </a:fillRef>
-      <a:effectRef idx="0">
-        <a:scrgbClr r="0" g="0" b="0"/>
-      </a:effectRef>
-      <a:fontRef idx="minor">
-        <a:schemeClr val="lt1"/>
-      </a:fontRef>
-    </dgm:style>
-  </dgm:styleLbl>
-  <dgm:styleLbl name="node3">
-    <dgm:scene3d>
-      <a:camera prst="orthographicFront"/>
-      <a:lightRig rig="threePt" dir="t"/>
-    </dgm:scene3d>
-    <dgm:sp3d/>
-    <dgm:txPr/>
-    <dgm:style>
-      <a:lnRef idx="2">
-        <a:scrgbClr r="0" g="0" b="0"/>
-      </a:lnRef>
-      <a:fillRef idx="1">
-        <a:scrgbClr r="0" g="0" b="0"/>
-      </a:fillRef>
-      <a:effectRef idx="0">
-        <a:scrgbClr r="0" g="0" b="0"/>
-      </a:effectRef>
-      <a:fontRef idx="minor">
-        <a:schemeClr val="lt1"/>
-      </a:fontRef>
-    </dgm:style>
-  </dgm:styleLbl>
-  <dgm:styleLbl name="node4">
-    <dgm:scene3d>
-      <a:camera prst="orthographicFront"/>
-      <a:lightRig rig="threePt" dir="t"/>
-    </dgm:scene3d>
-    <dgm:sp3d/>
-    <dgm:txPr/>
-    <dgm:style>
-      <a:lnRef idx="2">
-        <a:scrgbClr r="0" g="0" b="0"/>
-      </a:lnRef>
-      <a:fillRef idx="1">
-        <a:scrgbClr r="0" g="0" b="0"/>
-      </a:fillRef>
-      <a:effectRef idx="0">
-        <a:scrgbClr r="0" g="0" b="0"/>
-      </a:effectRef>
-      <a:fontRef idx="minor">
-        <a:schemeClr val="lt1"/>
-      </a:fontRef>
-    </dgm:style>
-  </dgm:styleLbl>
-  <dgm:styleLbl name="fgImgPlace1">
-    <dgm:scene3d>
-      <a:camera prst="orthographicFront"/>
-      <a:lightRig rig="threePt" dir="t"/>
-    </dgm:scene3d>
-    <dgm:sp3d/>
-    <dgm:txPr/>
-    <dgm:style>
-      <a:lnRef idx="2">
-        <a:scrgbClr r="0" g="0" b="0"/>
-      </a:lnRef>
-      <a:fillRef idx="1">
-        <a:scrgbClr r="0" g="0" b="0"/>
-      </a:fillRef>
-      <a:effectRef idx="0">
-        <a:scrgbClr r="0" g="0" b="0"/>
-      </a:effectRef>
-      <a:fontRef idx="minor"/>
-    </dgm:style>
-  </dgm:styleLbl>
-  <dgm:styleLbl name="alignImgPlace1">
-    <dgm:scene3d>
-      <a:camera prst="orthographicFront"/>
-      <a:lightRig rig="threePt" dir="t"/>
-    </dgm:scene3d>
-    <dgm:sp3d/>
-    <dgm:txPr/>
-    <dgm:style>
-      <a:lnRef idx="2">
-        <a:scrgbClr r="0" g="0" b="0"/>
-      </a:lnRef>
-      <a:fillRef idx="1">
-        <a:scrgbClr r="0" g="0" b="0"/>
-      </a:fillRef>
-      <a:effectRef idx="0">
-        <a:scrgbClr r="0" g="0" b="0"/>
-      </a:effectRef>
-      <a:fontRef idx="minor"/>
-    </dgm:style>
-  </dgm:styleLbl>
-  <dgm:styleLbl name="bgImgPlace1">
-    <dgm:scene3d>
-      <a:camera prst="orthographicFront"/>
-      <a:lightRig rig="threePt" dir="t"/>
-    </dgm:scene3d>
-    <dgm:sp3d/>
-    <dgm:txPr/>
-    <dgm:style>
-      <a:lnRef idx="2">
-        <a:scrgbClr r="0" g="0" b="0"/>
-      </a:lnRef>
-      <a:fillRef idx="1">
-        <a:scrgbClr r="0" g="0" b="0"/>
-      </a:fillRef>
-      <a:effectRef idx="0">
-        <a:scrgbClr r="0" g="0" b="0"/>
-      </a:effectRef>
-      <a:fontRef idx="minor"/>
-    </dgm:style>
-  </dgm:styleLbl>
-  <dgm:styleLbl name="sibTrans2D1">
-    <dgm:scene3d>
-      <a:camera prst="orthographicFront"/>
-      <a:lightRig rig="threePt" dir="t"/>
-    </dgm:scene3d>
-    <dgm:sp3d/>
-    <dgm:txPr/>
-    <dgm:style>
-      <a:lnRef idx="0">
-        <a:scrgbClr r="0" g="0" b="0"/>
-      </a:lnRef>
-      <a:fillRef idx="1">
-        <a:scrgbClr r="0" g="0" b="0"/>
-      </a:fillRef>
-      <a:effectRef idx="0">
-        <a:scrgbClr r="0" g="0" b="0"/>
-      </a:effectRef>
-      <a:fontRef idx="minor">
-        <a:schemeClr val="lt1"/>
-      </a:fontRef>
-    </dgm:style>
-  </dgm:styleLbl>
-  <dgm:styleLbl name="fgSibTrans2D1">
-    <dgm:scene3d>
-      <a:camera prst="orthographicFront"/>
-      <a:lightRig rig="threePt" dir="t"/>
-    </dgm:scene3d>
-    <dgm:sp3d/>
-    <dgm:txPr/>
-    <dgm:style>
-      <a:lnRef idx="0">
-        <a:scrgbClr r="0" g="0" b="0"/>
-      </a:lnRef>
-      <a:fillRef idx="1">
-        <a:scrgbClr r="0" g="0" b="0"/>
-      </a:fillRef>
-      <a:effectRef idx="0">
-        <a:scrgbClr r="0" g="0" b="0"/>
-      </a:effectRef>
-      <a:fontRef idx="minor">
-        <a:schemeClr val="lt1"/>
-      </a:fontRef>
-    </dgm:style>
-  </dgm:styleLbl>
-  <dgm:styleLbl name="bgSibTrans2D1">
-    <dgm:scene3d>
-      <a:camera prst="orthographicFront"/>
-      <a:lightRig rig="threePt" dir="t"/>
-    </dgm:scene3d>
-    <dgm:sp3d/>
-    <dgm:txPr/>
-    <dgm:style>
-      <a:lnRef idx="0">
-        <a:scrgbClr r="0" g="0" b="0"/>
-      </a:lnRef>
-      <a:fillRef idx="1">
-        <a:scrgbClr r="0" g="0" b="0"/>
-      </a:fillRef>
-      <a:effectRef idx="0">
-        <a:scrgbClr r="0" g="0" b="0"/>
-      </a:effectRef>
-      <a:fontRef idx="minor">
-        <a:schemeClr val="lt1"/>
-      </a:fontRef>
-    </dgm:style>
-  </dgm:styleLbl>
-  <dgm:styleLbl name="sibTrans1D1">
-    <dgm:scene3d>
-      <a:camera prst="orthographicFront"/>
-      <a:lightRig rig="threePt" dir="t"/>
-    </dgm:scene3d>
-    <dgm:sp3d/>
-    <dgm:txPr/>
-    <dgm:style>
-      <a:lnRef idx="1">
-        <a:scrgbClr r="0" g="0" b="0"/>
-      </a:lnRef>
-      <a:fillRef idx="0">
-        <a:scrgbClr r="0" g="0" b="0"/>
-      </a:fillRef>
-      <a:effectRef idx="0">
-        <a:scrgbClr r="0" g="0" b="0"/>
-      </a:effectRef>
-      <a:fontRef idx="minor"/>
-    </dgm:style>
-  </dgm:styleLbl>
-  <dgm:styleLbl name="callout">
-    <dgm:scene3d>
-      <a:camera prst="orthographicFront"/>
-      <a:lightRig rig="threePt" dir="t"/>
-    </dgm:scene3d>
-    <dgm:sp3d/>
-    <dgm:txPr/>
-    <dgm:style>
-      <a:lnRef idx="2">
-        <a:scrgbClr r="0" g="0" b="0"/>
-      </a:lnRef>
-      <a:fillRef idx="1">
-        <a:scrgbClr r="0" g="0" b="0"/>
-      </a:fillRef>
-      <a:effectRef idx="0">
-        <a:scrgbClr r="0" g="0" b="0"/>
-      </a:effectRef>
-      <a:fontRef idx="minor"/>
-    </dgm:style>
-  </dgm:styleLbl>
-  <dgm:styleLbl name="asst0">
-    <dgm:scene3d>
-      <a:camera prst="orthographicFront"/>
-      <a:lightRig rig="threePt" dir="t"/>
-    </dgm:scene3d>
-    <dgm:sp3d/>
-    <dgm:txPr/>
-    <dgm:style>
-      <a:lnRef idx="2">
-        <a:scrgbClr r="0" g="0" b="0"/>
-      </a:lnRef>
-      <a:fillRef idx="1">
-        <a:scrgbClr r="0" g="0" b="0"/>
-      </a:fillRef>
-      <a:effectRef idx="0">
-        <a:scrgbClr r="0" g="0" b="0"/>
-      </a:effectRef>
-      <a:fontRef idx="minor">
-        <a:schemeClr val="lt1"/>
-      </a:fontRef>
-    </dgm:style>
-  </dgm:styleLbl>
-  <dgm:styleLbl name="asst1">
-    <dgm:scene3d>
-      <a:camera prst="orthographicFront"/>
-      <a:lightRig rig="threePt" dir="t"/>
-    </dgm:scene3d>
-    <dgm:sp3d/>
-    <dgm:txPr/>
-    <dgm:style>
-      <a:lnRef idx="2">
-        <a:scrgbClr r="0" g="0" b="0"/>
-      </a:lnRef>
-      <a:fillRef idx="1">
-        <a:scrgbClr r="0" g="0" b="0"/>
-      </a:fillRef>
-      <a:effectRef idx="0">
-        <a:scrgbClr r="0" g="0" b="0"/>
-      </a:effectRef>
-      <a:fontRef idx="minor">
-        <a:schemeClr val="lt1"/>
-      </a:fontRef>
-    </dgm:style>
-  </dgm:styleLbl>
-  <dgm:styleLbl name="asst2">
-    <dgm:scene3d>
-      <a:camera prst="orthographicFront"/>
-      <a:lightRig rig="threePt" dir="t"/>
-    </dgm:scene3d>
-    <dgm:sp3d/>
-    <dgm:txPr/>
-    <dgm:style>
-      <a:lnRef idx="2">
-        <a:scrgbClr r="0" g="0" b="0"/>
-      </a:lnRef>
-      <a:fillRef idx="1">
-        <a:scrgbClr r="0" g="0" b="0"/>
-      </a:fillRef>
-      <a:effectRef idx="0">
-        <a:scrgbClr r="0" g="0" b="0"/>
-      </a:effectRef>
-      <a:fontRef idx="minor">
-        <a:schemeClr val="lt1"/>
-      </a:fontRef>
-    </dgm:style>
-  </dgm:styleLbl>
-  <dgm:styleLbl name="asst3">
-    <dgm:scene3d>
-      <a:camera prst="orthographicFront"/>
-      <a:lightRig rig="threePt" dir="t"/>
-    </dgm:scene3d>
-    <dgm:sp3d/>
-    <dgm:txPr/>
-    <dgm:style>
-      <a:lnRef idx="2">
-        <a:scrgbClr r="0" g="0" b="0"/>
-      </a:lnRef>
-      <a:fillRef idx="1">
-        <a:scrgbClr r="0" g="0" b="0"/>
-      </a:fillRef>
-      <a:effectRef idx="0">
-        <a:scrgbClr r="0" g="0" b="0"/>
-      </a:effectRef>
-      <a:fontRef idx="minor">
-        <a:schemeClr val="lt1"/>
-      </a:fontRef>
-    </dgm:style>
-  </dgm:styleLbl>
-  <dgm:styleLbl name="asst4">
-    <dgm:scene3d>
-      <a:camera prst="orthographicFront"/>
-      <a:lightRig rig="threePt" dir="t"/>
-    </dgm:scene3d>
-    <dgm:sp3d/>
-    <dgm:txPr/>
-    <dgm:style>
-      <a:lnRef idx="2">
-        <a:scrgbClr r="0" g="0" b="0"/>
-      </a:lnRef>
-      <a:fillRef idx="1">
-        <a:scrgbClr r="0" g="0" b="0"/>
-      </a:fillRef>
-      <a:effectRef idx="0">
-        <a:scrgbClr r="0" g="0" b="0"/>
-      </a:effectRef>
-      <a:fontRef idx="minor">
-        <a:schemeClr val="lt1"/>
-      </a:fontRef>
-    </dgm:style>
-  </dgm:styleLbl>
-  <dgm:styleLbl name="parChTrans2D1">
-    <dgm:scene3d>
-      <a:camera prst="orthographicFront"/>
-      <a:lightRig rig="threePt" dir="t"/>
-    </dgm:scene3d>
-    <dgm:sp3d/>
-    <dgm:txPr/>
-    <dgm:style>
-      <a:lnRef idx="2">
-        <a:scrgbClr r="0" g="0" b="0"/>
-      </a:lnRef>
-      <a:fillRef idx="1">
-        <a:scrgbClr r="0" g="0" b="0"/>
-      </a:fillRef>
-      <a:effectRef idx="0">
-        <a:scrgbClr r="0" g="0" b="0"/>
-      </a:effectRef>
-      <a:fontRef idx="minor">
-        <a:schemeClr val="lt1"/>
-      </a:fontRef>
-    </dgm:style>
-  </dgm:styleLbl>
-  <dgm:styleLbl name="parChTrans2D2">
-    <dgm:scene3d>
-      <a:camera prst="orthographicFront"/>
-      <a:lightRig rig="threePt" dir="t"/>
-    </dgm:scene3d>
-    <dgm:sp3d/>
-    <dgm:txPr/>
-    <dgm:style>
-      <a:lnRef idx="2">
-        <a:scrgbClr r="0" g="0" b="0"/>
-      </a:lnRef>
-      <a:fillRef idx="1">
-        <a:scrgbClr r="0" g="0" b="0"/>
-      </a:fillRef>
-      <a:effectRef idx="0">
-        <a:scrgbClr r="0" g="0" b="0"/>
-      </a:effectRef>
-      <a:fontRef idx="minor">
-        <a:schemeClr val="lt1"/>
-      </a:fontRef>
-    </dgm:style>
-  </dgm:styleLbl>
-  <dgm:styleLbl name="parChTrans2D3">
-    <dgm:scene3d>
-      <a:camera prst="orthographicFront"/>
-      <a:lightRig rig="threePt" dir="t"/>
-    </dgm:scene3d>
-    <dgm:sp3d/>
-    <dgm:txPr/>
-    <dgm:style>
-      <a:lnRef idx="2">
-        <a:scrgbClr r="0" g="0" b="0"/>
-      </a:lnRef>
-      <a:fillRef idx="1">
-        <a:scrgbClr r="0" g="0" b="0"/>
-      </a:fillRef>
-      <a:effectRef idx="0">
-        <a:scrgbClr r="0" g="0" b="0"/>
-      </a:effectRef>
-      <a:fontRef idx="minor">
-        <a:schemeClr val="lt1"/>
-      </a:fontRef>
-    </dgm:style>
-  </dgm:styleLbl>
-  <dgm:styleLbl name="parChTrans2D4">
-    <dgm:scene3d>
-      <a:camera prst="orthographicFront"/>
-      <a:lightRig rig="threePt" dir="t"/>
-    </dgm:scene3d>
-    <dgm:sp3d/>
-    <dgm:txPr/>
-    <dgm:style>
-      <a:lnRef idx="2">
-        <a:scrgbClr r="0" g="0" b="0"/>
-      </a:lnRef>
-      <a:fillRef idx="1">
-        <a:scrgbClr r="0" g="0" b="0"/>
-      </a:fillRef>
-      <a:effectRef idx="0">
-        <a:scrgbClr r="0" g="0" b="0"/>
-      </a:effectRef>
-      <a:fontRef idx="minor">
-        <a:schemeClr val="lt1"/>
-      </a:fontRef>
-    </dgm:style>
-  </dgm:styleLbl>
-  <dgm:styleLbl name="parChTrans1D1">
-    <dgm:scene3d>
-      <a:camera prst="orthographicFront"/>
-      <a:lightRig rig="threePt" dir="t"/>
-    </dgm:scene3d>
-    <dgm:sp3d/>
-    <dgm:txPr/>
-    <dgm:style>
-      <a:lnRef idx="2">
-        <a:scrgbClr r="0" g="0" b="0"/>
-      </a:lnRef>
-      <a:fillRef idx="0">
-        <a:scrgbClr r="0" g="0" b="0"/>
-      </a:fillRef>
-      <a:effectRef idx="0">
-        <a:scrgbClr r="0" g="0" b="0"/>
-      </a:effectRef>
-      <a:fontRef idx="minor"/>
-    </dgm:style>
-  </dgm:styleLbl>
-  <dgm:styleLbl name="parChTrans1D2">
-    <dgm:scene3d>
-      <a:camera prst="orthographicFront"/>
-      <a:lightRig rig="threePt" dir="t"/>
-    </dgm:scene3d>
-    <dgm:sp3d/>
-    <dgm:txPr/>
-    <dgm:style>
-      <a:lnRef idx="2">
-        <a:scrgbClr r="0" g="0" b="0"/>
-      </a:lnRef>
-      <a:fillRef idx="0">
-        <a:scrgbClr r="0" g="0" b="0"/>
-      </a:fillRef>
-      <a:effectRef idx="0">
-        <a:scrgbClr r="0" g="0" b="0"/>
-      </a:effectRef>
-      <a:fontRef idx="minor"/>
-    </dgm:style>
-  </dgm:styleLbl>
-  <dgm:styleLbl name="parChTrans1D3">
-    <dgm:scene3d>
-      <a:camera prst="orthographicFront"/>
-      <a:lightRig rig="threePt" dir="t"/>
-    </dgm:scene3d>
-    <dgm:sp3d/>
-    <dgm:txPr/>
-    <dgm:style>
-      <a:lnRef idx="2">
-        <a:scrgbClr r="0" g="0" b="0"/>
-      </a:lnRef>
-      <a:fillRef idx="0">
-        <a:scrgbClr r="0" g="0" b="0"/>
-      </a:fillRef>
-      <a:effectRef idx="0">
-        <a:scrgbClr r="0" g="0" b="0"/>
-      </a:effectRef>
-      <a:fontRef idx="minor"/>
-    </dgm:style>
-  </dgm:styleLbl>
-  <dgm:styleLbl name="parChTrans1D4">
-    <dgm:scene3d>
-      <a:camera prst="orthographicFront"/>
-      <a:lightRig rig="threePt" dir="t"/>
-    </dgm:scene3d>
-    <dgm:sp3d/>
-    <dgm:txPr/>
-    <dgm:style>
-      <a:lnRef idx="2">
-        <a:scrgbClr r="0" g="0" b="0"/>
-      </a:lnRef>
-      <a:fillRef idx="0">
-        <a:scrgbClr r="0" g="0" b="0"/>
-      </a:fillRef>
-      <a:effectRef idx="0">
-        <a:scrgbClr r="0" g="0" b="0"/>
-      </a:effectRef>
-      <a:fontRef idx="minor"/>
-    </dgm:style>
-  </dgm:styleLbl>
-  <dgm:styleLbl name="fgAcc1">
-    <dgm:scene3d>
-      <a:camera prst="orthographicFront"/>
-      <a:lightRig rig="threePt" dir="t"/>
-    </dgm:scene3d>
-    <dgm:sp3d/>
-    <dgm:txPr/>
-    <dgm:style>
-      <a:lnRef idx="2">
-        <a:scrgbClr r="0" g="0" b="0"/>
-      </a:lnRef>
-      <a:fillRef idx="1">
-        <a:scrgbClr r="0" g="0" b="0"/>
-      </a:fillRef>
-      <a:effectRef idx="0">
-        <a:scrgbClr r="0" g="0" b="0"/>
-      </a:effectRef>
-      <a:fontRef idx="minor"/>
-    </dgm:style>
-  </dgm:styleLbl>
-  <dgm:styleLbl name="conFgAcc1">
-    <dgm:scene3d>
-      <a:camera prst="orthographicFront"/>
-      <a:lightRig rig="threePt" dir="t"/>
-    </dgm:scene3d>
-    <dgm:sp3d/>
-    <dgm:txPr/>
-    <dgm:style>
-      <a:lnRef idx="2">
-        <a:scrgbClr r="0" g="0" b="0"/>
-      </a:lnRef>
-      <a:fillRef idx="1">
-        <a:scrgbClr r="0" g="0" b="0"/>
-      </a:fillRef>
-      <a:effectRef idx="0">
-        <a:scrgbClr r="0" g="0" b="0"/>
-      </a:effectRef>
-      <a:fontRef idx="minor"/>
-    </dgm:style>
-  </dgm:styleLbl>
-  <dgm:styleLbl name="alignAcc1">
-    <dgm:scene3d>
-      <a:camera prst="orthographicFront"/>
-      <a:lightRig rig="threePt" dir="t"/>
-    </dgm:scene3d>
-    <dgm:sp3d/>
-    <dgm:txPr/>
-    <dgm:style>
-      <a:lnRef idx="2">
-        <a:scrgbClr r="0" g="0" b="0"/>
-      </a:lnRef>
-      <a:fillRef idx="1">
-        <a:scrgbClr r="0" g="0" b="0"/>
-      </a:fillRef>
-      <a:effectRef idx="0">
-        <a:scrgbClr r="0" g="0" b="0"/>
-      </a:effectRef>
-      <a:fontRef idx="minor"/>
-    </dgm:style>
-  </dgm:styleLbl>
-  <dgm:styleLbl name="trAlignAcc1">
-    <dgm:scene3d>
-      <a:camera prst="orthographicFront"/>
-      <a:lightRig rig="threePt" dir="t"/>
-    </dgm:scene3d>
-    <dgm:sp3d/>
-    <dgm:txPr/>
-    <dgm:style>
-      <a:lnRef idx="1">
-        <a:scrgbClr r="0" g="0" b="0"/>
-      </a:lnRef>
-      <a:fillRef idx="1">
-        <a:scrgbClr r="0" g="0" b="0"/>
-      </a:fillRef>
-      <a:effectRef idx="0">
-        <a:scrgbClr r="0" g="0" b="0"/>
-      </a:effectRef>
-      <a:fontRef idx="minor"/>
-    </dgm:style>
-  </dgm:styleLbl>
-  <dgm:styleLbl name="bgAcc1">
-    <dgm:scene3d>
-      <a:camera prst="orthographicFront"/>
-      <a:lightRig rig="threePt" dir="t"/>
-    </dgm:scene3d>
-    <dgm:sp3d/>
-    <dgm:txPr/>
-    <dgm:style>
-      <a:lnRef idx="2">
-        <a:scrgbClr r="0" g="0" b="0"/>
-      </a:lnRef>
-      <a:fillRef idx="1">
-        <a:scrgbClr r="0" g="0" b="0"/>
-      </a:fillRef>
-      <a:effectRef idx="0">
-        <a:scrgbClr r="0" g="0" b="0"/>
-      </a:effectRef>
-      <a:fontRef idx="minor"/>
-    </dgm:style>
-  </dgm:styleLbl>
-  <dgm:styleLbl name="solidFgAcc1">
-    <dgm:scene3d>
-      <a:camera prst="orthographicFront"/>
-      <a:lightRig rig="threePt" dir="t"/>
-    </dgm:scene3d>
-    <dgm:sp3d/>
-    <dgm:txPr/>
-    <dgm:style>
-      <a:lnRef idx="2">
-        <a:scrgbClr r="0" g="0" b="0"/>
-      </a:lnRef>
-      <a:fillRef idx="1">
-        <a:scrgbClr r="0" g="0" b="0"/>
-      </a:fillRef>
-      <a:effectRef idx="0">
-        <a:scrgbClr r="0" g="0" b="0"/>
-      </a:effectRef>
-      <a:fontRef idx="minor"/>
-    </dgm:style>
-  </dgm:styleLbl>
-  <dgm:styleLbl name="solidAlignAcc1">
-    <dgm:scene3d>
-      <a:camera prst="orthographicFront"/>
-      <a:lightRig rig="threePt" dir="t"/>
-    </dgm:scene3d>
-    <dgm:sp3d/>
-    <dgm:txPr/>
-    <dgm:style>
-      <a:lnRef idx="2">
-        <a:scrgbClr r="0" g="0" b="0"/>
-      </a:lnRef>
-      <a:fillRef idx="1">
-        <a:scrgbClr r="0" g="0" b="0"/>
-      </a:fillRef>
-      <a:effectRef idx="0">
-        <a:scrgbClr r="0" g="0" b="0"/>
-      </a:effectRef>
-      <a:fontRef idx="minor"/>
-    </dgm:style>
-  </dgm:styleLbl>
-  <dgm:styleLbl name="solidBgAcc1">
-    <dgm:scene3d>
-      <a:camera prst="orthographicFront"/>
-      <a:lightRig rig="threePt" dir="t"/>
-    </dgm:scene3d>
-    <dgm:sp3d/>
-    <dgm:txPr/>
-    <dgm:style>
-      <a:lnRef idx="2">
-        <a:scrgbClr r="0" g="0" b="0"/>
-      </a:lnRef>
-      <a:fillRef idx="1">
-        <a:scrgbClr r="0" g="0" b="0"/>
-      </a:fillRef>
-      <a:effectRef idx="0">
-        <a:scrgbClr r="0" g="0" b="0"/>
-      </a:effectRef>
-      <a:fontRef idx="minor"/>
-    </dgm:style>
-  </dgm:styleLbl>
-  <dgm:styleLbl name="fgAccFollowNode1">
-    <dgm:scene3d>
-      <a:camera prst="orthographicFront"/>
-      <a:lightRig rig="threePt" dir="t"/>
-    </dgm:scene3d>
-    <dgm:sp3d/>
-    <dgm:txPr/>
-    <dgm:style>
-      <a:lnRef idx="2">
-        <a:scrgbClr r="0" g="0" b="0"/>
-      </a:lnRef>
-      <a:fillRef idx="1">
-        <a:scrgbClr r="0" g="0" b="0"/>
-      </a:fillRef>
-      <a:effectRef idx="0">
-        <a:scrgbClr r="0" g="0" b="0"/>
-      </a:effectRef>
-      <a:fontRef idx="minor"/>
-    </dgm:style>
-  </dgm:styleLbl>
-  <dgm:styleLbl name="alignAccFollowNode1">
-    <dgm:scene3d>
-      <a:camera prst="orthographicFront"/>
-      <a:lightRig rig="threePt" dir="t"/>
-    </dgm:scene3d>
-    <dgm:sp3d/>
-    <dgm:txPr/>
-    <dgm:style>
-      <a:lnRef idx="2">
-        <a:scrgbClr r="0" g="0" b="0"/>
-      </a:lnRef>
-      <a:fillRef idx="1">
-        <a:scrgbClr r="0" g="0" b="0"/>
-      </a:fillRef>
-      <a:effectRef idx="0">
-        <a:scrgbClr r="0" g="0" b="0"/>
-      </a:effectRef>
-      <a:fontRef idx="minor"/>
-    </dgm:style>
-  </dgm:styleLbl>
-  <dgm:styleLbl name="bgAccFollowNode1">
-    <dgm:scene3d>
-      <a:camera prst="orthographicFront"/>
-      <a:lightRig rig="threePt" dir="t"/>
-    </dgm:scene3d>
-    <dgm:sp3d/>
-    <dgm:txPr/>
-    <dgm:style>
-      <a:lnRef idx="2">
-        <a:scrgbClr r="0" g="0" b="0"/>
-      </a:lnRef>
-      <a:fillRef idx="1">
-        <a:scrgbClr r="0" g="0" b="0"/>
-      </a:fillRef>
-      <a:effectRef idx="0">
-        <a:scrgbClr r="0" g="0" b="0"/>
-      </a:effectRef>
-      <a:fontRef idx="minor"/>
-    </dgm:style>
-  </dgm:styleLbl>
-  <dgm:styleLbl name="fgAcc0">
-    <dgm:scene3d>
-      <a:camera prst="orthographicFront"/>
-      <a:lightRig rig="threePt" dir="t"/>
-    </dgm:scene3d>
-    <dgm:sp3d/>
-    <dgm:txPr/>
-    <dgm:style>
-      <a:lnRef idx="2">
-        <a:scrgbClr r="0" g="0" b="0"/>
-      </a:lnRef>
-      <a:fillRef idx="1">
-        <a:scrgbClr r="0" g="0" b="0"/>
-      </a:fillRef>
-      <a:effectRef idx="0">
-        <a:scrgbClr r="0" g="0" b="0"/>
-      </a:effectRef>
-      <a:fontRef idx="minor"/>
-    </dgm:style>
-  </dgm:styleLbl>
-  <dgm:styleLbl name="fgAcc2">
-    <dgm:scene3d>
-      <a:camera prst="orthographicFront"/>
-      <a:lightRig rig="threePt" dir="t"/>
-    </dgm:scene3d>
-    <dgm:sp3d/>
-    <dgm:txPr/>
-    <dgm:style>
-      <a:lnRef idx="2">
-        <a:scrgbClr r="0" g="0" b="0"/>
-      </a:lnRef>
-      <a:fillRef idx="1">
-        <a:scrgbClr r="0" g="0" b="0"/>
-      </a:fillRef>
-      <a:effectRef idx="0">
-        <a:scrgbClr r="0" g="0" b="0"/>
-      </a:effectRef>
-      <a:fontRef idx="minor"/>
-    </dgm:style>
-  </dgm:styleLbl>
-  <dgm:styleLbl name="fgAcc3">
-    <dgm:scene3d>
-      <a:camera prst="orthographicFront"/>
-      <a:lightRig rig="threePt" dir="t"/>
-    </dgm:scene3d>
-    <dgm:sp3d/>
-    <dgm:txPr/>
-    <dgm:style>
-      <a:lnRef idx="2">
-        <a:scrgbClr r="0" g="0" b="0"/>
-      </a:lnRef>
-      <a:fillRef idx="1">
-        <a:scrgbClr r="0" g="0" b="0"/>
-      </a:fillRef>
-      <a:effectRef idx="0">
-        <a:scrgbClr r="0" g="0" b="0"/>
-      </a:effectRef>
-      <a:fontRef idx="minor"/>
-    </dgm:style>
-  </dgm:styleLbl>
-  <dgm:styleLbl name="fgAcc4">
-    <dgm:scene3d>
-      <a:camera prst="orthographicFront"/>
-      <a:lightRig rig="threePt" dir="t"/>
-    </dgm:scene3d>
-    <dgm:sp3d/>
-    <dgm:txPr/>
-    <dgm:style>
-      <a:lnRef idx="2">
-        <a:scrgbClr r="0" g="0" b="0"/>
-      </a:lnRef>
-      <a:fillRef idx="1">
-        <a:scrgbClr r="0" g="0" b="0"/>
-      </a:fillRef>
-      <a:effectRef idx="0">
-        <a:scrgbClr r="0" g="0" b="0"/>
-      </a:effectRef>
-      <a:fontRef idx="minor"/>
-    </dgm:style>
-  </dgm:styleLbl>
-  <dgm:styleLbl name="bgShp">
-    <dgm:scene3d>
-      <a:camera prst="orthographicFront"/>
-      <a:lightRig rig="threePt" dir="t"/>
-    </dgm:scene3d>
-    <dgm:sp3d/>
-    <dgm:txPr/>
-    <dgm:style>
-      <a:lnRef idx="0">
-        <a:scrgbClr r="0" g="0" b="0"/>
-      </a:lnRef>
-      <a:fillRef idx="1">
-        <a:scrgbClr r="0" g="0" b="0"/>
-      </a:fillRef>
-      <a:effectRef idx="0">
-        <a:scrgbClr r="0" g="0" b="0"/>
-      </a:effectRef>
-      <a:fontRef idx="minor"/>
-    </dgm:style>
-  </dgm:styleLbl>
-  <dgm:styleLbl name="dkBgShp">
-    <dgm:scene3d>
-      <a:camera prst="orthographicFront"/>
-      <a:lightRig rig="threePt" dir="t"/>
-    </dgm:scene3d>
-    <dgm:sp3d/>
-    <dgm:txPr/>
-    <dgm:style>
-      <a:lnRef idx="0">
-        <a:scrgbClr r="0" g="0" b="0"/>
-      </a:lnRef>
-      <a:fillRef idx="1">
-        <a:scrgbClr r="0" g="0" b="0"/>
-      </a:fillRef>
-      <a:effectRef idx="0">
-        <a:scrgbClr r="0" g="0" b="0"/>
-      </a:effectRef>
-      <a:fontRef idx="minor"/>
-    </dgm:style>
-  </dgm:styleLbl>
-  <dgm:styleLbl name="trBgShp">
-    <dgm:scene3d>
-      <a:camera prst="orthographicFront"/>
-      <a:lightRig rig="threePt" dir="t"/>
-    </dgm:scene3d>
-    <dgm:sp3d/>
-    <dgm:txPr/>
-    <dgm:style>
-      <a:lnRef idx="0">
-        <a:scrgbClr r="0" g="0" b="0"/>
-      </a:lnRef>
-      <a:fillRef idx="1">
-        <a:scrgbClr r="0" g="0" b="0"/>
-      </a:fillRef>
-      <a:effectRef idx="0">
-        <a:scrgbClr r="0" g="0" b="0"/>
-      </a:effectRef>
-      <a:fontRef idx="minor"/>
-    </dgm:style>
-  </dgm:styleLbl>
-  <dgm:styleLbl name="fgShp">
-    <dgm:scene3d>
-      <a:camera prst="orthographicFront"/>
-      <a:lightRig rig="threePt" dir="t"/>
-    </dgm:scene3d>
-    <dgm:sp3d/>
-    <dgm:txPr/>
-    <dgm:style>
-      <a:lnRef idx="2">
-        <a:scrgbClr r="0" g="0" b="0"/>
-      </a:lnRef>
-      <a:fillRef idx="1">
-        <a:scrgbClr r="0" g="0" b="0"/>
-      </a:fillRef>
-      <a:effectRef idx="0">
-        <a:scrgbClr r="0" g="0" b="0"/>
-      </a:effectRef>
-      <a:fontRef idx="minor"/>
-    </dgm:style>
-  </dgm:styleLbl>
-  <dgm:styleLbl name="revTx">
-    <dgm:scene3d>
-      <a:camera prst="orthographicFront"/>
-      <a:lightRig rig="threePt" dir="t"/>
-    </dgm:scene3d>
-    <dgm:sp3d/>
-    <dgm:txPr/>
-    <dgm:style>
-      <a:lnRef idx="0">
-        <a:scrgbClr r="0" g="0" b="0"/>
-      </a:lnRef>
-      <a:fillRef idx="0">
-        <a:scrgbClr r="0" g="0" b="0"/>
-      </a:fillRef>
-      <a:effectRef idx="0">
-        <a:scrgbClr r="0" g="0" b="0"/>
-      </a:effectRef>
-      <a:fontRef idx="minor"/>
-    </dgm:style>
-  </dgm:styleLbl>
-</dgm:styleDef>
-</file>
-
-<file path=ppt/diagrams/quickStyle7.xml><?xml version="1.0" encoding="utf-8"?>
 <dgm:styleDef xmlns:dgm="http://schemas.openxmlformats.org/drawingml/2006/diagram" xmlns:a="http://schemas.openxmlformats.org/drawingml/2006/main" uniqueId="urn:microsoft.com/office/officeart/2005/8/quickstyle/simple1">
   <dgm:title val=""/>
   <dgm:desc val=""/>
@@ -17977,7 +15450,7 @@
           <a:p>
             <a:fld id="{DAD44B09-AABF-469B-85A0-8C605BF00772}" type="datetimeFigureOut">
               <a:rPr lang="en-US" smtClean="0"/>
-              <a:t>6/30/2021</a:t>
+              <a:t>7/8/2021</a:t>
             </a:fld>
             <a:endParaRPr lang="en-US"/>
           </a:p>
@@ -18288,90 +15761,6 @@
           <a:bodyPr/>
           <a:lstStyle/>
           <a:p>
-            <a:endParaRPr lang="en-US" dirty="0"/>
-          </a:p>
-        </p:txBody>
-      </p:sp>
-      <p:sp>
-        <p:nvSpPr>
-          <p:cNvPr id="4" name="Slide Number Placeholder 3"/>
-          <p:cNvSpPr>
-            <a:spLocks noGrp="1"/>
-          </p:cNvSpPr>
-          <p:nvPr>
-            <p:ph type="sldNum" sz="quarter" idx="5"/>
-          </p:nvPr>
-        </p:nvSpPr>
-        <p:spPr/>
-        <p:txBody>
-          <a:bodyPr/>
-          <a:lstStyle/>
-          <a:p>
-            <a:fld id="{79CB9146-0B4E-4A79-A066-237D375AC2E3}" type="slidenum">
-              <a:rPr lang="en-US" smtClean="0"/>
-              <a:t>12</a:t>
-            </a:fld>
-            <a:endParaRPr lang="en-US"/>
-          </a:p>
-        </p:txBody>
-      </p:sp>
-    </p:spTree>
-    <p:extLst>
-      <p:ext uri="{BB962C8B-B14F-4D97-AF65-F5344CB8AC3E}">
-        <p14:creationId xmlns:p14="http://schemas.microsoft.com/office/powerpoint/2010/main" val="3881634952"/>
-      </p:ext>
-    </p:extLst>
-  </p:cSld>
-  <p:clrMapOvr>
-    <a:masterClrMapping/>
-  </p:clrMapOvr>
-</p:notes>
-</file>
-
-<file path=ppt/notesSlides/notesSlide2.xml><?xml version="1.0" encoding="utf-8"?>
-<p:notes xmlns:a="http://schemas.openxmlformats.org/drawingml/2006/main" xmlns:r="http://schemas.openxmlformats.org/officeDocument/2006/relationships" xmlns:p="http://schemas.openxmlformats.org/presentationml/2006/main">
-  <p:cSld>
-    <p:spTree>
-      <p:nvGrpSpPr>
-        <p:cNvPr id="1" name=""/>
-        <p:cNvGrpSpPr/>
-        <p:nvPr/>
-      </p:nvGrpSpPr>
-      <p:grpSpPr>
-        <a:xfrm>
-          <a:off x="0" y="0"/>
-          <a:ext cx="0" cy="0"/>
-          <a:chOff x="0" y="0"/>
-          <a:chExt cx="0" cy="0"/>
-        </a:xfrm>
-      </p:grpSpPr>
-      <p:sp>
-        <p:nvSpPr>
-          <p:cNvPr id="2" name="Slide Image Placeholder 1"/>
-          <p:cNvSpPr>
-            <a:spLocks noGrp="1" noRot="1" noChangeAspect="1"/>
-          </p:cNvSpPr>
-          <p:nvPr>
-            <p:ph type="sldImg"/>
-          </p:nvPr>
-        </p:nvSpPr>
-        <p:spPr/>
-      </p:sp>
-      <p:sp>
-        <p:nvSpPr>
-          <p:cNvPr id="3" name="Notes Placeholder 2"/>
-          <p:cNvSpPr>
-            <a:spLocks noGrp="1"/>
-          </p:cNvSpPr>
-          <p:nvPr>
-            <p:ph type="body" idx="1"/>
-          </p:nvPr>
-        </p:nvSpPr>
-        <p:spPr/>
-        <p:txBody>
-          <a:bodyPr/>
-          <a:lstStyle/>
-          <a:p>
             <a:r>
               <a:rPr lang="en-US" dirty="0"/>
               <a:t>How do we go from data to graphic? Here, we drill down to a single data point and its equivalent graphic</a:t>
@@ -18396,7 +15785,7 @@
           <a:p>
             <a:fld id="{79CB9146-0B4E-4A79-A066-237D375AC2E3}" type="slidenum">
               <a:rPr lang="en-US" smtClean="0"/>
-              <a:t>25</a:t>
+              <a:t>27</a:t>
             </a:fld>
             <a:endParaRPr lang="en-US"/>
           </a:p>
@@ -18415,7 +15804,7 @@
 </p:notes>
 </file>
 
-<file path=ppt/notesSlides/notesSlide3.xml><?xml version="1.0" encoding="utf-8"?>
+<file path=ppt/notesSlides/notesSlide2.xml><?xml version="1.0" encoding="utf-8"?>
 <p:notes xmlns:a="http://schemas.openxmlformats.org/drawingml/2006/main" xmlns:r="http://schemas.openxmlformats.org/officeDocument/2006/relationships" xmlns:p="http://schemas.openxmlformats.org/presentationml/2006/main">
   <p:cSld>
     <p:spTree>
@@ -18491,7 +15880,7 @@
           <a:p>
             <a:fld id="{79CB9146-0B4E-4A79-A066-237D375AC2E3}" type="slidenum">
               <a:rPr lang="en-US" smtClean="0"/>
-              <a:t>26</a:t>
+              <a:t>28</a:t>
             </a:fld>
             <a:endParaRPr lang="en-US"/>
           </a:p>
@@ -18510,7 +15899,7 @@
 </p:notes>
 </file>
 
-<file path=ppt/notesSlides/notesSlide4.xml><?xml version="1.0" encoding="utf-8"?>
+<file path=ppt/notesSlides/notesSlide3.xml><?xml version="1.0" encoding="utf-8"?>
 <p:notes xmlns:a="http://schemas.openxmlformats.org/drawingml/2006/main" xmlns:r="http://schemas.openxmlformats.org/officeDocument/2006/relationships" xmlns:p="http://schemas.openxmlformats.org/presentationml/2006/main">
   <p:cSld>
     <p:spTree>
@@ -18578,7 +15967,7 @@
           <a:p>
             <a:fld id="{79CB9146-0B4E-4A79-A066-237D375AC2E3}" type="slidenum">
               <a:rPr lang="en-US" smtClean="0"/>
-              <a:t>27</a:t>
+              <a:t>29</a:t>
             </a:fld>
             <a:endParaRPr lang="en-US"/>
           </a:p>
@@ -18597,7 +15986,7 @@
 </p:notes>
 </file>
 
-<file path=ppt/notesSlides/notesSlide5.xml><?xml version="1.0" encoding="utf-8"?>
+<file path=ppt/notesSlides/notesSlide4.xml><?xml version="1.0" encoding="utf-8"?>
 <p:notes xmlns:a="http://schemas.openxmlformats.org/drawingml/2006/main" xmlns:r="http://schemas.openxmlformats.org/officeDocument/2006/relationships" xmlns:p="http://schemas.openxmlformats.org/presentationml/2006/main">
   <p:cSld>
     <p:spTree>
@@ -18673,7 +16062,7 @@
           <a:p>
             <a:fld id="{79CB9146-0B4E-4A79-A066-237D375AC2E3}" type="slidenum">
               <a:rPr lang="en-US" smtClean="0"/>
-              <a:t>28</a:t>
+              <a:t>30</a:t>
             </a:fld>
             <a:endParaRPr lang="en-US"/>
           </a:p>
@@ -18692,7 +16081,7 @@
 </p:notes>
 </file>
 
-<file path=ppt/notesSlides/notesSlide6.xml><?xml version="1.0" encoding="utf-8"?>
+<file path=ppt/notesSlides/notesSlide5.xml><?xml version="1.0" encoding="utf-8"?>
 <p:notes xmlns:a="http://schemas.openxmlformats.org/drawingml/2006/main" xmlns:r="http://schemas.openxmlformats.org/officeDocument/2006/relationships" xmlns:p="http://schemas.openxmlformats.org/presentationml/2006/main">
   <p:cSld>
     <p:spTree>
@@ -18760,7 +16149,7 @@
           <a:p>
             <a:fld id="{79CB9146-0B4E-4A79-A066-237D375AC2E3}" type="slidenum">
               <a:rPr lang="en-US" smtClean="0"/>
-              <a:t>29</a:t>
+              <a:t>31</a:t>
             </a:fld>
             <a:endParaRPr lang="en-US"/>
           </a:p>
@@ -18926,7 +16315,7 @@
           <a:p>
             <a:fld id="{643E6671-CB4B-433F-A30B-AEAEAE894B3A}" type="datetimeFigureOut">
               <a:rPr lang="en-US" smtClean="0"/>
-              <a:t>6/30/2021</a:t>
+              <a:t>7/8/2021</a:t>
             </a:fld>
             <a:endParaRPr lang="en-US"/>
           </a:p>
@@ -19124,7 +16513,7 @@
           <a:p>
             <a:fld id="{643E6671-CB4B-433F-A30B-AEAEAE894B3A}" type="datetimeFigureOut">
               <a:rPr lang="en-US" smtClean="0"/>
-              <a:t>6/30/2021</a:t>
+              <a:t>7/8/2021</a:t>
             </a:fld>
             <a:endParaRPr lang="en-US"/>
           </a:p>
@@ -19332,7 +16721,7 @@
           <a:p>
             <a:fld id="{643E6671-CB4B-433F-A30B-AEAEAE894B3A}" type="datetimeFigureOut">
               <a:rPr lang="en-US" smtClean="0"/>
-              <a:t>6/30/2021</a:t>
+              <a:t>7/8/2021</a:t>
             </a:fld>
             <a:endParaRPr lang="en-US"/>
           </a:p>
@@ -19530,7 +16919,7 @@
           <a:p>
             <a:fld id="{643E6671-CB4B-433F-A30B-AEAEAE894B3A}" type="datetimeFigureOut">
               <a:rPr lang="en-US" smtClean="0"/>
-              <a:t>6/30/2021</a:t>
+              <a:t>7/8/2021</a:t>
             </a:fld>
             <a:endParaRPr lang="en-US"/>
           </a:p>
@@ -19805,7 +17194,7 @@
           <a:p>
             <a:fld id="{643E6671-CB4B-433F-A30B-AEAEAE894B3A}" type="datetimeFigureOut">
               <a:rPr lang="en-US" smtClean="0"/>
-              <a:t>6/30/2021</a:t>
+              <a:t>7/8/2021</a:t>
             </a:fld>
             <a:endParaRPr lang="en-US"/>
           </a:p>
@@ -20070,7 +17459,7 @@
           <a:p>
             <a:fld id="{643E6671-CB4B-433F-A30B-AEAEAE894B3A}" type="datetimeFigureOut">
               <a:rPr lang="en-US" smtClean="0"/>
-              <a:t>6/30/2021</a:t>
+              <a:t>7/8/2021</a:t>
             </a:fld>
             <a:endParaRPr lang="en-US"/>
           </a:p>
@@ -20482,7 +17871,7 @@
           <a:p>
             <a:fld id="{643E6671-CB4B-433F-A30B-AEAEAE894B3A}" type="datetimeFigureOut">
               <a:rPr lang="en-US" smtClean="0"/>
-              <a:t>6/30/2021</a:t>
+              <a:t>7/8/2021</a:t>
             </a:fld>
             <a:endParaRPr lang="en-US"/>
           </a:p>
@@ -20623,7 +18012,7 @@
           <a:p>
             <a:fld id="{643E6671-CB4B-433F-A30B-AEAEAE894B3A}" type="datetimeFigureOut">
               <a:rPr lang="en-US" smtClean="0"/>
-              <a:t>6/30/2021</a:t>
+              <a:t>7/8/2021</a:t>
             </a:fld>
             <a:endParaRPr lang="en-US"/>
           </a:p>
@@ -20736,7 +18125,7 @@
           <a:p>
             <a:fld id="{643E6671-CB4B-433F-A30B-AEAEAE894B3A}" type="datetimeFigureOut">
               <a:rPr lang="en-US" smtClean="0"/>
-              <a:t>6/30/2021</a:t>
+              <a:t>7/8/2021</a:t>
             </a:fld>
             <a:endParaRPr lang="en-US"/>
           </a:p>
@@ -21047,7 +18436,7 @@
           <a:p>
             <a:fld id="{643E6671-CB4B-433F-A30B-AEAEAE894B3A}" type="datetimeFigureOut">
               <a:rPr lang="en-US" smtClean="0"/>
-              <a:t>6/30/2021</a:t>
+              <a:t>7/8/2021</a:t>
             </a:fld>
             <a:endParaRPr lang="en-US"/>
           </a:p>
@@ -21335,7 +18724,7 @@
           <a:p>
             <a:fld id="{643E6671-CB4B-433F-A30B-AEAEAE894B3A}" type="datetimeFigureOut">
               <a:rPr lang="en-US" smtClean="0"/>
-              <a:t>6/30/2021</a:t>
+              <a:t>7/8/2021</a:t>
             </a:fld>
             <a:endParaRPr lang="en-US"/>
           </a:p>
@@ -21576,7 +18965,7 @@
           <a:p>
             <a:fld id="{643E6671-CB4B-433F-A30B-AEAEAE894B3A}" type="datetimeFigureOut">
               <a:rPr lang="en-US" smtClean="0"/>
-              <a:t>6/30/2021</a:t>
+              <a:t>7/8/2021</a:t>
             </a:fld>
             <a:endParaRPr lang="en-US"/>
           </a:p>
@@ -21995,10 +19384,10 @@
       </p:grpSpPr>
       <p:sp>
         <p:nvSpPr>
-          <p:cNvPr id="6" name="Title 5">
+          <p:cNvPr id="2" name="Title 1">
             <a:extLst>
               <a:ext uri="{FF2B5EF4-FFF2-40B4-BE49-F238E27FC236}">
-                <a16:creationId xmlns:a16="http://schemas.microsoft.com/office/drawing/2014/main" id="{3010BD28-CE35-488D-8957-A6ADF0266298}"/>
+                <a16:creationId xmlns:a16="http://schemas.microsoft.com/office/drawing/2014/main" id="{9A0458DE-4AA8-4D17-B3D9-447DD4DB1018}"/>
               </a:ext>
             </a:extLst>
           </p:cNvPr>
@@ -22014,6 +19403,7 @@
           <a:bodyPr/>
           <a:lstStyle/>
           <a:p>
+            <a:pPr algn="ctr"/>
             <a:r>
               <a:rPr lang="en-US" dirty="0"/>
               <a:t>What does a visualization library do?</a:t>
@@ -22021,70 +19411,94 @@
           </a:p>
         </p:txBody>
       </p:sp>
-      <p:pic>
-        <p:nvPicPr>
-          <p:cNvPr id="12" name="Picture 11">
+      <p:graphicFrame>
+        <p:nvGraphicFramePr>
+          <p:cNvPr id="4" name="Content Placeholder 3">
             <a:extLst>
               <a:ext uri="{FF2B5EF4-FFF2-40B4-BE49-F238E27FC236}">
-                <a16:creationId xmlns:a16="http://schemas.microsoft.com/office/drawing/2014/main" id="{DE9D9680-7408-4363-A988-8C87F28376ED}"/>
+                <a16:creationId xmlns:a16="http://schemas.microsoft.com/office/drawing/2014/main" id="{27281DDF-13F9-4178-B1F8-F23A1B4A5F41}"/>
               </a:ext>
             </a:extLst>
           </p:cNvPr>
-          <p:cNvPicPr>
-            <a:picLocks noChangeAspect="1"/>
-          </p:cNvPicPr>
-          <p:nvPr/>
-        </p:nvPicPr>
-        <p:blipFill>
-          <a:blip r:embed="rId2"/>
-          <a:stretch>
-            <a:fillRect/>
-          </a:stretch>
-        </p:blipFill>
-        <p:spPr>
-          <a:xfrm>
-            <a:off x="868851" y="1877256"/>
-            <a:ext cx="5227149" cy="3970865"/>
-          </a:xfrm>
-          <a:prstGeom prst="rect">
-            <a:avLst/>
-          </a:prstGeom>
-        </p:spPr>
-      </p:pic>
-      <p:pic>
-        <p:nvPicPr>
-          <p:cNvPr id="14" name="Picture 13">
+          <p:cNvGraphicFramePr>
+            <a:graphicFrameLocks noGrp="1"/>
+          </p:cNvGraphicFramePr>
+          <p:nvPr>
+            <p:ph idx="1"/>
+            <p:extLst>
+              <p:ext uri="{D42A27DB-BD31-4B8C-83A1-F6EECF244321}">
+                <p14:modId xmlns:p14="http://schemas.microsoft.com/office/powerpoint/2010/main" val="276453703"/>
+              </p:ext>
+            </p:extLst>
+          </p:nvPr>
+        </p:nvGraphicFramePr>
+        <p:xfrm>
+          <a:off x="838200" y="1690688"/>
+          <a:ext cx="10515600" cy="2998677"/>
+        </p:xfrm>
+        <a:graphic>
+          <a:graphicData uri="http://schemas.openxmlformats.org/drawingml/2006/diagram">
+            <dgm:relIds xmlns:dgm="http://schemas.openxmlformats.org/drawingml/2006/diagram" xmlns:r="http://schemas.openxmlformats.org/officeDocument/2006/relationships" r:dm="rId2" r:lo="rId3" r:qs="rId4" r:cs="rId5"/>
+          </a:graphicData>
+        </a:graphic>
+      </p:graphicFrame>
+      <p:sp>
+        <p:nvSpPr>
+          <p:cNvPr id="3" name="Arrow: Curved Up 2">
             <a:extLst>
               <a:ext uri="{FF2B5EF4-FFF2-40B4-BE49-F238E27FC236}">
-                <a16:creationId xmlns:a16="http://schemas.microsoft.com/office/drawing/2014/main" id="{E515FC66-B562-4849-9143-8F361882DD12}"/>
+                <a16:creationId xmlns:a16="http://schemas.microsoft.com/office/drawing/2014/main" id="{EBBEFB31-C822-43FD-AB3D-AC4D89978DBB}"/>
               </a:ext>
             </a:extLst>
           </p:cNvPr>
-          <p:cNvPicPr>
-            <a:picLocks noChangeAspect="1"/>
-          </p:cNvPicPr>
+          <p:cNvSpPr/>
           <p:nvPr/>
-        </p:nvPicPr>
-        <p:blipFill>
-          <a:blip r:embed="rId3"/>
-          <a:stretch>
-            <a:fillRect/>
-          </a:stretch>
-        </p:blipFill>
+        </p:nvSpPr>
         <p:spPr>
-          <a:xfrm>
-            <a:off x="5949841" y="1877256"/>
-            <a:ext cx="5435244" cy="4109269"/>
+          <a:xfrm flipH="1">
+            <a:off x="1236910" y="3592597"/>
+            <a:ext cx="9435101" cy="1998228"/>
           </a:xfrm>
-          <a:prstGeom prst="rect">
+          <a:prstGeom prst="curvedUpArrow">
             <a:avLst/>
           </a:prstGeom>
+          <a:solidFill>
+            <a:srgbClr val="E6D5F3"/>
+          </a:solidFill>
         </p:spPr>
-      </p:pic>
+        <p:style>
+          <a:lnRef idx="2">
+            <a:schemeClr val="accent1">
+              <a:shade val="50000"/>
+            </a:schemeClr>
+          </a:lnRef>
+          <a:fillRef idx="1">
+            <a:schemeClr val="accent1"/>
+          </a:fillRef>
+          <a:effectRef idx="0">
+            <a:schemeClr val="accent1"/>
+          </a:effectRef>
+          <a:fontRef idx="minor">
+            <a:schemeClr val="lt1"/>
+          </a:fontRef>
+        </p:style>
+        <p:txBody>
+          <a:bodyPr rtlCol="0" anchor="ctr"/>
+          <a:lstStyle/>
+          <a:p>
+            <a:pPr algn="ctr"/>
+            <a:endParaRPr lang="en-US" dirty="0">
+              <a:solidFill>
+                <a:schemeClr val="tx1"/>
+              </a:solidFill>
+            </a:endParaRPr>
+          </a:p>
+        </p:txBody>
+      </p:sp>
     </p:spTree>
     <p:extLst>
       <p:ext uri="{BB962C8B-B14F-4D97-AF65-F5344CB8AC3E}">
-        <p14:creationId xmlns:p14="http://schemas.microsoft.com/office/powerpoint/2010/main" val="143390563"/>
+        <p14:creationId xmlns:p14="http://schemas.microsoft.com/office/powerpoint/2010/main" val="2183605409"/>
       </p:ext>
     </p:extLst>
   </p:cSld>
@@ -22095,6 +19509,412 @@
 </file>
 
 <file path=ppt/slides/slide10.xml><?xml version="1.0" encoding="utf-8"?>
+<p:sld xmlns:a="http://schemas.openxmlformats.org/drawingml/2006/main" xmlns:r="http://schemas.openxmlformats.org/officeDocument/2006/relationships" xmlns:p="http://schemas.openxmlformats.org/presentationml/2006/main">
+  <p:cSld>
+    <p:bg>
+      <p:bgPr>
+        <a:solidFill>
+          <a:schemeClr val="bg1"/>
+        </a:solidFill>
+        <a:effectLst/>
+      </p:bgPr>
+    </p:bg>
+    <p:spTree>
+      <p:nvGrpSpPr>
+        <p:cNvPr id="1" name=""/>
+        <p:cNvGrpSpPr/>
+        <p:nvPr/>
+      </p:nvGrpSpPr>
+      <p:grpSpPr>
+        <a:xfrm>
+          <a:off x="0" y="0"/>
+          <a:ext cx="0" cy="0"/>
+          <a:chOff x="0" y="0"/>
+          <a:chExt cx="0" cy="0"/>
+        </a:xfrm>
+      </p:grpSpPr>
+      <p:pic>
+        <p:nvPicPr>
+          <p:cNvPr id="3" name="Picture 2" descr="Shape&#10;&#10;Description automatically generated with medium confidence">
+            <a:extLst>
+              <a:ext uri="{FF2B5EF4-FFF2-40B4-BE49-F238E27FC236}">
+                <a16:creationId xmlns:a16="http://schemas.microsoft.com/office/drawing/2014/main" id="{34DA06CB-40CF-4CFC-8A81-9CA1AFA83920}"/>
+              </a:ext>
+            </a:extLst>
+          </p:cNvPr>
+          <p:cNvPicPr>
+            <a:picLocks noChangeAspect="1"/>
+          </p:cNvPicPr>
+          <p:nvPr/>
+        </p:nvPicPr>
+        <p:blipFill>
+          <a:blip r:embed="rId2">
+            <a:extLst>
+              <a:ext uri="{28A0092B-C50C-407E-A947-70E740481C1C}">
+                <a14:useLocalDpi xmlns:a14="http://schemas.microsoft.com/office/drawing/2010/main" val="0"/>
+              </a:ext>
+            </a:extLst>
+          </a:blip>
+          <a:stretch>
+            <a:fillRect/>
+          </a:stretch>
+        </p:blipFill>
+        <p:spPr>
+          <a:xfrm>
+            <a:off x="643467" y="1561508"/>
+            <a:ext cx="10905066" cy="3734982"/>
+          </a:xfrm>
+          <a:prstGeom prst="rect">
+            <a:avLst/>
+          </a:prstGeom>
+        </p:spPr>
+      </p:pic>
+    </p:spTree>
+    <p:extLst>
+      <p:ext uri="{BB962C8B-B14F-4D97-AF65-F5344CB8AC3E}">
+        <p14:creationId xmlns:p14="http://schemas.microsoft.com/office/powerpoint/2010/main" val="1444204905"/>
+      </p:ext>
+    </p:extLst>
+  </p:cSld>
+  <p:clrMapOvr>
+    <a:masterClrMapping/>
+  </p:clrMapOvr>
+</p:sld>
+</file>
+
+<file path=ppt/slides/slide11.xml><?xml version="1.0" encoding="utf-8"?>
+<p:sld xmlns:a="http://schemas.openxmlformats.org/drawingml/2006/main" xmlns:r="http://schemas.openxmlformats.org/officeDocument/2006/relationships" xmlns:p="http://schemas.openxmlformats.org/presentationml/2006/main">
+  <p:cSld>
+    <p:spTree>
+      <p:nvGrpSpPr>
+        <p:cNvPr id="1" name=""/>
+        <p:cNvGrpSpPr/>
+        <p:nvPr/>
+      </p:nvGrpSpPr>
+      <p:grpSpPr>
+        <a:xfrm>
+          <a:off x="0" y="0"/>
+          <a:ext cx="0" cy="0"/>
+          <a:chOff x="0" y="0"/>
+          <a:chExt cx="0" cy="0"/>
+        </a:xfrm>
+      </p:grpSpPr>
+      <p:sp>
+        <p:nvSpPr>
+          <p:cNvPr id="2" name="Title 1">
+            <a:extLst>
+              <a:ext uri="{FF2B5EF4-FFF2-40B4-BE49-F238E27FC236}">
+                <a16:creationId xmlns:a16="http://schemas.microsoft.com/office/drawing/2014/main" id="{9A0458DE-4AA8-4D17-B3D9-447DD4DB1018}"/>
+              </a:ext>
+            </a:extLst>
+          </p:cNvPr>
+          <p:cNvSpPr>
+            <a:spLocks noGrp="1"/>
+          </p:cNvSpPr>
+          <p:nvPr>
+            <p:ph type="title"/>
+          </p:nvPr>
+        </p:nvSpPr>
+        <p:spPr/>
+        <p:txBody>
+          <a:bodyPr/>
+          <a:lstStyle/>
+          <a:p>
+            <a:pPr algn="ctr"/>
+            <a:r>
+              <a:rPr lang="en-US" dirty="0"/>
+              <a:t>What are the rules for these arrows?</a:t>
+            </a:r>
+          </a:p>
+        </p:txBody>
+      </p:sp>
+      <p:graphicFrame>
+        <p:nvGraphicFramePr>
+          <p:cNvPr id="4" name="Content Placeholder 3">
+            <a:extLst>
+              <a:ext uri="{FF2B5EF4-FFF2-40B4-BE49-F238E27FC236}">
+                <a16:creationId xmlns:a16="http://schemas.microsoft.com/office/drawing/2014/main" id="{27281DDF-13F9-4178-B1F8-F23A1B4A5F41}"/>
+              </a:ext>
+            </a:extLst>
+          </p:cNvPr>
+          <p:cNvGraphicFramePr>
+            <a:graphicFrameLocks noGrp="1"/>
+          </p:cNvGraphicFramePr>
+          <p:nvPr>
+            <p:ph idx="1"/>
+            <p:extLst>
+              <p:ext uri="{D42A27DB-BD31-4B8C-83A1-F6EECF244321}">
+                <p14:modId xmlns:p14="http://schemas.microsoft.com/office/powerpoint/2010/main" val="3241057211"/>
+              </p:ext>
+            </p:extLst>
+          </p:nvPr>
+        </p:nvGraphicFramePr>
+        <p:xfrm>
+          <a:off x="958516" y="884572"/>
+          <a:ext cx="10515600" cy="2998677"/>
+        </p:xfrm>
+        <a:graphic>
+          <a:graphicData uri="http://schemas.openxmlformats.org/drawingml/2006/diagram">
+            <dgm:relIds xmlns:dgm="http://schemas.openxmlformats.org/drawingml/2006/diagram" xmlns:r="http://schemas.openxmlformats.org/officeDocument/2006/relationships" r:dm="rId2" r:lo="rId3" r:qs="rId4" r:cs="rId5"/>
+          </a:graphicData>
+        </a:graphic>
+      </p:graphicFrame>
+      <p:sp>
+        <p:nvSpPr>
+          <p:cNvPr id="3" name="Arrow: Curved Up 2">
+            <a:extLst>
+              <a:ext uri="{FF2B5EF4-FFF2-40B4-BE49-F238E27FC236}">
+                <a16:creationId xmlns:a16="http://schemas.microsoft.com/office/drawing/2014/main" id="{EBBEFB31-C822-43FD-AB3D-AC4D89978DBB}"/>
+              </a:ext>
+            </a:extLst>
+          </p:cNvPr>
+          <p:cNvSpPr/>
+          <p:nvPr/>
+        </p:nvSpPr>
+        <p:spPr>
+          <a:xfrm flipH="1">
+            <a:off x="1323474" y="2873885"/>
+            <a:ext cx="9910010" cy="3057622"/>
+          </a:xfrm>
+          <a:prstGeom prst="curvedUpArrow">
+            <a:avLst/>
+          </a:prstGeom>
+          <a:solidFill>
+            <a:srgbClr val="7030A0"/>
+          </a:solidFill>
+        </p:spPr>
+        <p:style>
+          <a:lnRef idx="2">
+            <a:schemeClr val="accent1">
+              <a:shade val="50000"/>
+            </a:schemeClr>
+          </a:lnRef>
+          <a:fillRef idx="1">
+            <a:schemeClr val="accent1"/>
+          </a:fillRef>
+          <a:effectRef idx="0">
+            <a:schemeClr val="accent1"/>
+          </a:effectRef>
+          <a:fontRef idx="minor">
+            <a:schemeClr val="lt1"/>
+          </a:fontRef>
+        </p:style>
+        <p:txBody>
+          <a:bodyPr rtlCol="0" anchor="ctr"/>
+          <a:lstStyle/>
+          <a:p>
+            <a:pPr algn="ctr"/>
+            <a:endParaRPr lang="en-US" dirty="0">
+              <a:solidFill>
+                <a:schemeClr val="tx1"/>
+              </a:solidFill>
+            </a:endParaRPr>
+          </a:p>
+        </p:txBody>
+      </p:sp>
+      <p:sp>
+        <p:nvSpPr>
+          <p:cNvPr id="13" name="Arrow: Right 12">
+            <a:extLst>
+              <a:ext uri="{FF2B5EF4-FFF2-40B4-BE49-F238E27FC236}">
+                <a16:creationId xmlns:a16="http://schemas.microsoft.com/office/drawing/2014/main" id="{C7909514-D251-4AE5-B8CF-0B3AB34EC0FE}"/>
+              </a:ext>
+            </a:extLst>
+          </p:cNvPr>
+          <p:cNvSpPr/>
+          <p:nvPr/>
+        </p:nvSpPr>
+        <p:spPr>
+          <a:xfrm>
+            <a:off x="3116179" y="2622884"/>
+            <a:ext cx="2033337" cy="308897"/>
+          </a:xfrm>
+          <a:prstGeom prst="rightArrow">
+            <a:avLst/>
+          </a:prstGeom>
+          <a:solidFill>
+            <a:srgbClr val="7030A0"/>
+          </a:solidFill>
+        </p:spPr>
+        <p:style>
+          <a:lnRef idx="2">
+            <a:schemeClr val="accent1">
+              <a:shade val="50000"/>
+            </a:schemeClr>
+          </a:lnRef>
+          <a:fillRef idx="1">
+            <a:schemeClr val="accent1"/>
+          </a:fillRef>
+          <a:effectRef idx="0">
+            <a:schemeClr val="accent1"/>
+          </a:effectRef>
+          <a:fontRef idx="minor">
+            <a:schemeClr val="lt1"/>
+          </a:fontRef>
+        </p:style>
+        <p:txBody>
+          <a:bodyPr rtlCol="0" anchor="ctr"/>
+          <a:lstStyle/>
+          <a:p>
+            <a:pPr algn="ctr"/>
+            <a:endParaRPr lang="en-US"/>
+          </a:p>
+        </p:txBody>
+      </p:sp>
+      <p:sp>
+        <p:nvSpPr>
+          <p:cNvPr id="10" name="Arrow: Right 9">
+            <a:extLst>
+              <a:ext uri="{FF2B5EF4-FFF2-40B4-BE49-F238E27FC236}">
+                <a16:creationId xmlns:a16="http://schemas.microsoft.com/office/drawing/2014/main" id="{8F931857-48ED-45E9-9E4A-D99026FD9901}"/>
+              </a:ext>
+            </a:extLst>
+          </p:cNvPr>
+          <p:cNvSpPr/>
+          <p:nvPr/>
+        </p:nvSpPr>
+        <p:spPr>
+          <a:xfrm>
+            <a:off x="3116179" y="2313987"/>
+            <a:ext cx="2033337" cy="308897"/>
+          </a:xfrm>
+          <a:prstGeom prst="rightArrow">
+            <a:avLst/>
+          </a:prstGeom>
+          <a:solidFill>
+            <a:srgbClr val="7030A0"/>
+          </a:solidFill>
+        </p:spPr>
+        <p:style>
+          <a:lnRef idx="2">
+            <a:schemeClr val="accent1">
+              <a:shade val="50000"/>
+            </a:schemeClr>
+          </a:lnRef>
+          <a:fillRef idx="1">
+            <a:schemeClr val="accent1"/>
+          </a:fillRef>
+          <a:effectRef idx="0">
+            <a:schemeClr val="accent1"/>
+          </a:effectRef>
+          <a:fontRef idx="minor">
+            <a:schemeClr val="lt1"/>
+          </a:fontRef>
+        </p:style>
+        <p:txBody>
+          <a:bodyPr rtlCol="0" anchor="ctr"/>
+          <a:lstStyle/>
+          <a:p>
+            <a:pPr algn="ctr"/>
+            <a:endParaRPr lang="en-US"/>
+          </a:p>
+        </p:txBody>
+      </p:sp>
+      <p:sp>
+        <p:nvSpPr>
+          <p:cNvPr id="14" name="Arrow: Right 13">
+            <a:extLst>
+              <a:ext uri="{FF2B5EF4-FFF2-40B4-BE49-F238E27FC236}">
+                <a16:creationId xmlns:a16="http://schemas.microsoft.com/office/drawing/2014/main" id="{47FEB999-FAF7-4821-9611-C908D22EC1B9}"/>
+              </a:ext>
+            </a:extLst>
+          </p:cNvPr>
+          <p:cNvSpPr/>
+          <p:nvPr/>
+        </p:nvSpPr>
+        <p:spPr>
+          <a:xfrm>
+            <a:off x="3116179" y="1976129"/>
+            <a:ext cx="2033337" cy="308897"/>
+          </a:xfrm>
+          <a:prstGeom prst="rightArrow">
+            <a:avLst/>
+          </a:prstGeom>
+          <a:solidFill>
+            <a:srgbClr val="7030A0"/>
+          </a:solidFill>
+        </p:spPr>
+        <p:style>
+          <a:lnRef idx="2">
+            <a:schemeClr val="accent1">
+              <a:shade val="50000"/>
+            </a:schemeClr>
+          </a:lnRef>
+          <a:fillRef idx="1">
+            <a:schemeClr val="accent1"/>
+          </a:fillRef>
+          <a:effectRef idx="0">
+            <a:schemeClr val="accent1"/>
+          </a:effectRef>
+          <a:fontRef idx="minor">
+            <a:schemeClr val="lt1"/>
+          </a:fontRef>
+        </p:style>
+        <p:txBody>
+          <a:bodyPr rtlCol="0" anchor="ctr"/>
+          <a:lstStyle/>
+          <a:p>
+            <a:pPr algn="ctr"/>
+            <a:endParaRPr lang="en-US"/>
+          </a:p>
+        </p:txBody>
+      </p:sp>
+      <p:sp>
+        <p:nvSpPr>
+          <p:cNvPr id="5" name="TextBox 4">
+            <a:extLst>
+              <a:ext uri="{FF2B5EF4-FFF2-40B4-BE49-F238E27FC236}">
+                <a16:creationId xmlns:a16="http://schemas.microsoft.com/office/drawing/2014/main" id="{7BFB1905-014E-4F7C-893C-8F751BC8B1B6}"/>
+              </a:ext>
+            </a:extLst>
+          </p:cNvPr>
+          <p:cNvSpPr txBox="1"/>
+          <p:nvPr/>
+        </p:nvSpPr>
+        <p:spPr>
+          <a:xfrm>
+            <a:off x="3116179" y="2153580"/>
+            <a:ext cx="1917154" cy="584775"/>
+          </a:xfrm>
+          <a:prstGeom prst="rect">
+            <a:avLst/>
+          </a:prstGeom>
+          <a:noFill/>
+        </p:spPr>
+        <p:txBody>
+          <a:bodyPr wrap="square" rtlCol="0">
+            <a:spAutoFit/>
+          </a:bodyPr>
+          <a:lstStyle/>
+          <a:p>
+            <a:r>
+              <a:rPr lang="en-US" sz="3200" dirty="0">
+                <a:solidFill>
+                  <a:schemeClr val="bg1"/>
+                </a:solidFill>
+                <a:highlight>
+                  <a:srgbClr val="800080"/>
+                </a:highlight>
+              </a:rPr>
+              <a:t>Transform</a:t>
+            </a:r>
+          </a:p>
+        </p:txBody>
+      </p:sp>
+    </p:spTree>
+    <p:extLst>
+      <p:ext uri="{BB962C8B-B14F-4D97-AF65-F5344CB8AC3E}">
+        <p14:creationId xmlns:p14="http://schemas.microsoft.com/office/powerpoint/2010/main" val="1190897391"/>
+      </p:ext>
+    </p:extLst>
+  </p:cSld>
+  <p:clrMapOvr>
+    <a:masterClrMapping/>
+  </p:clrMapOvr>
+</p:sld>
+</file>
+
+<file path=ppt/slides/slide12.xml><?xml version="1.0" encoding="utf-8"?>
 <p:sld xmlns:a="http://schemas.openxmlformats.org/drawingml/2006/main" xmlns:r="http://schemas.openxmlformats.org/officeDocument/2006/relationships" xmlns:p="http://schemas.openxmlformats.org/presentationml/2006/main">
   <p:cSld>
     <p:spTree>
@@ -22154,6 +19974,11 @@
           </p:cNvGraphicFramePr>
           <p:nvPr>
             <p:ph idx="1"/>
+            <p:extLst>
+              <p:ext uri="{D42A27DB-BD31-4B8C-83A1-F6EECF244321}">
+                <p14:modId xmlns:p14="http://schemas.microsoft.com/office/powerpoint/2010/main" val="431090757"/>
+              </p:ext>
+            </p:extLst>
           </p:nvPr>
         </p:nvGraphicFramePr>
         <p:xfrm>
@@ -22390,246 +20215,7 @@
     </p:spTree>
     <p:extLst>
       <p:ext uri="{BB962C8B-B14F-4D97-AF65-F5344CB8AC3E}">
-        <p14:creationId xmlns:p14="http://schemas.microsoft.com/office/powerpoint/2010/main" val="669411001"/>
-      </p:ext>
-    </p:extLst>
-  </p:cSld>
-  <p:clrMapOvr>
-    <a:masterClrMapping/>
-  </p:clrMapOvr>
-</p:sld>
-</file>
-
-<file path=ppt/slides/slide11.xml><?xml version="1.0" encoding="utf-8"?>
-<p:sld xmlns:a="http://schemas.openxmlformats.org/drawingml/2006/main" xmlns:r="http://schemas.openxmlformats.org/officeDocument/2006/relationships" xmlns:p="http://schemas.openxmlformats.org/presentationml/2006/main">
-  <p:cSld>
-    <p:bg>
-      <p:bgPr>
-        <a:solidFill>
-          <a:schemeClr val="bg1"/>
-        </a:solidFill>
-        <a:effectLst/>
-      </p:bgPr>
-    </p:bg>
-    <p:spTree>
-      <p:nvGrpSpPr>
-        <p:cNvPr id="1" name=""/>
-        <p:cNvGrpSpPr/>
-        <p:nvPr/>
-      </p:nvGrpSpPr>
-      <p:grpSpPr>
-        <a:xfrm>
-          <a:off x="0" y="0"/>
-          <a:ext cx="0" cy="0"/>
-          <a:chOff x="0" y="0"/>
-          <a:chExt cx="0" cy="0"/>
-        </a:xfrm>
-      </p:grpSpPr>
-      <p:sp>
-        <p:nvSpPr>
-          <p:cNvPr id="2" name="Title 1">
-            <a:extLst>
-              <a:ext uri="{FF2B5EF4-FFF2-40B4-BE49-F238E27FC236}">
-                <a16:creationId xmlns:a16="http://schemas.microsoft.com/office/drawing/2014/main" id="{241ECC7E-D056-4D43-B459-33675E6C6EC2}"/>
-              </a:ext>
-            </a:extLst>
-          </p:cNvPr>
-          <p:cNvSpPr>
-            <a:spLocks noGrp="1"/>
-          </p:cNvSpPr>
-          <p:nvPr>
-            <p:ph type="title"/>
-          </p:nvPr>
-        </p:nvSpPr>
-        <p:spPr>
-          <a:xfrm>
-            <a:off x="838199" y="291090"/>
-            <a:ext cx="10515599" cy="932688"/>
-          </a:xfrm>
-        </p:spPr>
-        <p:txBody>
-          <a:bodyPr vert="horz" lIns="91440" tIns="45720" rIns="91440" bIns="45720" rtlCol="0" anchor="b">
-            <a:normAutofit/>
-          </a:bodyPr>
-          <a:lstStyle/>
-          <a:p>
-            <a:r>
-              <a:rPr lang="en-US" sz="4600" kern="1200">
-                <a:solidFill>
-                  <a:schemeClr val="tx1"/>
-                </a:solidFill>
-                <a:latin typeface="+mj-lt"/>
-                <a:ea typeface="+mj-ea"/>
-                <a:cs typeface="+mj-cs"/>
-              </a:rPr>
-              <a:t>What does it mean to preserve topology?</a:t>
-            </a:r>
-          </a:p>
-        </p:txBody>
-      </p:sp>
-      <p:pic>
-        <p:nvPicPr>
-          <p:cNvPr id="11" name="Picture 10" descr="Shape&#10;&#10;Description automatically generated with medium confidence">
-            <a:extLst>
-              <a:ext uri="{FF2B5EF4-FFF2-40B4-BE49-F238E27FC236}">
-                <a16:creationId xmlns:a16="http://schemas.microsoft.com/office/drawing/2014/main" id="{1C614751-767D-4D8C-826F-525B151A2191}"/>
-              </a:ext>
-            </a:extLst>
-          </p:cNvPr>
-          <p:cNvPicPr>
-            <a:picLocks noChangeAspect="1"/>
-          </p:cNvPicPr>
-          <p:nvPr/>
-        </p:nvPicPr>
-        <p:blipFill>
-          <a:blip r:embed="rId2">
-            <a:extLst>
-              <a:ext uri="{28A0092B-C50C-407E-A947-70E740481C1C}">
-                <a14:useLocalDpi xmlns:a14="http://schemas.microsoft.com/office/drawing/2010/main" val="0"/>
-              </a:ext>
-            </a:extLst>
-          </a:blip>
-          <a:stretch>
-            <a:fillRect/>
-          </a:stretch>
-        </p:blipFill>
-        <p:spPr>
-          <a:xfrm>
-            <a:off x="838200" y="2335957"/>
-            <a:ext cx="10515599" cy="3496434"/>
-          </a:xfrm>
-          <a:prstGeom prst="rect">
-            <a:avLst/>
-          </a:prstGeom>
-        </p:spPr>
-      </p:pic>
-    </p:spTree>
-    <p:extLst>
-      <p:ext uri="{BB962C8B-B14F-4D97-AF65-F5344CB8AC3E}">
-        <p14:creationId xmlns:p14="http://schemas.microsoft.com/office/powerpoint/2010/main" val="861901806"/>
-      </p:ext>
-    </p:extLst>
-  </p:cSld>
-  <p:clrMapOvr>
-    <a:masterClrMapping/>
-  </p:clrMapOvr>
-</p:sld>
-</file>
-
-<file path=ppt/slides/slide12.xml><?xml version="1.0" encoding="utf-8"?>
-<p:sld xmlns:a="http://schemas.openxmlformats.org/drawingml/2006/main" xmlns:r="http://schemas.openxmlformats.org/officeDocument/2006/relationships" xmlns:p="http://schemas.openxmlformats.org/presentationml/2006/main">
-  <p:cSld>
-    <p:bg>
-      <p:bgPr>
-        <a:solidFill>
-          <a:schemeClr val="bg1"/>
-        </a:solidFill>
-        <a:effectLst/>
-      </p:bgPr>
-    </p:bg>
-    <p:spTree>
-      <p:nvGrpSpPr>
-        <p:cNvPr id="1" name=""/>
-        <p:cNvGrpSpPr/>
-        <p:nvPr/>
-      </p:nvGrpSpPr>
-      <p:grpSpPr>
-        <a:xfrm>
-          <a:off x="0" y="0"/>
-          <a:ext cx="0" cy="0"/>
-          <a:chOff x="0" y="0"/>
-          <a:chExt cx="0" cy="0"/>
-        </a:xfrm>
-      </p:grpSpPr>
-      <p:pic>
-        <p:nvPicPr>
-          <p:cNvPr id="10" name="Picture 9" descr="Shape&#10;&#10;Description automatically generated with medium confidence">
-            <a:extLst>
-              <a:ext uri="{FF2B5EF4-FFF2-40B4-BE49-F238E27FC236}">
-                <a16:creationId xmlns:a16="http://schemas.microsoft.com/office/drawing/2014/main" id="{6A36B61A-C450-4E26-A497-636A248F2CFD}"/>
-              </a:ext>
-            </a:extLst>
-          </p:cNvPr>
-          <p:cNvPicPr>
-            <a:picLocks noChangeAspect="1"/>
-          </p:cNvPicPr>
-          <p:nvPr/>
-        </p:nvPicPr>
-        <p:blipFill>
-          <a:blip r:embed="rId3">
-            <a:extLst>
-              <a:ext uri="{28A0092B-C50C-407E-A947-70E740481C1C}">
-                <a14:useLocalDpi xmlns:a14="http://schemas.microsoft.com/office/drawing/2010/main" val="0"/>
-              </a:ext>
-            </a:extLst>
-          </a:blip>
-          <a:stretch>
-            <a:fillRect/>
-          </a:stretch>
-        </p:blipFill>
-        <p:spPr>
-          <a:xfrm>
-            <a:off x="643467" y="1616033"/>
-            <a:ext cx="10905066" cy="3625932"/>
-          </a:xfrm>
-          <a:prstGeom prst="rect">
-            <a:avLst/>
-          </a:prstGeom>
-        </p:spPr>
-      </p:pic>
-      <p:sp>
-        <p:nvSpPr>
-          <p:cNvPr id="16" name="Arrow: Right 15">
-            <a:extLst>
-              <a:ext uri="{FF2B5EF4-FFF2-40B4-BE49-F238E27FC236}">
-                <a16:creationId xmlns:a16="http://schemas.microsoft.com/office/drawing/2014/main" id="{DF92909A-BB20-4566-BE42-443797E44D39}"/>
-              </a:ext>
-            </a:extLst>
-          </p:cNvPr>
-          <p:cNvSpPr/>
-          <p:nvPr/>
-        </p:nvSpPr>
-        <p:spPr>
-          <a:xfrm flipH="1">
-            <a:off x="5281448" y="3022599"/>
-            <a:ext cx="2317531" cy="812799"/>
-          </a:xfrm>
-          <a:prstGeom prst="rightArrow">
-            <a:avLst/>
-          </a:prstGeom>
-          <a:solidFill>
-            <a:srgbClr val="7030A0"/>
-          </a:solidFill>
-        </p:spPr>
-        <p:style>
-          <a:lnRef idx="2">
-            <a:schemeClr val="accent1">
-              <a:shade val="50000"/>
-            </a:schemeClr>
-          </a:lnRef>
-          <a:fillRef idx="1">
-            <a:schemeClr val="accent1"/>
-          </a:fillRef>
-          <a:effectRef idx="0">
-            <a:schemeClr val="accent1"/>
-          </a:effectRef>
-          <a:fontRef idx="minor">
-            <a:schemeClr val="lt1"/>
-          </a:fontRef>
-        </p:style>
-        <p:txBody>
-          <a:bodyPr rtlCol="0" anchor="ctr"/>
-          <a:lstStyle/>
-          <a:p>
-            <a:pPr algn="ctr"/>
-            <a:endParaRPr lang="en-US"/>
-          </a:p>
-        </p:txBody>
-      </p:sp>
-    </p:spTree>
-    <p:extLst>
-      <p:ext uri="{BB962C8B-B14F-4D97-AF65-F5344CB8AC3E}">
-        <p14:creationId xmlns:p14="http://schemas.microsoft.com/office/powerpoint/2010/main" val="1178360069"/>
+        <p14:creationId xmlns:p14="http://schemas.microsoft.com/office/powerpoint/2010/main" val="2222384702"/>
       </p:ext>
     </p:extLst>
   </p:cSld>
@@ -22664,12 +20250,138 @@
           <a:chExt cx="0" cy="0"/>
         </a:xfrm>
       </p:grpSpPr>
+      <p:sp>
+        <p:nvSpPr>
+          <p:cNvPr id="8" name="Rectangle 9">
+            <a:extLst>
+              <a:ext uri="{FF2B5EF4-FFF2-40B4-BE49-F238E27FC236}">
+                <a16:creationId xmlns:a16="http://schemas.microsoft.com/office/drawing/2014/main" id="{32BC26D8-82FB-445E-AA49-62A77D7C1EE0}"/>
+              </a:ext>
+              <a:ext uri="{C183D7F6-B498-43B3-948B-1728B52AA6E4}">
+                <adec:decorative xmlns:adec="http://schemas.microsoft.com/office/drawing/2017/decorative" val="1"/>
+              </a:ext>
+            </a:extLst>
+          </p:cNvPr>
+          <p:cNvSpPr>
+            <a:spLocks noGrp="1" noRot="1" noChangeAspect="1" noMove="1" noResize="1" noEditPoints="1" noAdjustHandles="1" noChangeArrowheads="1" noChangeShapeType="1" noTextEdit="1"/>
+          </p:cNvSpPr>
+          <p:nvPr>
+            <p:extLst>
+              <p:ext uri="{386F3935-93C4-4BCD-93E2-E3B085C9AB24}">
+                <p16:designElem xmlns:p16="http://schemas.microsoft.com/office/powerpoint/2015/main" val="1"/>
+              </p:ext>
+            </p:extLst>
+          </p:nvPr>
+        </p:nvSpPr>
+        <p:spPr>
+          <a:xfrm>
+            <a:off x="0" y="0"/>
+            <a:ext cx="12192000" cy="6858000"/>
+          </a:xfrm>
+          <a:prstGeom prst="rect">
+            <a:avLst/>
+          </a:prstGeom>
+          <a:solidFill>
+            <a:srgbClr val="333758"/>
+          </a:solidFill>
+          <a:ln>
+            <a:noFill/>
+          </a:ln>
+        </p:spPr>
+        <p:style>
+          <a:lnRef idx="2">
+            <a:schemeClr val="accent1">
+              <a:shade val="50000"/>
+            </a:schemeClr>
+          </a:lnRef>
+          <a:fillRef idx="1">
+            <a:schemeClr val="accent1"/>
+          </a:fillRef>
+          <a:effectRef idx="0">
+            <a:schemeClr val="accent1"/>
+          </a:effectRef>
+          <a:fontRef idx="minor">
+            <a:schemeClr val="lt1"/>
+          </a:fontRef>
+        </p:style>
+        <p:txBody>
+          <a:bodyPr rtlCol="0" anchor="ctr"/>
+          <a:lstStyle/>
+          <a:p>
+            <a:pPr algn="ctr"/>
+            <a:endParaRPr lang="en-US"/>
+          </a:p>
+        </p:txBody>
+      </p:sp>
+      <p:sp>
+        <p:nvSpPr>
+          <p:cNvPr id="9" name="Rectangle 11">
+            <a:extLst>
+              <a:ext uri="{FF2B5EF4-FFF2-40B4-BE49-F238E27FC236}">
+                <a16:creationId xmlns:a16="http://schemas.microsoft.com/office/drawing/2014/main" id="{CB44330D-EA18-4254-AA95-EB49948539B8}"/>
+              </a:ext>
+              <a:ext uri="{C183D7F6-B498-43B3-948B-1728B52AA6E4}">
+                <adec:decorative xmlns:adec="http://schemas.microsoft.com/office/drawing/2017/decorative" val="1"/>
+              </a:ext>
+            </a:extLst>
+          </p:cNvPr>
+          <p:cNvSpPr>
+            <a:spLocks noGrp="1" noRot="1" noChangeAspect="1" noMove="1" noResize="1" noEditPoints="1" noAdjustHandles="1" noChangeArrowheads="1" noChangeShapeType="1" noTextEdit="1"/>
+          </p:cNvSpPr>
+          <p:nvPr>
+            <p:extLst>
+              <p:ext uri="{386F3935-93C4-4BCD-93E2-E3B085C9AB24}">
+                <p16:designElem xmlns:p16="http://schemas.microsoft.com/office/powerpoint/2015/main" val="1"/>
+              </p:ext>
+            </p:extLst>
+          </p:nvPr>
+        </p:nvSpPr>
+        <p:spPr>
+          <a:xfrm>
+            <a:off x="477012" y="480060"/>
+            <a:ext cx="11237976" cy="5897880"/>
+          </a:xfrm>
+          <a:prstGeom prst="rect">
+            <a:avLst/>
+          </a:prstGeom>
+          <a:solidFill>
+            <a:srgbClr val="FFFFFF"/>
+          </a:solidFill>
+          <a:ln>
+            <a:noFill/>
+          </a:ln>
+        </p:spPr>
+        <p:style>
+          <a:lnRef idx="2">
+            <a:schemeClr val="accent1">
+              <a:shade val="50000"/>
+            </a:schemeClr>
+          </a:lnRef>
+          <a:fillRef idx="1">
+            <a:schemeClr val="accent1"/>
+          </a:fillRef>
+          <a:effectRef idx="0">
+            <a:schemeClr val="accent1"/>
+          </a:effectRef>
+          <a:fontRef idx="minor">
+            <a:schemeClr val="lt1"/>
+          </a:fontRef>
+        </p:style>
+        <p:txBody>
+          <a:bodyPr rtlCol="0" anchor="ctr"/>
+          <a:lstStyle/>
+          <a:p>
+            <a:pPr algn="ctr"/>
+            <a:endParaRPr lang="en-US"/>
+          </a:p>
+        </p:txBody>
+      </p:sp>
       <p:pic>
         <p:nvPicPr>
-          <p:cNvPr id="8" name="Picture 7" descr="Shape&#10;&#10;Description automatically generated with medium confidence">
+          <p:cNvPr id="5" name="Picture 4" descr="Graphical user interface, application&#10;&#10;Description automatically generated">
             <a:extLst>
               <a:ext uri="{FF2B5EF4-FFF2-40B4-BE49-F238E27FC236}">
-                <a16:creationId xmlns:a16="http://schemas.microsoft.com/office/drawing/2014/main" id="{82C68D7C-7F0D-4163-9765-71D2FBD2F4EF}"/>
+                <a16:creationId xmlns:a16="http://schemas.microsoft.com/office/drawing/2014/main" id="{C769BD68-2BC2-45EB-B2C2-A4F39E021E4C}"/>
               </a:ext>
             </a:extLst>
           </p:cNvPr>
@@ -22692,60 +20404,18 @@
         </p:blipFill>
         <p:spPr>
           <a:xfrm>
-            <a:off x="643467" y="1616033"/>
-            <a:ext cx="10905066" cy="3625932"/>
+            <a:off x="643467" y="1261617"/>
+            <a:ext cx="10905066" cy="4334764"/>
           </a:xfrm>
           <a:prstGeom prst="rect">
             <a:avLst/>
           </a:prstGeom>
         </p:spPr>
       </p:pic>
-      <p:cxnSp>
-        <p:nvCxnSpPr>
-          <p:cNvPr id="12" name="Straight Arrow Connector 11">
-            <a:extLst>
-              <a:ext uri="{FF2B5EF4-FFF2-40B4-BE49-F238E27FC236}">
-                <a16:creationId xmlns:a16="http://schemas.microsoft.com/office/drawing/2014/main" id="{4E56827E-0513-4315-A111-DFCADACB3BC8}"/>
-              </a:ext>
-            </a:extLst>
-          </p:cNvPr>
-          <p:cNvCxnSpPr/>
-          <p:nvPr/>
-        </p:nvCxnSpPr>
-        <p:spPr>
-          <a:xfrm flipH="1">
-            <a:off x="4561490" y="2911366"/>
-            <a:ext cx="3626069" cy="735724"/>
-          </a:xfrm>
-          <a:prstGeom prst="straightConnector1">
-            <a:avLst/>
-          </a:prstGeom>
-          <a:ln w="50800">
-            <a:solidFill>
-              <a:srgbClr val="7030A0"/>
-            </a:solidFill>
-            <a:tailEnd type="triangle"/>
-          </a:ln>
-        </p:spPr>
-        <p:style>
-          <a:lnRef idx="1">
-            <a:schemeClr val="accent1"/>
-          </a:lnRef>
-          <a:fillRef idx="0">
-            <a:schemeClr val="accent1"/>
-          </a:fillRef>
-          <a:effectRef idx="0">
-            <a:schemeClr val="accent1"/>
-          </a:effectRef>
-          <a:fontRef idx="minor">
-            <a:schemeClr val="tx1"/>
-          </a:fontRef>
-        </p:style>
-      </p:cxnSp>
     </p:spTree>
     <p:extLst>
       <p:ext uri="{BB962C8B-B14F-4D97-AF65-F5344CB8AC3E}">
-        <p14:creationId xmlns:p14="http://schemas.microsoft.com/office/powerpoint/2010/main" val="3409242420"/>
+        <p14:creationId xmlns:p14="http://schemas.microsoft.com/office/powerpoint/2010/main" val="906721590"/>
       </p:ext>
     </p:extLst>
   </p:cSld>
@@ -22780,12 +20450,138 @@
           <a:chExt cx="0" cy="0"/>
         </a:xfrm>
       </p:grpSpPr>
+      <p:sp>
+        <p:nvSpPr>
+          <p:cNvPr id="8" name="Rectangle 7">
+            <a:extLst>
+              <a:ext uri="{FF2B5EF4-FFF2-40B4-BE49-F238E27FC236}">
+                <a16:creationId xmlns:a16="http://schemas.microsoft.com/office/drawing/2014/main" id="{32BC26D8-82FB-445E-AA49-62A77D7C1EE0}"/>
+              </a:ext>
+              <a:ext uri="{C183D7F6-B498-43B3-948B-1728B52AA6E4}">
+                <adec:decorative xmlns:adec="http://schemas.microsoft.com/office/drawing/2017/decorative" val="1"/>
+              </a:ext>
+            </a:extLst>
+          </p:cNvPr>
+          <p:cNvSpPr>
+            <a:spLocks noGrp="1" noRot="1" noChangeAspect="1" noMove="1" noResize="1" noEditPoints="1" noAdjustHandles="1" noChangeArrowheads="1" noChangeShapeType="1" noTextEdit="1"/>
+          </p:cNvSpPr>
+          <p:nvPr>
+            <p:extLst>
+              <p:ext uri="{386F3935-93C4-4BCD-93E2-E3B085C9AB24}">
+                <p16:designElem xmlns:p16="http://schemas.microsoft.com/office/powerpoint/2015/main" val="1"/>
+              </p:ext>
+            </p:extLst>
+          </p:nvPr>
+        </p:nvSpPr>
+        <p:spPr>
+          <a:xfrm>
+            <a:off x="0" y="0"/>
+            <a:ext cx="12192000" cy="6858000"/>
+          </a:xfrm>
+          <a:prstGeom prst="rect">
+            <a:avLst/>
+          </a:prstGeom>
+          <a:solidFill>
+            <a:srgbClr val="323658"/>
+          </a:solidFill>
+          <a:ln>
+            <a:noFill/>
+          </a:ln>
+        </p:spPr>
+        <p:style>
+          <a:lnRef idx="2">
+            <a:schemeClr val="accent1">
+              <a:shade val="50000"/>
+            </a:schemeClr>
+          </a:lnRef>
+          <a:fillRef idx="1">
+            <a:schemeClr val="accent1"/>
+          </a:fillRef>
+          <a:effectRef idx="0">
+            <a:schemeClr val="accent1"/>
+          </a:effectRef>
+          <a:fontRef idx="minor">
+            <a:schemeClr val="lt1"/>
+          </a:fontRef>
+        </p:style>
+        <p:txBody>
+          <a:bodyPr rtlCol="0" anchor="ctr"/>
+          <a:lstStyle/>
+          <a:p>
+            <a:pPr algn="ctr"/>
+            <a:endParaRPr lang="en-US"/>
+          </a:p>
+        </p:txBody>
+      </p:sp>
+      <p:sp>
+        <p:nvSpPr>
+          <p:cNvPr id="10" name="Rectangle 9">
+            <a:extLst>
+              <a:ext uri="{FF2B5EF4-FFF2-40B4-BE49-F238E27FC236}">
+                <a16:creationId xmlns:a16="http://schemas.microsoft.com/office/drawing/2014/main" id="{CB44330D-EA18-4254-AA95-EB49948539B8}"/>
+              </a:ext>
+              <a:ext uri="{C183D7F6-B498-43B3-948B-1728B52AA6E4}">
+                <adec:decorative xmlns:adec="http://schemas.microsoft.com/office/drawing/2017/decorative" val="1"/>
+              </a:ext>
+            </a:extLst>
+          </p:cNvPr>
+          <p:cNvSpPr>
+            <a:spLocks noGrp="1" noRot="1" noChangeAspect="1" noMove="1" noResize="1" noEditPoints="1" noAdjustHandles="1" noChangeArrowheads="1" noChangeShapeType="1" noTextEdit="1"/>
+          </p:cNvSpPr>
+          <p:nvPr>
+            <p:extLst>
+              <p:ext uri="{386F3935-93C4-4BCD-93E2-E3B085C9AB24}">
+                <p16:designElem xmlns:p16="http://schemas.microsoft.com/office/powerpoint/2015/main" val="1"/>
+              </p:ext>
+            </p:extLst>
+          </p:nvPr>
+        </p:nvSpPr>
+        <p:spPr>
+          <a:xfrm>
+            <a:off x="477012" y="480060"/>
+            <a:ext cx="11237976" cy="5897880"/>
+          </a:xfrm>
+          <a:prstGeom prst="rect">
+            <a:avLst/>
+          </a:prstGeom>
+          <a:solidFill>
+            <a:srgbClr val="FFFFFF"/>
+          </a:solidFill>
+          <a:ln>
+            <a:noFill/>
+          </a:ln>
+        </p:spPr>
+        <p:style>
+          <a:lnRef idx="2">
+            <a:schemeClr val="accent1">
+              <a:shade val="50000"/>
+            </a:schemeClr>
+          </a:lnRef>
+          <a:fillRef idx="1">
+            <a:schemeClr val="accent1"/>
+          </a:fillRef>
+          <a:effectRef idx="0">
+            <a:schemeClr val="accent1"/>
+          </a:effectRef>
+          <a:fontRef idx="minor">
+            <a:schemeClr val="lt1"/>
+          </a:fontRef>
+        </p:style>
+        <p:txBody>
+          <a:bodyPr rtlCol="0" anchor="ctr"/>
+          <a:lstStyle/>
+          <a:p>
+            <a:pPr algn="ctr"/>
+            <a:endParaRPr lang="en-US"/>
+          </a:p>
+        </p:txBody>
+      </p:sp>
       <p:pic>
         <p:nvPicPr>
-          <p:cNvPr id="8" name="Picture 7" descr="Shape&#10;&#10;Description automatically generated with medium confidence">
+          <p:cNvPr id="3" name="Picture 2" descr="Diagram&#10;&#10;Description automatically generated">
             <a:extLst>
               <a:ext uri="{FF2B5EF4-FFF2-40B4-BE49-F238E27FC236}">
-                <a16:creationId xmlns:a16="http://schemas.microsoft.com/office/drawing/2014/main" id="{82C68D7C-7F0D-4163-9765-71D2FBD2F4EF}"/>
+                <a16:creationId xmlns:a16="http://schemas.microsoft.com/office/drawing/2014/main" id="{2F322FE2-A7AE-4C39-B61B-7B7AA8BC5845}"/>
               </a:ext>
             </a:extLst>
           </p:cNvPr>
@@ -22808,104 +20604,18 @@
         </p:blipFill>
         <p:spPr>
           <a:xfrm>
-            <a:off x="643467" y="1616033"/>
-            <a:ext cx="10905066" cy="3625932"/>
+            <a:off x="643467" y="1261618"/>
+            <a:ext cx="10905066" cy="4334764"/>
           </a:xfrm>
           <a:prstGeom prst="rect">
             <a:avLst/>
           </a:prstGeom>
         </p:spPr>
       </p:pic>
-      <p:cxnSp>
-        <p:nvCxnSpPr>
-          <p:cNvPr id="12" name="Straight Arrow Connector 11">
-            <a:extLst>
-              <a:ext uri="{FF2B5EF4-FFF2-40B4-BE49-F238E27FC236}">
-                <a16:creationId xmlns:a16="http://schemas.microsoft.com/office/drawing/2014/main" id="{4E56827E-0513-4315-A111-DFCADACB3BC8}"/>
-              </a:ext>
-            </a:extLst>
-          </p:cNvPr>
-          <p:cNvCxnSpPr/>
-          <p:nvPr/>
-        </p:nvCxnSpPr>
-        <p:spPr>
-          <a:xfrm flipH="1">
-            <a:off x="4561490" y="2911366"/>
-            <a:ext cx="3626069" cy="735724"/>
-          </a:xfrm>
-          <a:prstGeom prst="straightConnector1">
-            <a:avLst/>
-          </a:prstGeom>
-          <a:ln w="50800">
-            <a:solidFill>
-              <a:srgbClr val="7030A0"/>
-            </a:solidFill>
-            <a:tailEnd type="triangle"/>
-          </a:ln>
-        </p:spPr>
-        <p:style>
-          <a:lnRef idx="1">
-            <a:schemeClr val="accent1"/>
-          </a:lnRef>
-          <a:fillRef idx="0">
-            <a:schemeClr val="accent1"/>
-          </a:fillRef>
-          <a:effectRef idx="0">
-            <a:schemeClr val="accent1"/>
-          </a:effectRef>
-          <a:fontRef idx="minor">
-            <a:schemeClr val="tx1"/>
-          </a:fontRef>
-        </p:style>
-      </p:cxnSp>
-      <p:cxnSp>
-        <p:nvCxnSpPr>
-          <p:cNvPr id="4" name="Straight Arrow Connector 3">
-            <a:extLst>
-              <a:ext uri="{FF2B5EF4-FFF2-40B4-BE49-F238E27FC236}">
-                <a16:creationId xmlns:a16="http://schemas.microsoft.com/office/drawing/2014/main" id="{5A182365-0F4D-48CF-931D-2F49B459475C}"/>
-              </a:ext>
-            </a:extLst>
-          </p:cNvPr>
-          <p:cNvCxnSpPr>
-            <a:cxnSpLocks/>
-          </p:cNvCxnSpPr>
-          <p:nvPr/>
-        </p:nvCxnSpPr>
-        <p:spPr>
-          <a:xfrm flipH="1" flipV="1">
-            <a:off x="4561490" y="2596055"/>
-            <a:ext cx="4850525" cy="1760484"/>
-          </a:xfrm>
-          <a:prstGeom prst="straightConnector1">
-            <a:avLst/>
-          </a:prstGeom>
-          <a:ln w="50800">
-            <a:solidFill>
-              <a:srgbClr val="7030A0"/>
-            </a:solidFill>
-            <a:tailEnd type="triangle"/>
-          </a:ln>
-        </p:spPr>
-        <p:style>
-          <a:lnRef idx="1">
-            <a:schemeClr val="accent1"/>
-          </a:lnRef>
-          <a:fillRef idx="0">
-            <a:schemeClr val="accent1"/>
-          </a:fillRef>
-          <a:effectRef idx="0">
-            <a:schemeClr val="accent1"/>
-          </a:effectRef>
-          <a:fontRef idx="minor">
-            <a:schemeClr val="tx1"/>
-          </a:fontRef>
-        </p:style>
-      </p:cxnSp>
     </p:spTree>
     <p:extLst>
       <p:ext uri="{BB962C8B-B14F-4D97-AF65-F5344CB8AC3E}">
-        <p14:creationId xmlns:p14="http://schemas.microsoft.com/office/powerpoint/2010/main" val="1821485871"/>
+        <p14:creationId xmlns:p14="http://schemas.microsoft.com/office/powerpoint/2010/main" val="1897364629"/>
       </p:ext>
     </p:extLst>
   </p:cSld>
@@ -22940,12 +20650,138 @@
           <a:chExt cx="0" cy="0"/>
         </a:xfrm>
       </p:grpSpPr>
+      <p:sp>
+        <p:nvSpPr>
+          <p:cNvPr id="8" name="Rectangle 7">
+            <a:extLst>
+              <a:ext uri="{FF2B5EF4-FFF2-40B4-BE49-F238E27FC236}">
+                <a16:creationId xmlns:a16="http://schemas.microsoft.com/office/drawing/2014/main" id="{32BC26D8-82FB-445E-AA49-62A77D7C1EE0}"/>
+              </a:ext>
+              <a:ext uri="{C183D7F6-B498-43B3-948B-1728B52AA6E4}">
+                <adec:decorative xmlns:adec="http://schemas.microsoft.com/office/drawing/2017/decorative" val="1"/>
+              </a:ext>
+            </a:extLst>
+          </p:cNvPr>
+          <p:cNvSpPr>
+            <a:spLocks noGrp="1" noRot="1" noChangeAspect="1" noMove="1" noResize="1" noEditPoints="1" noAdjustHandles="1" noChangeArrowheads="1" noChangeShapeType="1" noTextEdit="1"/>
+          </p:cNvSpPr>
+          <p:nvPr>
+            <p:extLst>
+              <p:ext uri="{386F3935-93C4-4BCD-93E2-E3B085C9AB24}">
+                <p16:designElem xmlns:p16="http://schemas.microsoft.com/office/powerpoint/2015/main" val="1"/>
+              </p:ext>
+            </p:extLst>
+          </p:nvPr>
+        </p:nvSpPr>
+        <p:spPr>
+          <a:xfrm>
+            <a:off x="0" y="0"/>
+            <a:ext cx="12192000" cy="6858000"/>
+          </a:xfrm>
+          <a:prstGeom prst="rect">
+            <a:avLst/>
+          </a:prstGeom>
+          <a:solidFill>
+            <a:srgbClr val="323658"/>
+          </a:solidFill>
+          <a:ln>
+            <a:noFill/>
+          </a:ln>
+        </p:spPr>
+        <p:style>
+          <a:lnRef idx="2">
+            <a:schemeClr val="accent1">
+              <a:shade val="50000"/>
+            </a:schemeClr>
+          </a:lnRef>
+          <a:fillRef idx="1">
+            <a:schemeClr val="accent1"/>
+          </a:fillRef>
+          <a:effectRef idx="0">
+            <a:schemeClr val="accent1"/>
+          </a:effectRef>
+          <a:fontRef idx="minor">
+            <a:schemeClr val="lt1"/>
+          </a:fontRef>
+        </p:style>
+        <p:txBody>
+          <a:bodyPr rtlCol="0" anchor="ctr"/>
+          <a:lstStyle/>
+          <a:p>
+            <a:pPr algn="ctr"/>
+            <a:endParaRPr lang="en-US"/>
+          </a:p>
+        </p:txBody>
+      </p:sp>
+      <p:sp>
+        <p:nvSpPr>
+          <p:cNvPr id="10" name="Rectangle 9">
+            <a:extLst>
+              <a:ext uri="{FF2B5EF4-FFF2-40B4-BE49-F238E27FC236}">
+                <a16:creationId xmlns:a16="http://schemas.microsoft.com/office/drawing/2014/main" id="{CB44330D-EA18-4254-AA95-EB49948539B8}"/>
+              </a:ext>
+              <a:ext uri="{C183D7F6-B498-43B3-948B-1728B52AA6E4}">
+                <adec:decorative xmlns:adec="http://schemas.microsoft.com/office/drawing/2017/decorative" val="1"/>
+              </a:ext>
+            </a:extLst>
+          </p:cNvPr>
+          <p:cNvSpPr>
+            <a:spLocks noGrp="1" noRot="1" noChangeAspect="1" noMove="1" noResize="1" noEditPoints="1" noAdjustHandles="1" noChangeArrowheads="1" noChangeShapeType="1" noTextEdit="1"/>
+          </p:cNvSpPr>
+          <p:nvPr>
+            <p:extLst>
+              <p:ext uri="{386F3935-93C4-4BCD-93E2-E3B085C9AB24}">
+                <p16:designElem xmlns:p16="http://schemas.microsoft.com/office/powerpoint/2015/main" val="1"/>
+              </p:ext>
+            </p:extLst>
+          </p:nvPr>
+        </p:nvSpPr>
+        <p:spPr>
+          <a:xfrm>
+            <a:off x="477012" y="480060"/>
+            <a:ext cx="11237976" cy="5897880"/>
+          </a:xfrm>
+          <a:prstGeom prst="rect">
+            <a:avLst/>
+          </a:prstGeom>
+          <a:solidFill>
+            <a:srgbClr val="FFFFFF"/>
+          </a:solidFill>
+          <a:ln>
+            <a:noFill/>
+          </a:ln>
+        </p:spPr>
+        <p:style>
+          <a:lnRef idx="2">
+            <a:schemeClr val="accent1">
+              <a:shade val="50000"/>
+            </a:schemeClr>
+          </a:lnRef>
+          <a:fillRef idx="1">
+            <a:schemeClr val="accent1"/>
+          </a:fillRef>
+          <a:effectRef idx="0">
+            <a:schemeClr val="accent1"/>
+          </a:effectRef>
+          <a:fontRef idx="minor">
+            <a:schemeClr val="lt1"/>
+          </a:fontRef>
+        </p:style>
+        <p:txBody>
+          <a:bodyPr rtlCol="0" anchor="ctr"/>
+          <a:lstStyle/>
+          <a:p>
+            <a:pPr algn="ctr"/>
+            <a:endParaRPr lang="en-US"/>
+          </a:p>
+        </p:txBody>
+      </p:sp>
       <p:pic>
         <p:nvPicPr>
-          <p:cNvPr id="8" name="Picture 7" descr="Shape&#10;&#10;Description automatically generated with medium confidence">
+          <p:cNvPr id="3" name="Picture 2" descr="Diagram&#10;&#10;Description automatically generated">
             <a:extLst>
               <a:ext uri="{FF2B5EF4-FFF2-40B4-BE49-F238E27FC236}">
-                <a16:creationId xmlns:a16="http://schemas.microsoft.com/office/drawing/2014/main" id="{82C68D7C-7F0D-4163-9765-71D2FBD2F4EF}"/>
+                <a16:creationId xmlns:a16="http://schemas.microsoft.com/office/drawing/2014/main" id="{B814098E-17D2-43E7-BA4E-928FE6C49078}"/>
               </a:ext>
             </a:extLst>
           </p:cNvPr>
@@ -22968,148 +20804,18 @@
         </p:blipFill>
         <p:spPr>
           <a:xfrm>
-            <a:off x="643467" y="1616033"/>
-            <a:ext cx="10905066" cy="3625932"/>
+            <a:off x="643467" y="1261618"/>
+            <a:ext cx="10905066" cy="4334764"/>
           </a:xfrm>
           <a:prstGeom prst="rect">
             <a:avLst/>
           </a:prstGeom>
         </p:spPr>
       </p:pic>
-      <p:cxnSp>
-        <p:nvCxnSpPr>
-          <p:cNvPr id="12" name="Straight Arrow Connector 11">
-            <a:extLst>
-              <a:ext uri="{FF2B5EF4-FFF2-40B4-BE49-F238E27FC236}">
-                <a16:creationId xmlns:a16="http://schemas.microsoft.com/office/drawing/2014/main" id="{4E56827E-0513-4315-A111-DFCADACB3BC8}"/>
-              </a:ext>
-            </a:extLst>
-          </p:cNvPr>
-          <p:cNvCxnSpPr/>
-          <p:nvPr/>
-        </p:nvCxnSpPr>
-        <p:spPr>
-          <a:xfrm flipH="1">
-            <a:off x="4561490" y="2911366"/>
-            <a:ext cx="3626069" cy="735724"/>
-          </a:xfrm>
-          <a:prstGeom prst="straightConnector1">
-            <a:avLst/>
-          </a:prstGeom>
-          <a:ln w="50800">
-            <a:solidFill>
-              <a:srgbClr val="7030A0"/>
-            </a:solidFill>
-            <a:tailEnd type="triangle"/>
-          </a:ln>
-        </p:spPr>
-        <p:style>
-          <a:lnRef idx="1">
-            <a:schemeClr val="accent1"/>
-          </a:lnRef>
-          <a:fillRef idx="0">
-            <a:schemeClr val="accent1"/>
-          </a:fillRef>
-          <a:effectRef idx="0">
-            <a:schemeClr val="accent1"/>
-          </a:effectRef>
-          <a:fontRef idx="minor">
-            <a:schemeClr val="tx1"/>
-          </a:fontRef>
-        </p:style>
-      </p:cxnSp>
-      <p:cxnSp>
-        <p:nvCxnSpPr>
-          <p:cNvPr id="4" name="Straight Arrow Connector 3">
-            <a:extLst>
-              <a:ext uri="{FF2B5EF4-FFF2-40B4-BE49-F238E27FC236}">
-                <a16:creationId xmlns:a16="http://schemas.microsoft.com/office/drawing/2014/main" id="{5A182365-0F4D-48CF-931D-2F49B459475C}"/>
-              </a:ext>
-            </a:extLst>
-          </p:cNvPr>
-          <p:cNvCxnSpPr>
-            <a:cxnSpLocks/>
-          </p:cNvCxnSpPr>
-          <p:nvPr/>
-        </p:nvCxnSpPr>
-        <p:spPr>
-          <a:xfrm flipH="1" flipV="1">
-            <a:off x="2448910" y="1124607"/>
-            <a:ext cx="7814444" cy="3547243"/>
-          </a:xfrm>
-          <a:prstGeom prst="straightConnector1">
-            <a:avLst/>
-          </a:prstGeom>
-          <a:ln w="50800">
-            <a:solidFill>
-              <a:srgbClr val="7030A0"/>
-            </a:solidFill>
-            <a:tailEnd type="triangle"/>
-          </a:ln>
-        </p:spPr>
-        <p:style>
-          <a:lnRef idx="1">
-            <a:schemeClr val="accent1"/>
-          </a:lnRef>
-          <a:fillRef idx="0">
-            <a:schemeClr val="accent1"/>
-          </a:fillRef>
-          <a:effectRef idx="0">
-            <a:schemeClr val="accent1"/>
-          </a:effectRef>
-          <a:fontRef idx="minor">
-            <a:schemeClr val="tx1"/>
-          </a:fontRef>
-        </p:style>
-      </p:cxnSp>
-      <p:cxnSp>
-        <p:nvCxnSpPr>
-          <p:cNvPr id="5" name="Straight Arrow Connector 4">
-            <a:extLst>
-              <a:ext uri="{FF2B5EF4-FFF2-40B4-BE49-F238E27FC236}">
-                <a16:creationId xmlns:a16="http://schemas.microsoft.com/office/drawing/2014/main" id="{A12098B7-5EE4-4C2E-A689-21D00A63C1FC}"/>
-              </a:ext>
-            </a:extLst>
-          </p:cNvPr>
-          <p:cNvCxnSpPr>
-            <a:cxnSpLocks/>
-          </p:cNvCxnSpPr>
-          <p:nvPr/>
-        </p:nvCxnSpPr>
-        <p:spPr>
-          <a:xfrm flipH="1">
-            <a:off x="4487917" y="2307021"/>
-            <a:ext cx="4179324" cy="846082"/>
-          </a:xfrm>
-          <a:prstGeom prst="straightConnector1">
-            <a:avLst/>
-          </a:prstGeom>
-          <a:ln w="50800">
-            <a:solidFill>
-              <a:srgbClr val="7030A0"/>
-            </a:solidFill>
-            <a:tailEnd type="triangle"/>
-          </a:ln>
-        </p:spPr>
-        <p:style>
-          <a:lnRef idx="1">
-            <a:schemeClr val="accent1"/>
-          </a:lnRef>
-          <a:fillRef idx="0">
-            <a:schemeClr val="accent1"/>
-          </a:fillRef>
-          <a:effectRef idx="0">
-            <a:schemeClr val="accent1"/>
-          </a:effectRef>
-          <a:fontRef idx="minor">
-            <a:schemeClr val="tx1"/>
-          </a:fontRef>
-        </p:style>
-      </p:cxnSp>
     </p:spTree>
     <p:extLst>
       <p:ext uri="{BB962C8B-B14F-4D97-AF65-F5344CB8AC3E}">
-        <p14:creationId xmlns:p14="http://schemas.microsoft.com/office/powerpoint/2010/main" val="4032087732"/>
+        <p14:creationId xmlns:p14="http://schemas.microsoft.com/office/powerpoint/2010/main" val="2149447457"/>
       </p:ext>
     </p:extLst>
   </p:cSld>
@@ -23122,6 +20828,14 @@
 <file path=ppt/slides/slide16.xml><?xml version="1.0" encoding="utf-8"?>
 <p:sld xmlns:a="http://schemas.openxmlformats.org/drawingml/2006/main" xmlns:r="http://schemas.openxmlformats.org/officeDocument/2006/relationships" xmlns:p="http://schemas.openxmlformats.org/presentationml/2006/main">
   <p:cSld>
+    <p:bg>
+      <p:bgPr>
+        <a:solidFill>
+          <a:schemeClr val="bg1"/>
+        </a:solidFill>
+        <a:effectLst/>
+      </p:bgPr>
+    </p:bg>
     <p:spTree>
       <p:nvGrpSpPr>
         <p:cNvPr id="1" name=""/>
@@ -23136,40 +20850,12 @@
           <a:chExt cx="0" cy="0"/>
         </a:xfrm>
       </p:grpSpPr>
-      <p:sp>
-        <p:nvSpPr>
-          <p:cNvPr id="6" name="Title 5">
+      <p:pic>
+        <p:nvPicPr>
+          <p:cNvPr id="5" name="Picture 4" descr="A picture containing chart&#10;&#10;Description automatically generated">
             <a:extLst>
               <a:ext uri="{FF2B5EF4-FFF2-40B4-BE49-F238E27FC236}">
-                <a16:creationId xmlns:a16="http://schemas.microsoft.com/office/drawing/2014/main" id="{3010BD28-CE35-488D-8957-A6ADF0266298}"/>
-              </a:ext>
-            </a:extLst>
-          </p:cNvPr>
-          <p:cNvSpPr>
-            <a:spLocks noGrp="1"/>
-          </p:cNvSpPr>
-          <p:nvPr>
-            <p:ph type="title"/>
-          </p:nvPr>
-        </p:nvSpPr>
-        <p:spPr/>
-        <p:txBody>
-          <a:bodyPr/>
-          <a:lstStyle/>
-          <a:p>
-            <a:r>
-              <a:rPr lang="en-US" dirty="0"/>
-              <a:t>Equivariance</a:t>
-            </a:r>
-          </a:p>
-        </p:txBody>
-      </p:sp>
-      <p:pic>
-        <p:nvPicPr>
-          <p:cNvPr id="12" name="Picture 11">
-            <a:extLst>
-              <a:ext uri="{FF2B5EF4-FFF2-40B4-BE49-F238E27FC236}">
-                <a16:creationId xmlns:a16="http://schemas.microsoft.com/office/drawing/2014/main" id="{DE9D9680-7408-4363-A988-8C87F28376ED}"/>
+                <a16:creationId xmlns:a16="http://schemas.microsoft.com/office/drawing/2014/main" id="{EE45D47F-445A-4393-ADB0-09DF79BC2B08}"/>
               </a:ext>
             </a:extLst>
           </p:cNvPr>
@@ -23181,14 +20867,8 @@
         <p:blipFill>
           <a:blip r:embed="rId2">
             <a:extLst>
-              <a:ext uri="{BEBA8EAE-BF5A-486C-A8C5-ECC9F3942E4B}">
-                <a14:imgProps xmlns:a14="http://schemas.microsoft.com/office/drawing/2010/main">
-                  <a14:imgLayer r:embed="rId3">
-                    <a14:imgEffect>
-                      <a14:saturation sat="33000"/>
-                    </a14:imgEffect>
-                  </a14:imgLayer>
-                </a14:imgProps>
+              <a:ext uri="{28A0092B-C50C-407E-A947-70E740481C1C}">
+                <a14:useLocalDpi xmlns:a14="http://schemas.microsoft.com/office/drawing/2010/main" val="0"/>
               </a:ext>
             </a:extLst>
           </a:blip>
@@ -23198,50 +20878,8 @@
         </p:blipFill>
         <p:spPr>
           <a:xfrm>
-            <a:off x="722692" y="1946459"/>
-            <a:ext cx="5227149" cy="3970865"/>
-          </a:xfrm>
-          <a:prstGeom prst="rect">
-            <a:avLst/>
-          </a:prstGeom>
-        </p:spPr>
-      </p:pic>
-      <p:pic>
-        <p:nvPicPr>
-          <p:cNvPr id="14" name="Picture 13">
-            <a:extLst>
-              <a:ext uri="{FF2B5EF4-FFF2-40B4-BE49-F238E27FC236}">
-                <a16:creationId xmlns:a16="http://schemas.microsoft.com/office/drawing/2014/main" id="{E515FC66-B562-4849-9143-8F361882DD12}"/>
-              </a:ext>
-            </a:extLst>
-          </p:cNvPr>
-          <p:cNvPicPr>
-            <a:picLocks noChangeAspect="1"/>
-          </p:cNvPicPr>
-          <p:nvPr/>
-        </p:nvPicPr>
-        <p:blipFill>
-          <a:blip r:embed="rId4">
-            <a:extLst>
-              <a:ext uri="{BEBA8EAE-BF5A-486C-A8C5-ECC9F3942E4B}">
-                <a14:imgProps xmlns:a14="http://schemas.microsoft.com/office/drawing/2010/main">
-                  <a14:imgLayer r:embed="rId5">
-                    <a14:imgEffect>
-                      <a14:saturation sat="33000"/>
-                    </a14:imgEffect>
-                  </a14:imgLayer>
-                </a14:imgProps>
-              </a:ext>
-            </a:extLst>
-          </a:blip>
-          <a:stretch>
-            <a:fillRect/>
-          </a:stretch>
-        </p:blipFill>
-        <p:spPr>
-          <a:xfrm>
-            <a:off x="5949841" y="1877256"/>
-            <a:ext cx="5435244" cy="4109269"/>
+            <a:off x="643467" y="1793240"/>
+            <a:ext cx="10905066" cy="3271518"/>
           </a:xfrm>
           <a:prstGeom prst="rect">
             <a:avLst/>
@@ -23251,7 +20889,7 @@
     </p:spTree>
     <p:extLst>
       <p:ext uri="{BB962C8B-B14F-4D97-AF65-F5344CB8AC3E}">
-        <p14:creationId xmlns:p14="http://schemas.microsoft.com/office/powerpoint/2010/main" val="542698175"/>
+        <p14:creationId xmlns:p14="http://schemas.microsoft.com/office/powerpoint/2010/main" val="2267338681"/>
       </p:ext>
     </p:extLst>
   </p:cSld>
@@ -23262,6 +20900,376 @@
 </file>
 
 <file path=ppt/slides/slide17.xml><?xml version="1.0" encoding="utf-8"?>
+<p:sld xmlns:a="http://schemas.openxmlformats.org/drawingml/2006/main" xmlns:r="http://schemas.openxmlformats.org/officeDocument/2006/relationships" xmlns:p="http://schemas.openxmlformats.org/presentationml/2006/main">
+  <p:cSld>
+    <p:bg>
+      <p:bgPr>
+        <a:solidFill>
+          <a:schemeClr val="bg1"/>
+        </a:solidFill>
+        <a:effectLst/>
+      </p:bgPr>
+    </p:bg>
+    <p:spTree>
+      <p:nvGrpSpPr>
+        <p:cNvPr id="1" name=""/>
+        <p:cNvGrpSpPr/>
+        <p:nvPr/>
+      </p:nvGrpSpPr>
+      <p:grpSpPr>
+        <a:xfrm>
+          <a:off x="0" y="0"/>
+          <a:ext cx="0" cy="0"/>
+          <a:chOff x="0" y="0"/>
+          <a:chExt cx="0" cy="0"/>
+        </a:xfrm>
+      </p:grpSpPr>
+      <p:pic>
+        <p:nvPicPr>
+          <p:cNvPr id="3" name="Picture 2" descr="Chart, line chart&#10;&#10;Description automatically generated">
+            <a:extLst>
+              <a:ext uri="{FF2B5EF4-FFF2-40B4-BE49-F238E27FC236}">
+                <a16:creationId xmlns:a16="http://schemas.microsoft.com/office/drawing/2014/main" id="{C30EB420-BEED-48A4-8974-9A024287D7FB}"/>
+              </a:ext>
+            </a:extLst>
+          </p:cNvPr>
+          <p:cNvPicPr>
+            <a:picLocks noChangeAspect="1"/>
+          </p:cNvPicPr>
+          <p:nvPr/>
+        </p:nvPicPr>
+        <p:blipFill>
+          <a:blip r:embed="rId2">
+            <a:extLst>
+              <a:ext uri="{28A0092B-C50C-407E-A947-70E740481C1C}">
+                <a14:useLocalDpi xmlns:a14="http://schemas.microsoft.com/office/drawing/2010/main" val="0"/>
+              </a:ext>
+            </a:extLst>
+          </a:blip>
+          <a:stretch>
+            <a:fillRect/>
+          </a:stretch>
+        </p:blipFill>
+        <p:spPr>
+          <a:xfrm>
+            <a:off x="643467" y="1793240"/>
+            <a:ext cx="10905066" cy="3271518"/>
+          </a:xfrm>
+          <a:prstGeom prst="rect">
+            <a:avLst/>
+          </a:prstGeom>
+        </p:spPr>
+      </p:pic>
+    </p:spTree>
+    <p:extLst>
+      <p:ext uri="{BB962C8B-B14F-4D97-AF65-F5344CB8AC3E}">
+        <p14:creationId xmlns:p14="http://schemas.microsoft.com/office/powerpoint/2010/main" val="2539683473"/>
+      </p:ext>
+    </p:extLst>
+  </p:cSld>
+  <p:clrMapOvr>
+    <a:masterClrMapping/>
+  </p:clrMapOvr>
+</p:sld>
+</file>
+
+<file path=ppt/slides/slide18.xml><?xml version="1.0" encoding="utf-8"?>
+<p:sld xmlns:a="http://schemas.openxmlformats.org/drawingml/2006/main" xmlns:r="http://schemas.openxmlformats.org/officeDocument/2006/relationships" xmlns:p="http://schemas.openxmlformats.org/presentationml/2006/main">
+  <p:cSld>
+    <p:bg>
+      <p:bgPr>
+        <a:solidFill>
+          <a:schemeClr val="bg1"/>
+        </a:solidFill>
+        <a:effectLst/>
+      </p:bgPr>
+    </p:bg>
+    <p:spTree>
+      <p:nvGrpSpPr>
+        <p:cNvPr id="1" name=""/>
+        <p:cNvGrpSpPr/>
+        <p:nvPr/>
+      </p:nvGrpSpPr>
+      <p:grpSpPr>
+        <a:xfrm>
+          <a:off x="0" y="0"/>
+          <a:ext cx="0" cy="0"/>
+          <a:chOff x="0" y="0"/>
+          <a:chExt cx="0" cy="0"/>
+        </a:xfrm>
+      </p:grpSpPr>
+      <p:pic>
+        <p:nvPicPr>
+          <p:cNvPr id="3" name="Picture 2" descr="A picture containing graphical user interface&#10;&#10;Description automatically generated">
+            <a:extLst>
+              <a:ext uri="{FF2B5EF4-FFF2-40B4-BE49-F238E27FC236}">
+                <a16:creationId xmlns:a16="http://schemas.microsoft.com/office/drawing/2014/main" id="{F791C695-03F1-4E6C-B66B-0C6C22ED0D37}"/>
+              </a:ext>
+            </a:extLst>
+          </p:cNvPr>
+          <p:cNvPicPr>
+            <a:picLocks noChangeAspect="1"/>
+          </p:cNvPicPr>
+          <p:nvPr/>
+        </p:nvPicPr>
+        <p:blipFill>
+          <a:blip r:embed="rId2">
+            <a:extLst>
+              <a:ext uri="{28A0092B-C50C-407E-A947-70E740481C1C}">
+                <a14:useLocalDpi xmlns:a14="http://schemas.microsoft.com/office/drawing/2010/main" val="0"/>
+              </a:ext>
+            </a:extLst>
+          </a:blip>
+          <a:stretch>
+            <a:fillRect/>
+          </a:stretch>
+        </p:blipFill>
+        <p:spPr>
+          <a:xfrm>
+            <a:off x="643467" y="1875028"/>
+            <a:ext cx="10905066" cy="3107942"/>
+          </a:xfrm>
+          <a:prstGeom prst="rect">
+            <a:avLst/>
+          </a:prstGeom>
+        </p:spPr>
+      </p:pic>
+    </p:spTree>
+    <p:extLst>
+      <p:ext uri="{BB962C8B-B14F-4D97-AF65-F5344CB8AC3E}">
+        <p14:creationId xmlns:p14="http://schemas.microsoft.com/office/powerpoint/2010/main" val="2467533572"/>
+      </p:ext>
+    </p:extLst>
+  </p:cSld>
+  <p:clrMapOvr>
+    <a:masterClrMapping/>
+  </p:clrMapOvr>
+</p:sld>
+</file>
+
+<file path=ppt/slides/slide19.xml><?xml version="1.0" encoding="utf-8"?>
+<p:sld xmlns:a="http://schemas.openxmlformats.org/drawingml/2006/main" xmlns:r="http://schemas.openxmlformats.org/officeDocument/2006/relationships" xmlns:p="http://schemas.openxmlformats.org/presentationml/2006/main">
+  <p:cSld>
+    <p:bg>
+      <p:bgPr>
+        <a:solidFill>
+          <a:schemeClr val="bg1"/>
+        </a:solidFill>
+        <a:effectLst/>
+      </p:bgPr>
+    </p:bg>
+    <p:spTree>
+      <p:nvGrpSpPr>
+        <p:cNvPr id="1" name=""/>
+        <p:cNvGrpSpPr/>
+        <p:nvPr/>
+      </p:nvGrpSpPr>
+      <p:grpSpPr>
+        <a:xfrm>
+          <a:off x="0" y="0"/>
+          <a:ext cx="0" cy="0"/>
+          <a:chOff x="0" y="0"/>
+          <a:chExt cx="0" cy="0"/>
+        </a:xfrm>
+      </p:grpSpPr>
+      <p:pic>
+        <p:nvPicPr>
+          <p:cNvPr id="3" name="Picture 2" descr="Chart, line chart&#10;&#10;Description automatically generated">
+            <a:extLst>
+              <a:ext uri="{FF2B5EF4-FFF2-40B4-BE49-F238E27FC236}">
+                <a16:creationId xmlns:a16="http://schemas.microsoft.com/office/drawing/2014/main" id="{F2F12049-6A3F-4CFE-9F23-301FCAFD3887}"/>
+              </a:ext>
+            </a:extLst>
+          </p:cNvPr>
+          <p:cNvPicPr>
+            <a:picLocks noChangeAspect="1"/>
+          </p:cNvPicPr>
+          <p:nvPr/>
+        </p:nvPicPr>
+        <p:blipFill>
+          <a:blip r:embed="rId2">
+            <a:extLst>
+              <a:ext uri="{28A0092B-C50C-407E-A947-70E740481C1C}">
+                <a14:useLocalDpi xmlns:a14="http://schemas.microsoft.com/office/drawing/2010/main" val="0"/>
+              </a:ext>
+            </a:extLst>
+          </a:blip>
+          <a:stretch>
+            <a:fillRect/>
+          </a:stretch>
+        </p:blipFill>
+        <p:spPr>
+          <a:xfrm>
+            <a:off x="643467" y="1875028"/>
+            <a:ext cx="10905066" cy="3107942"/>
+          </a:xfrm>
+          <a:prstGeom prst="rect">
+            <a:avLst/>
+          </a:prstGeom>
+        </p:spPr>
+      </p:pic>
+    </p:spTree>
+    <p:extLst>
+      <p:ext uri="{BB962C8B-B14F-4D97-AF65-F5344CB8AC3E}">
+        <p14:creationId xmlns:p14="http://schemas.microsoft.com/office/powerpoint/2010/main" val="1205984275"/>
+      </p:ext>
+    </p:extLst>
+  </p:cSld>
+  <p:clrMapOvr>
+    <a:masterClrMapping/>
+  </p:clrMapOvr>
+</p:sld>
+</file>
+
+<file path=ppt/slides/slide2.xml><?xml version="1.0" encoding="utf-8"?>
+<p:sld xmlns:a="http://schemas.openxmlformats.org/drawingml/2006/main" xmlns:r="http://schemas.openxmlformats.org/officeDocument/2006/relationships" xmlns:p="http://schemas.openxmlformats.org/presentationml/2006/main">
+  <p:cSld>
+    <p:bg>
+      <p:bgPr>
+        <a:solidFill>
+          <a:schemeClr val="bg1"/>
+        </a:solidFill>
+        <a:effectLst/>
+      </p:bgPr>
+    </p:bg>
+    <p:spTree>
+      <p:nvGrpSpPr>
+        <p:cNvPr id="1" name=""/>
+        <p:cNvGrpSpPr/>
+        <p:nvPr/>
+      </p:nvGrpSpPr>
+      <p:grpSpPr>
+        <a:xfrm>
+          <a:off x="0" y="0"/>
+          <a:ext cx="0" cy="0"/>
+          <a:chOff x="0" y="0"/>
+          <a:chExt cx="0" cy="0"/>
+        </a:xfrm>
+      </p:grpSpPr>
+      <p:pic>
+        <p:nvPicPr>
+          <p:cNvPr id="3" name="Picture 2" descr="A picture containing background pattern&#10;&#10;Description automatically generated">
+            <a:extLst>
+              <a:ext uri="{FF2B5EF4-FFF2-40B4-BE49-F238E27FC236}">
+                <a16:creationId xmlns:a16="http://schemas.microsoft.com/office/drawing/2014/main" id="{99B547A6-9802-43D3-8686-914BB84AB15E}"/>
+              </a:ext>
+            </a:extLst>
+          </p:cNvPr>
+          <p:cNvPicPr>
+            <a:picLocks noChangeAspect="1"/>
+          </p:cNvPicPr>
+          <p:nvPr/>
+        </p:nvPicPr>
+        <p:blipFill>
+          <a:blip r:embed="rId2">
+            <a:extLst>
+              <a:ext uri="{28A0092B-C50C-407E-A947-70E740481C1C}">
+                <a14:useLocalDpi xmlns:a14="http://schemas.microsoft.com/office/drawing/2010/main" val="0"/>
+              </a:ext>
+            </a:extLst>
+          </a:blip>
+          <a:stretch>
+            <a:fillRect/>
+          </a:stretch>
+        </p:blipFill>
+        <p:spPr>
+          <a:xfrm>
+            <a:off x="643467" y="1793240"/>
+            <a:ext cx="10905066" cy="3271518"/>
+          </a:xfrm>
+          <a:prstGeom prst="rect">
+            <a:avLst/>
+          </a:prstGeom>
+        </p:spPr>
+      </p:pic>
+    </p:spTree>
+    <p:extLst>
+      <p:ext uri="{BB962C8B-B14F-4D97-AF65-F5344CB8AC3E}">
+        <p14:creationId xmlns:p14="http://schemas.microsoft.com/office/powerpoint/2010/main" val="3192418391"/>
+      </p:ext>
+    </p:extLst>
+  </p:cSld>
+  <p:clrMapOvr>
+    <a:masterClrMapping/>
+  </p:clrMapOvr>
+</p:sld>
+</file>
+
+<file path=ppt/slides/slide20.xml><?xml version="1.0" encoding="utf-8"?>
+<p:sld xmlns:a="http://schemas.openxmlformats.org/drawingml/2006/main" xmlns:r="http://schemas.openxmlformats.org/officeDocument/2006/relationships" xmlns:p="http://schemas.openxmlformats.org/presentationml/2006/main">
+  <p:cSld>
+    <p:bg>
+      <p:bgPr>
+        <a:solidFill>
+          <a:schemeClr val="bg1"/>
+        </a:solidFill>
+        <a:effectLst/>
+      </p:bgPr>
+    </p:bg>
+    <p:spTree>
+      <p:nvGrpSpPr>
+        <p:cNvPr id="1" name=""/>
+        <p:cNvGrpSpPr/>
+        <p:nvPr/>
+      </p:nvGrpSpPr>
+      <p:grpSpPr>
+        <a:xfrm>
+          <a:off x="0" y="0"/>
+          <a:ext cx="0" cy="0"/>
+          <a:chOff x="0" y="0"/>
+          <a:chExt cx="0" cy="0"/>
+        </a:xfrm>
+      </p:grpSpPr>
+      <p:pic>
+        <p:nvPicPr>
+          <p:cNvPr id="3" name="Picture 2" descr="Chart, line chart&#10;&#10;Description automatically generated">
+            <a:extLst>
+              <a:ext uri="{FF2B5EF4-FFF2-40B4-BE49-F238E27FC236}">
+                <a16:creationId xmlns:a16="http://schemas.microsoft.com/office/drawing/2014/main" id="{5F8E4CF0-833D-4306-8BED-BE5E214208DB}"/>
+              </a:ext>
+            </a:extLst>
+          </p:cNvPr>
+          <p:cNvPicPr>
+            <a:picLocks noChangeAspect="1"/>
+          </p:cNvPicPr>
+          <p:nvPr/>
+        </p:nvPicPr>
+        <p:blipFill>
+          <a:blip r:embed="rId2">
+            <a:extLst>
+              <a:ext uri="{28A0092B-C50C-407E-A947-70E740481C1C}">
+                <a14:useLocalDpi xmlns:a14="http://schemas.microsoft.com/office/drawing/2010/main" val="0"/>
+              </a:ext>
+            </a:extLst>
+          </a:blip>
+          <a:stretch>
+            <a:fillRect/>
+          </a:stretch>
+        </p:blipFill>
+        <p:spPr>
+          <a:xfrm>
+            <a:off x="643467" y="1875028"/>
+            <a:ext cx="10905066" cy="3107942"/>
+          </a:xfrm>
+          <a:prstGeom prst="rect">
+            <a:avLst/>
+          </a:prstGeom>
+        </p:spPr>
+      </p:pic>
+    </p:spTree>
+    <p:extLst>
+      <p:ext uri="{BB962C8B-B14F-4D97-AF65-F5344CB8AC3E}">
+        <p14:creationId xmlns:p14="http://schemas.microsoft.com/office/powerpoint/2010/main" val="2209085557"/>
+      </p:ext>
+    </p:extLst>
+  </p:cSld>
+  <p:clrMapOvr>
+    <a:masterClrMapping/>
+  </p:clrMapOvr>
+</p:sld>
+</file>
+
+<file path=ppt/slides/slide21.xml><?xml version="1.0" encoding="utf-8"?>
 <p:sld xmlns:a="http://schemas.openxmlformats.org/drawingml/2006/main" xmlns:r="http://schemas.openxmlformats.org/officeDocument/2006/relationships" xmlns:p="http://schemas.openxmlformats.org/presentationml/2006/main">
   <p:cSld>
     <p:spTree>
@@ -23593,967 +21601,6 @@
 </p:sld>
 </file>
 
-<file path=ppt/slides/slide18.xml><?xml version="1.0" encoding="utf-8"?>
-<p:sld xmlns:a="http://schemas.openxmlformats.org/drawingml/2006/main" xmlns:r="http://schemas.openxmlformats.org/officeDocument/2006/relationships" xmlns:p="http://schemas.openxmlformats.org/presentationml/2006/main">
-  <p:cSld>
-    <p:bg>
-      <p:bgPr>
-        <a:solidFill>
-          <a:schemeClr val="bg1"/>
-        </a:solidFill>
-        <a:effectLst/>
-      </p:bgPr>
-    </p:bg>
-    <p:spTree>
-      <p:nvGrpSpPr>
-        <p:cNvPr id="1" name=""/>
-        <p:cNvGrpSpPr/>
-        <p:nvPr/>
-      </p:nvGrpSpPr>
-      <p:grpSpPr>
-        <a:xfrm>
-          <a:off x="0" y="0"/>
-          <a:ext cx="0" cy="0"/>
-          <a:chOff x="0" y="0"/>
-          <a:chExt cx="0" cy="0"/>
-        </a:xfrm>
-      </p:grpSpPr>
-      <p:pic>
-        <p:nvPicPr>
-          <p:cNvPr id="21" name="Content Placeholder 20" descr="Shape&#10;&#10;Description automatically generated with low confidence">
-            <a:extLst>
-              <a:ext uri="{FF2B5EF4-FFF2-40B4-BE49-F238E27FC236}">
-                <a16:creationId xmlns:a16="http://schemas.microsoft.com/office/drawing/2014/main" id="{3EDDD281-2F42-46EE-9C4D-1E8185B6512E}"/>
-              </a:ext>
-            </a:extLst>
-          </p:cNvPr>
-          <p:cNvPicPr>
-            <a:picLocks noGrp="1" noChangeAspect="1"/>
-          </p:cNvPicPr>
-          <p:nvPr>
-            <p:ph idx="1"/>
-          </p:nvPr>
-        </p:nvPicPr>
-        <p:blipFill>
-          <a:blip r:embed="rId2">
-            <a:extLst>
-              <a:ext uri="{28A0092B-C50C-407E-A947-70E740481C1C}">
-                <a14:useLocalDpi xmlns:a14="http://schemas.microsoft.com/office/drawing/2010/main" val="0"/>
-              </a:ext>
-            </a:extLst>
-          </a:blip>
-          <a:stretch>
-            <a:fillRect/>
-          </a:stretch>
-        </p:blipFill>
-        <p:spPr>
-          <a:xfrm>
-            <a:off x="643467" y="1616033"/>
-            <a:ext cx="10905066" cy="3625932"/>
-          </a:xfrm>
-          <a:prstGeom prst="rect">
-            <a:avLst/>
-          </a:prstGeom>
-        </p:spPr>
-      </p:pic>
-      <p:sp>
-        <p:nvSpPr>
-          <p:cNvPr id="23" name="Arrow: Right 22">
-            <a:extLst>
-              <a:ext uri="{FF2B5EF4-FFF2-40B4-BE49-F238E27FC236}">
-                <a16:creationId xmlns:a16="http://schemas.microsoft.com/office/drawing/2014/main" id="{1A963E5E-FFA9-43B7-B032-B68442261F8B}"/>
-              </a:ext>
-            </a:extLst>
-          </p:cNvPr>
-          <p:cNvSpPr/>
-          <p:nvPr/>
-        </p:nvSpPr>
-        <p:spPr>
-          <a:xfrm>
-            <a:off x="4803228" y="2154621"/>
-            <a:ext cx="2228193" cy="651641"/>
-          </a:xfrm>
-          <a:prstGeom prst="rightArrow">
-            <a:avLst/>
-          </a:prstGeom>
-          <a:solidFill>
-            <a:srgbClr val="7030A0"/>
-          </a:solidFill>
-        </p:spPr>
-        <p:style>
-          <a:lnRef idx="2">
-            <a:schemeClr val="accent1">
-              <a:shade val="50000"/>
-            </a:schemeClr>
-          </a:lnRef>
-          <a:fillRef idx="1">
-            <a:schemeClr val="accent1"/>
-          </a:fillRef>
-          <a:effectRef idx="0">
-            <a:schemeClr val="accent1"/>
-          </a:effectRef>
-          <a:fontRef idx="minor">
-            <a:schemeClr val="lt1"/>
-          </a:fontRef>
-        </p:style>
-        <p:txBody>
-          <a:bodyPr rtlCol="0" anchor="ctr"/>
-          <a:lstStyle/>
-          <a:p>
-            <a:pPr algn="ctr"/>
-            <a:endParaRPr lang="en-US"/>
-          </a:p>
-        </p:txBody>
-      </p:sp>
-    </p:spTree>
-    <p:extLst>
-      <p:ext uri="{BB962C8B-B14F-4D97-AF65-F5344CB8AC3E}">
-        <p14:creationId xmlns:p14="http://schemas.microsoft.com/office/powerpoint/2010/main" val="2551244396"/>
-      </p:ext>
-    </p:extLst>
-  </p:cSld>
-  <p:clrMapOvr>
-    <a:masterClrMapping/>
-  </p:clrMapOvr>
-</p:sld>
-</file>
-
-<file path=ppt/slides/slide19.xml><?xml version="1.0" encoding="utf-8"?>
-<p:sld xmlns:a="http://schemas.openxmlformats.org/drawingml/2006/main" xmlns:r="http://schemas.openxmlformats.org/officeDocument/2006/relationships" xmlns:p="http://schemas.openxmlformats.org/presentationml/2006/main">
-  <p:cSld>
-    <p:bg>
-      <p:bgPr>
-        <a:solidFill>
-          <a:schemeClr val="bg1"/>
-        </a:solidFill>
-        <a:effectLst/>
-      </p:bgPr>
-    </p:bg>
-    <p:spTree>
-      <p:nvGrpSpPr>
-        <p:cNvPr id="1" name=""/>
-        <p:cNvGrpSpPr/>
-        <p:nvPr/>
-      </p:nvGrpSpPr>
-      <p:grpSpPr>
-        <a:xfrm>
-          <a:off x="0" y="0"/>
-          <a:ext cx="0" cy="0"/>
-          <a:chOff x="0" y="0"/>
-          <a:chExt cx="0" cy="0"/>
-        </a:xfrm>
-      </p:grpSpPr>
-      <p:pic>
-        <p:nvPicPr>
-          <p:cNvPr id="5" name="Content Placeholder 4" descr="A picture containing shape&#10;&#10;Description automatically generated">
-            <a:extLst>
-              <a:ext uri="{FF2B5EF4-FFF2-40B4-BE49-F238E27FC236}">
-                <a16:creationId xmlns:a16="http://schemas.microsoft.com/office/drawing/2014/main" id="{5204CDED-C6A0-4961-80A5-77ACF20E9754}"/>
-              </a:ext>
-            </a:extLst>
-          </p:cNvPr>
-          <p:cNvPicPr>
-            <a:picLocks noGrp="1" noChangeAspect="1"/>
-          </p:cNvPicPr>
-          <p:nvPr>
-            <p:ph idx="1"/>
-          </p:nvPr>
-        </p:nvPicPr>
-        <p:blipFill>
-          <a:blip r:embed="rId2">
-            <a:extLst>
-              <a:ext uri="{28A0092B-C50C-407E-A947-70E740481C1C}">
-                <a14:useLocalDpi xmlns:a14="http://schemas.microsoft.com/office/drawing/2010/main" val="0"/>
-              </a:ext>
-            </a:extLst>
-          </a:blip>
-          <a:stretch>
-            <a:fillRect/>
-          </a:stretch>
-        </p:blipFill>
-        <p:spPr>
-          <a:xfrm>
-            <a:off x="643467" y="1616033"/>
-            <a:ext cx="10905066" cy="3625932"/>
-          </a:xfrm>
-          <a:prstGeom prst="rect">
-            <a:avLst/>
-          </a:prstGeom>
-        </p:spPr>
-      </p:pic>
-      <p:sp>
-        <p:nvSpPr>
-          <p:cNvPr id="6" name="Arrow: Right 5">
-            <a:extLst>
-              <a:ext uri="{FF2B5EF4-FFF2-40B4-BE49-F238E27FC236}">
-                <a16:creationId xmlns:a16="http://schemas.microsoft.com/office/drawing/2014/main" id="{12126B6B-C0B3-49D9-889B-1E2F9E150E38}"/>
-              </a:ext>
-            </a:extLst>
-          </p:cNvPr>
-          <p:cNvSpPr/>
-          <p:nvPr/>
-        </p:nvSpPr>
-        <p:spPr>
-          <a:xfrm>
-            <a:off x="4803228" y="2154621"/>
-            <a:ext cx="2228193" cy="651641"/>
-          </a:xfrm>
-          <a:prstGeom prst="rightArrow">
-            <a:avLst/>
-          </a:prstGeom>
-          <a:solidFill>
-            <a:srgbClr val="7030A0"/>
-          </a:solidFill>
-        </p:spPr>
-        <p:style>
-          <a:lnRef idx="2">
-            <a:schemeClr val="accent1">
-              <a:shade val="50000"/>
-            </a:schemeClr>
-          </a:lnRef>
-          <a:fillRef idx="1">
-            <a:schemeClr val="accent1"/>
-          </a:fillRef>
-          <a:effectRef idx="0">
-            <a:schemeClr val="accent1"/>
-          </a:effectRef>
-          <a:fontRef idx="minor">
-            <a:schemeClr val="lt1"/>
-          </a:fontRef>
-        </p:style>
-        <p:txBody>
-          <a:bodyPr rtlCol="0" anchor="ctr"/>
-          <a:lstStyle/>
-          <a:p>
-            <a:pPr algn="ctr"/>
-            <a:endParaRPr lang="en-US"/>
-          </a:p>
-        </p:txBody>
-      </p:sp>
-      <p:sp>
-        <p:nvSpPr>
-          <p:cNvPr id="8" name="Arrow: Down 7">
-            <a:extLst>
-              <a:ext uri="{FF2B5EF4-FFF2-40B4-BE49-F238E27FC236}">
-                <a16:creationId xmlns:a16="http://schemas.microsoft.com/office/drawing/2014/main" id="{A07D0709-910E-4D19-B91A-1217727CFA6D}"/>
-              </a:ext>
-            </a:extLst>
-          </p:cNvPr>
-          <p:cNvSpPr/>
-          <p:nvPr/>
-        </p:nvSpPr>
-        <p:spPr>
-          <a:xfrm>
-            <a:off x="1692165" y="2866695"/>
-            <a:ext cx="2858814" cy="1124607"/>
-          </a:xfrm>
-          <a:prstGeom prst="downArrow">
-            <a:avLst/>
-          </a:prstGeom>
-          <a:solidFill>
-            <a:schemeClr val="accent6">
-              <a:lumMod val="40000"/>
-              <a:lumOff val="60000"/>
-            </a:schemeClr>
-          </a:solidFill>
-        </p:spPr>
-        <p:style>
-          <a:lnRef idx="2">
-            <a:schemeClr val="accent1">
-              <a:shade val="50000"/>
-            </a:schemeClr>
-          </a:lnRef>
-          <a:fillRef idx="1">
-            <a:schemeClr val="accent1"/>
-          </a:fillRef>
-          <a:effectRef idx="0">
-            <a:schemeClr val="accent1"/>
-          </a:effectRef>
-          <a:fontRef idx="minor">
-            <a:schemeClr val="lt1"/>
-          </a:fontRef>
-        </p:style>
-        <p:txBody>
-          <a:bodyPr rtlCol="0" anchor="ctr"/>
-          <a:lstStyle/>
-          <a:p>
-            <a:pPr algn="ctr"/>
-            <a:r>
-              <a:rPr lang="en-US" dirty="0"/>
-              <a:t>shift in x</a:t>
-            </a:r>
-          </a:p>
-        </p:txBody>
-      </p:sp>
-    </p:spTree>
-    <p:extLst>
-      <p:ext uri="{BB962C8B-B14F-4D97-AF65-F5344CB8AC3E}">
-        <p14:creationId xmlns:p14="http://schemas.microsoft.com/office/powerpoint/2010/main" val="2362158184"/>
-      </p:ext>
-    </p:extLst>
-  </p:cSld>
-  <p:clrMapOvr>
-    <a:masterClrMapping/>
-  </p:clrMapOvr>
-</p:sld>
-</file>
-
-<file path=ppt/slides/slide2.xml><?xml version="1.0" encoding="utf-8"?>
-<p:sld xmlns:a="http://schemas.openxmlformats.org/drawingml/2006/main" xmlns:r="http://schemas.openxmlformats.org/officeDocument/2006/relationships" xmlns:p="http://schemas.openxmlformats.org/presentationml/2006/main">
-  <p:cSld>
-    <p:spTree>
-      <p:nvGrpSpPr>
-        <p:cNvPr id="1" name=""/>
-        <p:cNvGrpSpPr/>
-        <p:nvPr/>
-      </p:nvGrpSpPr>
-      <p:grpSpPr>
-        <a:xfrm>
-          <a:off x="0" y="0"/>
-          <a:ext cx="0" cy="0"/>
-          <a:chOff x="0" y="0"/>
-          <a:chExt cx="0" cy="0"/>
-        </a:xfrm>
-      </p:grpSpPr>
-      <p:sp>
-        <p:nvSpPr>
-          <p:cNvPr id="2" name="Title 1">
-            <a:extLst>
-              <a:ext uri="{FF2B5EF4-FFF2-40B4-BE49-F238E27FC236}">
-                <a16:creationId xmlns:a16="http://schemas.microsoft.com/office/drawing/2014/main" id="{9A0458DE-4AA8-4D17-B3D9-447DD4DB1018}"/>
-              </a:ext>
-            </a:extLst>
-          </p:cNvPr>
-          <p:cNvSpPr>
-            <a:spLocks noGrp="1"/>
-          </p:cNvSpPr>
-          <p:nvPr>
-            <p:ph type="title"/>
-          </p:nvPr>
-        </p:nvSpPr>
-        <p:spPr/>
-        <p:txBody>
-          <a:bodyPr/>
-          <a:lstStyle/>
-          <a:p>
-            <a:pPr algn="ctr"/>
-            <a:r>
-              <a:rPr lang="en-US" dirty="0"/>
-              <a:t>What does a visualization library do?</a:t>
-            </a:r>
-          </a:p>
-        </p:txBody>
-      </p:sp>
-      <p:graphicFrame>
-        <p:nvGraphicFramePr>
-          <p:cNvPr id="4" name="Content Placeholder 3">
-            <a:extLst>
-              <a:ext uri="{FF2B5EF4-FFF2-40B4-BE49-F238E27FC236}">
-                <a16:creationId xmlns:a16="http://schemas.microsoft.com/office/drawing/2014/main" id="{27281DDF-13F9-4178-B1F8-F23A1B4A5F41}"/>
-              </a:ext>
-            </a:extLst>
-          </p:cNvPr>
-          <p:cNvGraphicFramePr>
-            <a:graphicFrameLocks noGrp="1"/>
-          </p:cNvGraphicFramePr>
-          <p:nvPr>
-            <p:ph idx="1"/>
-            <p:extLst>
-              <p:ext uri="{D42A27DB-BD31-4B8C-83A1-F6EECF244321}">
-                <p14:modId xmlns:p14="http://schemas.microsoft.com/office/powerpoint/2010/main" val="276453703"/>
-              </p:ext>
-            </p:extLst>
-          </p:nvPr>
-        </p:nvGraphicFramePr>
-        <p:xfrm>
-          <a:off x="838200" y="1690688"/>
-          <a:ext cx="10515600" cy="2998677"/>
-        </p:xfrm>
-        <a:graphic>
-          <a:graphicData uri="http://schemas.openxmlformats.org/drawingml/2006/diagram">
-            <dgm:relIds xmlns:dgm="http://schemas.openxmlformats.org/drawingml/2006/diagram" xmlns:r="http://schemas.openxmlformats.org/officeDocument/2006/relationships" r:dm="rId2" r:lo="rId3" r:qs="rId4" r:cs="rId5"/>
-          </a:graphicData>
-        </a:graphic>
-      </p:graphicFrame>
-      <p:sp>
-        <p:nvSpPr>
-          <p:cNvPr id="3" name="Arrow: Curved Up 2">
-            <a:extLst>
-              <a:ext uri="{FF2B5EF4-FFF2-40B4-BE49-F238E27FC236}">
-                <a16:creationId xmlns:a16="http://schemas.microsoft.com/office/drawing/2014/main" id="{EBBEFB31-C822-43FD-AB3D-AC4D89978DBB}"/>
-              </a:ext>
-            </a:extLst>
-          </p:cNvPr>
-          <p:cNvSpPr/>
-          <p:nvPr/>
-        </p:nvSpPr>
-        <p:spPr>
-          <a:xfrm flipH="1">
-            <a:off x="1236910" y="3592597"/>
-            <a:ext cx="9435101" cy="1998228"/>
-          </a:xfrm>
-          <a:prstGeom prst="curvedUpArrow">
-            <a:avLst/>
-          </a:prstGeom>
-          <a:solidFill>
-            <a:srgbClr val="E6D5F3"/>
-          </a:solidFill>
-        </p:spPr>
-        <p:style>
-          <a:lnRef idx="2">
-            <a:schemeClr val="accent1">
-              <a:shade val="50000"/>
-            </a:schemeClr>
-          </a:lnRef>
-          <a:fillRef idx="1">
-            <a:schemeClr val="accent1"/>
-          </a:fillRef>
-          <a:effectRef idx="0">
-            <a:schemeClr val="accent1"/>
-          </a:effectRef>
-          <a:fontRef idx="minor">
-            <a:schemeClr val="lt1"/>
-          </a:fontRef>
-        </p:style>
-        <p:txBody>
-          <a:bodyPr rtlCol="0" anchor="ctr"/>
-          <a:lstStyle/>
-          <a:p>
-            <a:pPr algn="ctr"/>
-            <a:endParaRPr lang="en-US" dirty="0">
-              <a:solidFill>
-                <a:schemeClr val="tx1"/>
-              </a:solidFill>
-            </a:endParaRPr>
-          </a:p>
-        </p:txBody>
-      </p:sp>
-    </p:spTree>
-    <p:extLst>
-      <p:ext uri="{BB962C8B-B14F-4D97-AF65-F5344CB8AC3E}">
-        <p14:creationId xmlns:p14="http://schemas.microsoft.com/office/powerpoint/2010/main" val="2183605409"/>
-      </p:ext>
-    </p:extLst>
-  </p:cSld>
-  <p:clrMapOvr>
-    <a:masterClrMapping/>
-  </p:clrMapOvr>
-</p:sld>
-</file>
-
-<file path=ppt/slides/slide20.xml><?xml version="1.0" encoding="utf-8"?>
-<p:sld xmlns:a="http://schemas.openxmlformats.org/drawingml/2006/main" xmlns:r="http://schemas.openxmlformats.org/officeDocument/2006/relationships" xmlns:p="http://schemas.openxmlformats.org/presentationml/2006/main">
-  <p:cSld>
-    <p:bg>
-      <p:bgPr>
-        <a:solidFill>
-          <a:schemeClr val="bg1"/>
-        </a:solidFill>
-        <a:effectLst/>
-      </p:bgPr>
-    </p:bg>
-    <p:spTree>
-      <p:nvGrpSpPr>
-        <p:cNvPr id="1" name=""/>
-        <p:cNvGrpSpPr/>
-        <p:nvPr/>
-      </p:nvGrpSpPr>
-      <p:grpSpPr>
-        <a:xfrm>
-          <a:off x="0" y="0"/>
-          <a:ext cx="0" cy="0"/>
-          <a:chOff x="0" y="0"/>
-          <a:chExt cx="0" cy="0"/>
-        </a:xfrm>
-      </p:grpSpPr>
-      <p:pic>
-        <p:nvPicPr>
-          <p:cNvPr id="5" name="Content Placeholder 4" descr="A picture containing shape&#10;&#10;Description automatically generated">
-            <a:extLst>
-              <a:ext uri="{FF2B5EF4-FFF2-40B4-BE49-F238E27FC236}">
-                <a16:creationId xmlns:a16="http://schemas.microsoft.com/office/drawing/2014/main" id="{FA87083D-09D5-4A3D-AD65-0AECF97BBE1F}"/>
-              </a:ext>
-            </a:extLst>
-          </p:cNvPr>
-          <p:cNvPicPr>
-            <a:picLocks noGrp="1" noChangeAspect="1"/>
-          </p:cNvPicPr>
-          <p:nvPr>
-            <p:ph idx="1"/>
-          </p:nvPr>
-        </p:nvPicPr>
-        <p:blipFill>
-          <a:blip r:embed="rId2">
-            <a:extLst>
-              <a:ext uri="{28A0092B-C50C-407E-A947-70E740481C1C}">
-                <a14:useLocalDpi xmlns:a14="http://schemas.microsoft.com/office/drawing/2010/main" val="0"/>
-              </a:ext>
-            </a:extLst>
-          </a:blip>
-          <a:stretch>
-            <a:fillRect/>
-          </a:stretch>
-        </p:blipFill>
-        <p:spPr>
-          <a:xfrm>
-            <a:off x="643467" y="1616033"/>
-            <a:ext cx="10905066" cy="3625932"/>
-          </a:xfrm>
-          <a:prstGeom prst="rect">
-            <a:avLst/>
-          </a:prstGeom>
-        </p:spPr>
-      </p:pic>
-      <p:sp>
-        <p:nvSpPr>
-          <p:cNvPr id="6" name="Arrow: Right 5">
-            <a:extLst>
-              <a:ext uri="{FF2B5EF4-FFF2-40B4-BE49-F238E27FC236}">
-                <a16:creationId xmlns:a16="http://schemas.microsoft.com/office/drawing/2014/main" id="{371BE57B-7F37-41A6-A8DE-2CDEB20EE4DE}"/>
-              </a:ext>
-            </a:extLst>
-          </p:cNvPr>
-          <p:cNvSpPr/>
-          <p:nvPr/>
-        </p:nvSpPr>
-        <p:spPr>
-          <a:xfrm>
-            <a:off x="4803228" y="2154621"/>
-            <a:ext cx="2228193" cy="651641"/>
-          </a:xfrm>
-          <a:prstGeom prst="rightArrow">
-            <a:avLst/>
-          </a:prstGeom>
-          <a:solidFill>
-            <a:srgbClr val="7030A0"/>
-          </a:solidFill>
-        </p:spPr>
-        <p:style>
-          <a:lnRef idx="2">
-            <a:schemeClr val="accent1">
-              <a:shade val="50000"/>
-            </a:schemeClr>
-          </a:lnRef>
-          <a:fillRef idx="1">
-            <a:schemeClr val="accent1"/>
-          </a:fillRef>
-          <a:effectRef idx="0">
-            <a:schemeClr val="accent1"/>
-          </a:effectRef>
-          <a:fontRef idx="minor">
-            <a:schemeClr val="lt1"/>
-          </a:fontRef>
-        </p:style>
-        <p:txBody>
-          <a:bodyPr rtlCol="0" anchor="ctr"/>
-          <a:lstStyle/>
-          <a:p>
-            <a:pPr algn="ctr"/>
-            <a:endParaRPr lang="en-US"/>
-          </a:p>
-        </p:txBody>
-      </p:sp>
-      <p:sp>
-        <p:nvSpPr>
-          <p:cNvPr id="7" name="Arrow: Right 6">
-            <a:extLst>
-              <a:ext uri="{FF2B5EF4-FFF2-40B4-BE49-F238E27FC236}">
-                <a16:creationId xmlns:a16="http://schemas.microsoft.com/office/drawing/2014/main" id="{C0F3DB42-967E-43D8-8408-8C0A096220BE}"/>
-              </a:ext>
-            </a:extLst>
-          </p:cNvPr>
-          <p:cNvSpPr/>
-          <p:nvPr/>
-        </p:nvSpPr>
-        <p:spPr>
-          <a:xfrm>
-            <a:off x="4803227" y="4051739"/>
-            <a:ext cx="2228193" cy="651641"/>
-          </a:xfrm>
-          <a:prstGeom prst="rightArrow">
-            <a:avLst/>
-          </a:prstGeom>
-          <a:solidFill>
-            <a:srgbClr val="7030A0"/>
-          </a:solidFill>
-        </p:spPr>
-        <p:style>
-          <a:lnRef idx="2">
-            <a:schemeClr val="accent1">
-              <a:shade val="50000"/>
-            </a:schemeClr>
-          </a:lnRef>
-          <a:fillRef idx="1">
-            <a:schemeClr val="accent1"/>
-          </a:fillRef>
-          <a:effectRef idx="0">
-            <a:schemeClr val="accent1"/>
-          </a:effectRef>
-          <a:fontRef idx="minor">
-            <a:schemeClr val="lt1"/>
-          </a:fontRef>
-        </p:style>
-        <p:txBody>
-          <a:bodyPr rtlCol="0" anchor="ctr"/>
-          <a:lstStyle/>
-          <a:p>
-            <a:pPr algn="ctr"/>
-            <a:endParaRPr lang="en-US"/>
-          </a:p>
-        </p:txBody>
-      </p:sp>
-      <p:sp>
-        <p:nvSpPr>
-          <p:cNvPr id="8" name="Arrow: Down 7">
-            <a:extLst>
-              <a:ext uri="{FF2B5EF4-FFF2-40B4-BE49-F238E27FC236}">
-                <a16:creationId xmlns:a16="http://schemas.microsoft.com/office/drawing/2014/main" id="{9FFBEC63-051E-4835-BB46-2A3FEFEB0CD8}"/>
-              </a:ext>
-            </a:extLst>
-          </p:cNvPr>
-          <p:cNvSpPr/>
-          <p:nvPr/>
-        </p:nvSpPr>
-        <p:spPr>
-          <a:xfrm>
-            <a:off x="1723696" y="2806262"/>
-            <a:ext cx="2858814" cy="1048406"/>
-          </a:xfrm>
-          <a:prstGeom prst="downArrow">
-            <a:avLst/>
-          </a:prstGeom>
-          <a:solidFill>
-            <a:schemeClr val="accent6">
-              <a:lumMod val="40000"/>
-              <a:lumOff val="60000"/>
-            </a:schemeClr>
-          </a:solidFill>
-        </p:spPr>
-        <p:style>
-          <a:lnRef idx="2">
-            <a:schemeClr val="accent1">
-              <a:shade val="50000"/>
-            </a:schemeClr>
-          </a:lnRef>
-          <a:fillRef idx="1">
-            <a:schemeClr val="accent1"/>
-          </a:fillRef>
-          <a:effectRef idx="0">
-            <a:schemeClr val="accent1"/>
-          </a:effectRef>
-          <a:fontRef idx="minor">
-            <a:schemeClr val="lt1"/>
-          </a:fontRef>
-        </p:style>
-        <p:txBody>
-          <a:bodyPr rtlCol="0" anchor="ctr"/>
-          <a:lstStyle/>
-          <a:p>
-            <a:pPr algn="ctr"/>
-            <a:r>
-              <a:rPr lang="en-US" dirty="0"/>
-              <a:t>shift in x</a:t>
-            </a:r>
-          </a:p>
-        </p:txBody>
-      </p:sp>
-    </p:spTree>
-    <p:extLst>
-      <p:ext uri="{BB962C8B-B14F-4D97-AF65-F5344CB8AC3E}">
-        <p14:creationId xmlns:p14="http://schemas.microsoft.com/office/powerpoint/2010/main" val="2325218298"/>
-      </p:ext>
-    </p:extLst>
-  </p:cSld>
-  <p:clrMapOvr>
-    <a:masterClrMapping/>
-  </p:clrMapOvr>
-</p:sld>
-</file>
-
-<file path=ppt/slides/slide21.xml><?xml version="1.0" encoding="utf-8"?>
-<p:sld xmlns:a="http://schemas.openxmlformats.org/drawingml/2006/main" xmlns:r="http://schemas.openxmlformats.org/officeDocument/2006/relationships" xmlns:p="http://schemas.openxmlformats.org/presentationml/2006/main">
-  <p:cSld>
-    <p:bg>
-      <p:bgPr>
-        <a:solidFill>
-          <a:schemeClr val="bg1"/>
-        </a:solidFill>
-        <a:effectLst/>
-      </p:bgPr>
-    </p:bg>
-    <p:spTree>
-      <p:nvGrpSpPr>
-        <p:cNvPr id="1" name=""/>
-        <p:cNvGrpSpPr/>
-        <p:nvPr/>
-      </p:nvGrpSpPr>
-      <p:grpSpPr>
-        <a:xfrm>
-          <a:off x="0" y="0"/>
-          <a:ext cx="0" cy="0"/>
-          <a:chOff x="0" y="0"/>
-          <a:chExt cx="0" cy="0"/>
-        </a:xfrm>
-      </p:grpSpPr>
-      <p:pic>
-        <p:nvPicPr>
-          <p:cNvPr id="5" name="Content Placeholder 4" descr="A picture containing shape&#10;&#10;Description automatically generated">
-            <a:extLst>
-              <a:ext uri="{FF2B5EF4-FFF2-40B4-BE49-F238E27FC236}">
-                <a16:creationId xmlns:a16="http://schemas.microsoft.com/office/drawing/2014/main" id="{FA87083D-09D5-4A3D-AD65-0AECF97BBE1F}"/>
-              </a:ext>
-            </a:extLst>
-          </p:cNvPr>
-          <p:cNvPicPr>
-            <a:picLocks noGrp="1" noChangeAspect="1"/>
-          </p:cNvPicPr>
-          <p:nvPr>
-            <p:ph idx="1"/>
-          </p:nvPr>
-        </p:nvPicPr>
-        <p:blipFill>
-          <a:blip r:embed="rId2">
-            <a:extLst>
-              <a:ext uri="{28A0092B-C50C-407E-A947-70E740481C1C}">
-                <a14:useLocalDpi xmlns:a14="http://schemas.microsoft.com/office/drawing/2010/main" val="0"/>
-              </a:ext>
-            </a:extLst>
-          </a:blip>
-          <a:stretch>
-            <a:fillRect/>
-          </a:stretch>
-        </p:blipFill>
-        <p:spPr>
-          <a:xfrm>
-            <a:off x="643467" y="1616033"/>
-            <a:ext cx="10905066" cy="3625932"/>
-          </a:xfrm>
-          <a:prstGeom prst="rect">
-            <a:avLst/>
-          </a:prstGeom>
-        </p:spPr>
-      </p:pic>
-      <p:sp>
-        <p:nvSpPr>
-          <p:cNvPr id="6" name="Arrow: Right 5">
-            <a:extLst>
-              <a:ext uri="{FF2B5EF4-FFF2-40B4-BE49-F238E27FC236}">
-                <a16:creationId xmlns:a16="http://schemas.microsoft.com/office/drawing/2014/main" id="{371BE57B-7F37-41A6-A8DE-2CDEB20EE4DE}"/>
-              </a:ext>
-            </a:extLst>
-          </p:cNvPr>
-          <p:cNvSpPr/>
-          <p:nvPr/>
-        </p:nvSpPr>
-        <p:spPr>
-          <a:xfrm>
-            <a:off x="4803228" y="2154621"/>
-            <a:ext cx="2228193" cy="651641"/>
-          </a:xfrm>
-          <a:prstGeom prst="rightArrow">
-            <a:avLst/>
-          </a:prstGeom>
-          <a:solidFill>
-            <a:srgbClr val="7030A0"/>
-          </a:solidFill>
-        </p:spPr>
-        <p:style>
-          <a:lnRef idx="2">
-            <a:schemeClr val="accent1">
-              <a:shade val="50000"/>
-            </a:schemeClr>
-          </a:lnRef>
-          <a:fillRef idx="1">
-            <a:schemeClr val="accent1"/>
-          </a:fillRef>
-          <a:effectRef idx="0">
-            <a:schemeClr val="accent1"/>
-          </a:effectRef>
-          <a:fontRef idx="minor">
-            <a:schemeClr val="lt1"/>
-          </a:fontRef>
-        </p:style>
-        <p:txBody>
-          <a:bodyPr rtlCol="0" anchor="ctr"/>
-          <a:lstStyle/>
-          <a:p>
-            <a:pPr algn="ctr"/>
-            <a:endParaRPr lang="en-US"/>
-          </a:p>
-        </p:txBody>
-      </p:sp>
-      <p:sp>
-        <p:nvSpPr>
-          <p:cNvPr id="7" name="Arrow: Right 6">
-            <a:extLst>
-              <a:ext uri="{FF2B5EF4-FFF2-40B4-BE49-F238E27FC236}">
-                <a16:creationId xmlns:a16="http://schemas.microsoft.com/office/drawing/2014/main" id="{C0F3DB42-967E-43D8-8408-8C0A096220BE}"/>
-              </a:ext>
-            </a:extLst>
-          </p:cNvPr>
-          <p:cNvSpPr/>
-          <p:nvPr/>
-        </p:nvSpPr>
-        <p:spPr>
-          <a:xfrm>
-            <a:off x="4803227" y="4051739"/>
-            <a:ext cx="2228193" cy="651641"/>
-          </a:xfrm>
-          <a:prstGeom prst="rightArrow">
-            <a:avLst/>
-          </a:prstGeom>
-          <a:solidFill>
-            <a:srgbClr val="7030A0"/>
-          </a:solidFill>
-        </p:spPr>
-        <p:style>
-          <a:lnRef idx="2">
-            <a:schemeClr val="accent1">
-              <a:shade val="50000"/>
-            </a:schemeClr>
-          </a:lnRef>
-          <a:fillRef idx="1">
-            <a:schemeClr val="accent1"/>
-          </a:fillRef>
-          <a:effectRef idx="0">
-            <a:schemeClr val="accent1"/>
-          </a:effectRef>
-          <a:fontRef idx="minor">
-            <a:schemeClr val="lt1"/>
-          </a:fontRef>
-        </p:style>
-        <p:txBody>
-          <a:bodyPr rtlCol="0" anchor="ctr"/>
-          <a:lstStyle/>
-          <a:p>
-            <a:pPr algn="ctr"/>
-            <a:endParaRPr lang="en-US"/>
-          </a:p>
-        </p:txBody>
-      </p:sp>
-      <p:sp>
-        <p:nvSpPr>
-          <p:cNvPr id="8" name="Arrow: Down 7">
-            <a:extLst>
-              <a:ext uri="{FF2B5EF4-FFF2-40B4-BE49-F238E27FC236}">
-                <a16:creationId xmlns:a16="http://schemas.microsoft.com/office/drawing/2014/main" id="{9FFBEC63-051E-4835-BB46-2A3FEFEB0CD8}"/>
-              </a:ext>
-            </a:extLst>
-          </p:cNvPr>
-          <p:cNvSpPr/>
-          <p:nvPr/>
-        </p:nvSpPr>
-        <p:spPr>
-          <a:xfrm>
-            <a:off x="1723696" y="2806262"/>
-            <a:ext cx="2858814" cy="1048406"/>
-          </a:xfrm>
-          <a:prstGeom prst="downArrow">
-            <a:avLst/>
-          </a:prstGeom>
-          <a:solidFill>
-            <a:schemeClr val="accent6">
-              <a:lumMod val="40000"/>
-              <a:lumOff val="60000"/>
-            </a:schemeClr>
-          </a:solidFill>
-        </p:spPr>
-        <p:style>
-          <a:lnRef idx="2">
-            <a:schemeClr val="accent1">
-              <a:shade val="50000"/>
-            </a:schemeClr>
-          </a:lnRef>
-          <a:fillRef idx="1">
-            <a:schemeClr val="accent1"/>
-          </a:fillRef>
-          <a:effectRef idx="0">
-            <a:schemeClr val="accent1"/>
-          </a:effectRef>
-          <a:fontRef idx="minor">
-            <a:schemeClr val="lt1"/>
-          </a:fontRef>
-        </p:style>
-        <p:txBody>
-          <a:bodyPr rtlCol="0" anchor="ctr"/>
-          <a:lstStyle/>
-          <a:p>
-            <a:pPr algn="ctr"/>
-            <a:r>
-              <a:rPr lang="en-US" dirty="0"/>
-              <a:t>shift in x</a:t>
-            </a:r>
-          </a:p>
-        </p:txBody>
-      </p:sp>
-      <p:sp>
-        <p:nvSpPr>
-          <p:cNvPr id="9" name="Arrow: Down 8">
-            <a:extLst>
-              <a:ext uri="{FF2B5EF4-FFF2-40B4-BE49-F238E27FC236}">
-                <a16:creationId xmlns:a16="http://schemas.microsoft.com/office/drawing/2014/main" id="{D748A4FE-D2F3-4F50-AD13-4056CAD27C75}"/>
-              </a:ext>
-            </a:extLst>
-          </p:cNvPr>
-          <p:cNvSpPr/>
-          <p:nvPr/>
-        </p:nvSpPr>
-        <p:spPr>
-          <a:xfrm>
-            <a:off x="7478110" y="2806262"/>
-            <a:ext cx="2858814" cy="1048406"/>
-          </a:xfrm>
-          <a:prstGeom prst="downArrow">
-            <a:avLst/>
-          </a:prstGeom>
-          <a:solidFill>
-            <a:schemeClr val="accent6">
-              <a:lumMod val="40000"/>
-              <a:lumOff val="60000"/>
-            </a:schemeClr>
-          </a:solidFill>
-        </p:spPr>
-        <p:style>
-          <a:lnRef idx="2">
-            <a:schemeClr val="accent1">
-              <a:shade val="50000"/>
-            </a:schemeClr>
-          </a:lnRef>
-          <a:fillRef idx="1">
-            <a:schemeClr val="accent1"/>
-          </a:fillRef>
-          <a:effectRef idx="0">
-            <a:schemeClr val="accent1"/>
-          </a:effectRef>
-          <a:fontRef idx="minor">
-            <a:schemeClr val="lt1"/>
-          </a:fontRef>
-        </p:style>
-        <p:txBody>
-          <a:bodyPr rtlCol="0" anchor="ctr"/>
-          <a:lstStyle/>
-          <a:p>
-            <a:pPr algn="ctr"/>
-            <a:r>
-              <a:rPr lang="en-US" dirty="0"/>
-              <a:t>shift in x</a:t>
-            </a:r>
-          </a:p>
-        </p:txBody>
-      </p:sp>
-    </p:spTree>
-    <p:extLst>
-      <p:ext uri="{BB962C8B-B14F-4D97-AF65-F5344CB8AC3E}">
-        <p14:creationId xmlns:p14="http://schemas.microsoft.com/office/powerpoint/2010/main" val="554024297"/>
-      </p:ext>
-    </p:extLst>
-  </p:cSld>
-  <p:clrMapOvr>
-    <a:masterClrMapping/>
-  </p:clrMapOvr>
-</p:sld>
-</file>
-
 <file path=ppt/slides/slide22.xml><?xml version="1.0" encoding="utf-8"?>
 <p:sld xmlns:a="http://schemas.openxmlformats.org/drawingml/2006/main" xmlns:r="http://schemas.openxmlformats.org/officeDocument/2006/relationships" xmlns:p="http://schemas.openxmlformats.org/presentationml/2006/main">
   <p:cSld>
@@ -24581,19 +21628,17 @@
       </p:grpSpPr>
       <p:pic>
         <p:nvPicPr>
-          <p:cNvPr id="5" name="Content Placeholder 4" descr="Shape, rectangle&#10;&#10;Description automatically generated">
+          <p:cNvPr id="7" name="Picture 6">
             <a:extLst>
               <a:ext uri="{FF2B5EF4-FFF2-40B4-BE49-F238E27FC236}">
-                <a16:creationId xmlns:a16="http://schemas.microsoft.com/office/drawing/2014/main" id="{3C70F7B8-2D34-4573-B57B-94060830E748}"/>
+                <a16:creationId xmlns:a16="http://schemas.microsoft.com/office/drawing/2014/main" id="{467BE795-2B31-435C-B4FD-CC19E0D66703}"/>
               </a:ext>
             </a:extLst>
           </p:cNvPr>
           <p:cNvPicPr>
-            <a:picLocks noGrp="1" noChangeAspect="1"/>
+            <a:picLocks noChangeAspect="1"/>
           </p:cNvPicPr>
-          <p:nvPr>
-            <p:ph idx="1"/>
-          </p:nvPr>
+          <p:nvPr/>
         </p:nvPicPr>
         <p:blipFill>
           <a:blip r:embed="rId2">
@@ -24609,122 +21654,18 @@
         </p:blipFill>
         <p:spPr>
           <a:xfrm>
-            <a:off x="643467" y="1616033"/>
-            <a:ext cx="10905066" cy="3625932"/>
+            <a:off x="2038342" y="2215131"/>
+            <a:ext cx="8115316" cy="2427737"/>
           </a:xfrm>
           <a:prstGeom prst="rect">
             <a:avLst/>
           </a:prstGeom>
         </p:spPr>
       </p:pic>
-      <p:sp>
-        <p:nvSpPr>
-          <p:cNvPr id="6" name="Arrow: Down 5">
-            <a:extLst>
-              <a:ext uri="{FF2B5EF4-FFF2-40B4-BE49-F238E27FC236}">
-                <a16:creationId xmlns:a16="http://schemas.microsoft.com/office/drawing/2014/main" id="{E85FC4FB-32CF-4883-B767-429842B09BC4}"/>
-              </a:ext>
-            </a:extLst>
-          </p:cNvPr>
-          <p:cNvSpPr/>
-          <p:nvPr/>
-        </p:nvSpPr>
-        <p:spPr>
-          <a:xfrm>
-            <a:off x="7483364" y="2904796"/>
-            <a:ext cx="2858814" cy="1048406"/>
-          </a:xfrm>
-          <a:prstGeom prst="downArrow">
-            <a:avLst/>
-          </a:prstGeom>
-          <a:solidFill>
-            <a:schemeClr val="accent6">
-              <a:lumMod val="40000"/>
-              <a:lumOff val="60000"/>
-            </a:schemeClr>
-          </a:solidFill>
-        </p:spPr>
-        <p:style>
-          <a:lnRef idx="2">
-            <a:schemeClr val="accent1">
-              <a:shade val="50000"/>
-            </a:schemeClr>
-          </a:lnRef>
-          <a:fillRef idx="1">
-            <a:schemeClr val="accent1"/>
-          </a:fillRef>
-          <a:effectRef idx="0">
-            <a:schemeClr val="accent1"/>
-          </a:effectRef>
-          <a:fontRef idx="minor">
-            <a:schemeClr val="lt1"/>
-          </a:fontRef>
-        </p:style>
-        <p:txBody>
-          <a:bodyPr rtlCol="0" anchor="ctr"/>
-          <a:lstStyle/>
-          <a:p>
-            <a:pPr algn="ctr"/>
-            <a:r>
-              <a:rPr lang="en-US" dirty="0"/>
-              <a:t>shift in x</a:t>
-            </a:r>
-          </a:p>
-        </p:txBody>
-      </p:sp>
-      <p:sp>
-        <p:nvSpPr>
-          <p:cNvPr id="7" name="Arrow: Right 6">
-            <a:extLst>
-              <a:ext uri="{FF2B5EF4-FFF2-40B4-BE49-F238E27FC236}">
-                <a16:creationId xmlns:a16="http://schemas.microsoft.com/office/drawing/2014/main" id="{9C593051-B4EF-4A13-8E28-3B00AA31D38C}"/>
-              </a:ext>
-            </a:extLst>
-          </p:cNvPr>
-          <p:cNvSpPr/>
-          <p:nvPr/>
-        </p:nvSpPr>
-        <p:spPr>
-          <a:xfrm>
-            <a:off x="4981903" y="2112579"/>
-            <a:ext cx="2228193" cy="651641"/>
-          </a:xfrm>
-          <a:prstGeom prst="rightArrow">
-            <a:avLst/>
-          </a:prstGeom>
-          <a:solidFill>
-            <a:srgbClr val="7030A0"/>
-          </a:solidFill>
-        </p:spPr>
-        <p:style>
-          <a:lnRef idx="2">
-            <a:schemeClr val="accent1">
-              <a:shade val="50000"/>
-            </a:schemeClr>
-          </a:lnRef>
-          <a:fillRef idx="1">
-            <a:schemeClr val="accent1"/>
-          </a:fillRef>
-          <a:effectRef idx="0">
-            <a:schemeClr val="accent1"/>
-          </a:effectRef>
-          <a:fontRef idx="minor">
-            <a:schemeClr val="lt1"/>
-          </a:fontRef>
-        </p:style>
-        <p:txBody>
-          <a:bodyPr rtlCol="0" anchor="ctr"/>
-          <a:lstStyle/>
-          <a:p>
-            <a:pPr algn="ctr"/>
-            <a:endParaRPr lang="en-US"/>
-          </a:p>
-        </p:txBody>
-      </p:sp>
     </p:spTree>
     <p:extLst>
       <p:ext uri="{BB962C8B-B14F-4D97-AF65-F5344CB8AC3E}">
-        <p14:creationId xmlns:p14="http://schemas.microsoft.com/office/powerpoint/2010/main" val="2170670246"/>
+        <p14:creationId xmlns:p14="http://schemas.microsoft.com/office/powerpoint/2010/main" val="2502702519"/>
       </p:ext>
     </p:extLst>
   </p:cSld>
@@ -24761,19 +21702,17 @@
       </p:grpSpPr>
       <p:pic>
         <p:nvPicPr>
-          <p:cNvPr id="5" name="Content Placeholder 4" descr="Shape, rectangle&#10;&#10;Description automatically generated">
+          <p:cNvPr id="6" name="Picture 5">
             <a:extLst>
               <a:ext uri="{FF2B5EF4-FFF2-40B4-BE49-F238E27FC236}">
-                <a16:creationId xmlns:a16="http://schemas.microsoft.com/office/drawing/2014/main" id="{9A81586A-81E5-4502-A3F7-F9BCE0D2432A}"/>
+                <a16:creationId xmlns:a16="http://schemas.microsoft.com/office/drawing/2014/main" id="{990B3A74-D41B-4B0C-A857-DD0D6CD1D340}"/>
               </a:ext>
             </a:extLst>
           </p:cNvPr>
           <p:cNvPicPr>
-            <a:picLocks noGrp="1" noChangeAspect="1"/>
+            <a:picLocks noChangeAspect="1"/>
           </p:cNvPicPr>
-          <p:nvPr>
-            <p:ph idx="1"/>
-          </p:nvPr>
+          <p:nvPr/>
         </p:nvPicPr>
         <p:blipFill>
           <a:blip r:embed="rId2">
@@ -24789,226 +21728,18 @@
         </p:blipFill>
         <p:spPr>
           <a:xfrm>
-            <a:off x="643466" y="1616033"/>
-            <a:ext cx="10905066" cy="3625932"/>
+            <a:off x="1411976" y="1163569"/>
+            <a:ext cx="9368047" cy="4530861"/>
           </a:xfrm>
           <a:prstGeom prst="rect">
             <a:avLst/>
           </a:prstGeom>
         </p:spPr>
       </p:pic>
-      <p:sp>
-        <p:nvSpPr>
-          <p:cNvPr id="6" name="Arrow: Down 5">
-            <a:extLst>
-              <a:ext uri="{FF2B5EF4-FFF2-40B4-BE49-F238E27FC236}">
-                <a16:creationId xmlns:a16="http://schemas.microsoft.com/office/drawing/2014/main" id="{B30A2625-71AB-4672-B238-E97D6D8CA54C}"/>
-              </a:ext>
-            </a:extLst>
-          </p:cNvPr>
-          <p:cNvSpPr/>
-          <p:nvPr/>
-        </p:nvSpPr>
-        <p:spPr>
-          <a:xfrm>
-            <a:off x="7483364" y="2904796"/>
-            <a:ext cx="2858814" cy="1048406"/>
-          </a:xfrm>
-          <a:prstGeom prst="downArrow">
-            <a:avLst/>
-          </a:prstGeom>
-          <a:solidFill>
-            <a:schemeClr val="accent6">
-              <a:lumMod val="40000"/>
-              <a:lumOff val="60000"/>
-            </a:schemeClr>
-          </a:solidFill>
-        </p:spPr>
-        <p:style>
-          <a:lnRef idx="2">
-            <a:schemeClr val="accent1">
-              <a:shade val="50000"/>
-            </a:schemeClr>
-          </a:lnRef>
-          <a:fillRef idx="1">
-            <a:schemeClr val="accent1"/>
-          </a:fillRef>
-          <a:effectRef idx="0">
-            <a:schemeClr val="accent1"/>
-          </a:effectRef>
-          <a:fontRef idx="minor">
-            <a:schemeClr val="lt1"/>
-          </a:fontRef>
-        </p:style>
-        <p:txBody>
-          <a:bodyPr rtlCol="0" anchor="ctr"/>
-          <a:lstStyle/>
-          <a:p>
-            <a:pPr algn="ctr"/>
-            <a:r>
-              <a:rPr lang="en-US" dirty="0"/>
-              <a:t>shift in x</a:t>
-            </a:r>
-          </a:p>
-        </p:txBody>
-      </p:sp>
-      <p:sp>
-        <p:nvSpPr>
-          <p:cNvPr id="7" name="Arrow: Right 6">
-            <a:extLst>
-              <a:ext uri="{FF2B5EF4-FFF2-40B4-BE49-F238E27FC236}">
-                <a16:creationId xmlns:a16="http://schemas.microsoft.com/office/drawing/2014/main" id="{5508D943-D257-496D-A583-E06965B623D5}"/>
-              </a:ext>
-            </a:extLst>
-          </p:cNvPr>
-          <p:cNvSpPr/>
-          <p:nvPr/>
-        </p:nvSpPr>
-        <p:spPr>
-          <a:xfrm>
-            <a:off x="4981903" y="2112579"/>
-            <a:ext cx="2228193" cy="651641"/>
-          </a:xfrm>
-          <a:prstGeom prst="rightArrow">
-            <a:avLst/>
-          </a:prstGeom>
-          <a:solidFill>
-            <a:srgbClr val="7030A0"/>
-          </a:solidFill>
-        </p:spPr>
-        <p:style>
-          <a:lnRef idx="2">
-            <a:schemeClr val="accent1">
-              <a:shade val="50000"/>
-            </a:schemeClr>
-          </a:lnRef>
-          <a:fillRef idx="1">
-            <a:schemeClr val="accent1"/>
-          </a:fillRef>
-          <a:effectRef idx="0">
-            <a:schemeClr val="accent1"/>
-          </a:effectRef>
-          <a:fontRef idx="minor">
-            <a:schemeClr val="lt1"/>
-          </a:fontRef>
-        </p:style>
-        <p:txBody>
-          <a:bodyPr rtlCol="0" anchor="ctr"/>
-          <a:lstStyle/>
-          <a:p>
-            <a:pPr algn="ctr"/>
-            <a:endParaRPr lang="en-US"/>
-          </a:p>
-        </p:txBody>
-      </p:sp>
-      <p:sp>
-        <p:nvSpPr>
-          <p:cNvPr id="9" name="Arrow: Right 8">
-            <a:extLst>
-              <a:ext uri="{FF2B5EF4-FFF2-40B4-BE49-F238E27FC236}">
-                <a16:creationId xmlns:a16="http://schemas.microsoft.com/office/drawing/2014/main" id="{6B5AD712-61C1-4ABE-8DE2-3C3D06C29C24}"/>
-              </a:ext>
-            </a:extLst>
-          </p:cNvPr>
-          <p:cNvSpPr/>
-          <p:nvPr/>
-        </p:nvSpPr>
-        <p:spPr>
-          <a:xfrm>
-            <a:off x="4981903" y="3953202"/>
-            <a:ext cx="2228193" cy="651641"/>
-          </a:xfrm>
-          <a:prstGeom prst="rightArrow">
-            <a:avLst/>
-          </a:prstGeom>
-          <a:solidFill>
-            <a:srgbClr val="7030A0"/>
-          </a:solidFill>
-        </p:spPr>
-        <p:style>
-          <a:lnRef idx="2">
-            <a:schemeClr val="accent1">
-              <a:shade val="50000"/>
-            </a:schemeClr>
-          </a:lnRef>
-          <a:fillRef idx="1">
-            <a:schemeClr val="accent1"/>
-          </a:fillRef>
-          <a:effectRef idx="0">
-            <a:schemeClr val="accent1"/>
-          </a:effectRef>
-          <a:fontRef idx="minor">
-            <a:schemeClr val="lt1"/>
-          </a:fontRef>
-        </p:style>
-        <p:txBody>
-          <a:bodyPr rtlCol="0" anchor="ctr"/>
-          <a:lstStyle/>
-          <a:p>
-            <a:pPr algn="ctr"/>
-            <a:endParaRPr lang="en-US"/>
-          </a:p>
-        </p:txBody>
-      </p:sp>
-      <p:sp>
-        <p:nvSpPr>
-          <p:cNvPr id="10" name="Arrow: Down 9">
-            <a:extLst>
-              <a:ext uri="{FF2B5EF4-FFF2-40B4-BE49-F238E27FC236}">
-                <a16:creationId xmlns:a16="http://schemas.microsoft.com/office/drawing/2014/main" id="{89E47935-0206-4774-983E-C42555DDAA72}"/>
-              </a:ext>
-            </a:extLst>
-          </p:cNvPr>
-          <p:cNvSpPr/>
-          <p:nvPr/>
-        </p:nvSpPr>
-        <p:spPr>
-          <a:xfrm>
-            <a:off x="1986455" y="2764220"/>
-            <a:ext cx="2858814" cy="1048406"/>
-          </a:xfrm>
-          <a:prstGeom prst="downArrow">
-            <a:avLst/>
-          </a:prstGeom>
-          <a:solidFill>
-            <a:schemeClr val="accent6">
-              <a:lumMod val="40000"/>
-              <a:lumOff val="60000"/>
-            </a:schemeClr>
-          </a:solidFill>
-        </p:spPr>
-        <p:style>
-          <a:lnRef idx="2">
-            <a:schemeClr val="accent1">
-              <a:shade val="50000"/>
-            </a:schemeClr>
-          </a:lnRef>
-          <a:fillRef idx="1">
-            <a:schemeClr val="accent1"/>
-          </a:fillRef>
-          <a:effectRef idx="0">
-            <a:schemeClr val="accent1"/>
-          </a:effectRef>
-          <a:fontRef idx="minor">
-            <a:schemeClr val="lt1"/>
-          </a:fontRef>
-        </p:style>
-        <p:txBody>
-          <a:bodyPr rtlCol="0" anchor="ctr"/>
-          <a:lstStyle/>
-          <a:p>
-            <a:pPr algn="ctr"/>
-            <a:r>
-              <a:rPr lang="en-US" dirty="0"/>
-              <a:t>shift in x</a:t>
-            </a:r>
-          </a:p>
-        </p:txBody>
-      </p:sp>
     </p:spTree>
     <p:extLst>
       <p:ext uri="{BB962C8B-B14F-4D97-AF65-F5344CB8AC3E}">
-        <p14:creationId xmlns:p14="http://schemas.microsoft.com/office/powerpoint/2010/main" val="1763246336"/>
+        <p14:creationId xmlns:p14="http://schemas.microsoft.com/office/powerpoint/2010/main" val="2240396974"/>
       </p:ext>
     </p:extLst>
   </p:cSld>
@@ -25019,6 +21750,146 @@
 </file>
 
 <file path=ppt/slides/slide24.xml><?xml version="1.0" encoding="utf-8"?>
+<p:sld xmlns:a="http://schemas.openxmlformats.org/drawingml/2006/main" xmlns:r="http://schemas.openxmlformats.org/officeDocument/2006/relationships" xmlns:p="http://schemas.openxmlformats.org/presentationml/2006/main">
+  <p:cSld>
+    <p:bg>
+      <p:bgPr>
+        <a:solidFill>
+          <a:schemeClr val="bg1"/>
+        </a:solidFill>
+        <a:effectLst/>
+      </p:bgPr>
+    </p:bg>
+    <p:spTree>
+      <p:nvGrpSpPr>
+        <p:cNvPr id="1" name=""/>
+        <p:cNvGrpSpPr/>
+        <p:nvPr/>
+      </p:nvGrpSpPr>
+      <p:grpSpPr>
+        <a:xfrm>
+          <a:off x="0" y="0"/>
+          <a:ext cx="0" cy="0"/>
+          <a:chOff x="0" y="0"/>
+          <a:chExt cx="0" cy="0"/>
+        </a:xfrm>
+      </p:grpSpPr>
+      <p:pic>
+        <p:nvPicPr>
+          <p:cNvPr id="6" name="Picture 5">
+            <a:extLst>
+              <a:ext uri="{FF2B5EF4-FFF2-40B4-BE49-F238E27FC236}">
+                <a16:creationId xmlns:a16="http://schemas.microsoft.com/office/drawing/2014/main" id="{DC1B0420-6514-4EFD-B701-61143B04A929}"/>
+              </a:ext>
+            </a:extLst>
+          </p:cNvPr>
+          <p:cNvPicPr>
+            <a:picLocks noChangeAspect="1"/>
+          </p:cNvPicPr>
+          <p:nvPr/>
+        </p:nvPicPr>
+        <p:blipFill>
+          <a:blip r:embed="rId2">
+            <a:extLst>
+              <a:ext uri="{28A0092B-C50C-407E-A947-70E740481C1C}">
+                <a14:useLocalDpi xmlns:a14="http://schemas.microsoft.com/office/drawing/2010/main" val="0"/>
+              </a:ext>
+            </a:extLst>
+          </a:blip>
+          <a:stretch>
+            <a:fillRect/>
+          </a:stretch>
+        </p:blipFill>
+        <p:spPr>
+          <a:xfrm>
+            <a:off x="1411976" y="1072129"/>
+            <a:ext cx="9368047" cy="4713741"/>
+          </a:xfrm>
+          <a:prstGeom prst="rect">
+            <a:avLst/>
+          </a:prstGeom>
+        </p:spPr>
+      </p:pic>
+    </p:spTree>
+    <p:extLst>
+      <p:ext uri="{BB962C8B-B14F-4D97-AF65-F5344CB8AC3E}">
+        <p14:creationId xmlns:p14="http://schemas.microsoft.com/office/powerpoint/2010/main" val="2653763222"/>
+      </p:ext>
+    </p:extLst>
+  </p:cSld>
+  <p:clrMapOvr>
+    <a:masterClrMapping/>
+  </p:clrMapOvr>
+</p:sld>
+</file>
+
+<file path=ppt/slides/slide25.xml><?xml version="1.0" encoding="utf-8"?>
+<p:sld xmlns:a="http://schemas.openxmlformats.org/drawingml/2006/main" xmlns:r="http://schemas.openxmlformats.org/officeDocument/2006/relationships" xmlns:p="http://schemas.openxmlformats.org/presentationml/2006/main">
+  <p:cSld>
+    <p:spTree>
+      <p:nvGrpSpPr>
+        <p:cNvPr id="1" name=""/>
+        <p:cNvGrpSpPr/>
+        <p:nvPr/>
+      </p:nvGrpSpPr>
+      <p:grpSpPr>
+        <a:xfrm>
+          <a:off x="0" y="0"/>
+          <a:ext cx="0" cy="0"/>
+          <a:chOff x="0" y="0"/>
+          <a:chExt cx="0" cy="0"/>
+        </a:xfrm>
+      </p:grpSpPr>
+      <p:pic>
+        <p:nvPicPr>
+          <p:cNvPr id="3" name="Picture 2">
+            <a:extLst>
+              <a:ext uri="{FF2B5EF4-FFF2-40B4-BE49-F238E27FC236}">
+                <a16:creationId xmlns:a16="http://schemas.microsoft.com/office/drawing/2014/main" id="{C9A493EA-9C17-4ACF-AFCE-1479F7CD36AF}"/>
+              </a:ext>
+            </a:extLst>
+          </p:cNvPr>
+          <p:cNvPicPr>
+            <a:picLocks noChangeAspect="1"/>
+          </p:cNvPicPr>
+          <p:nvPr/>
+        </p:nvPicPr>
+        <p:blipFill>
+          <a:blip r:embed="rId2">
+            <a:extLst>
+              <a:ext uri="{28A0092B-C50C-407E-A947-70E740481C1C}">
+                <a14:useLocalDpi xmlns:a14="http://schemas.microsoft.com/office/drawing/2010/main" val="0"/>
+              </a:ext>
+            </a:extLst>
+          </a:blip>
+          <a:stretch>
+            <a:fillRect/>
+          </a:stretch>
+        </p:blipFill>
+        <p:spPr>
+          <a:xfrm>
+            <a:off x="1411976" y="1072129"/>
+            <a:ext cx="9368047" cy="4713741"/>
+          </a:xfrm>
+          <a:prstGeom prst="rect">
+            <a:avLst/>
+          </a:prstGeom>
+        </p:spPr>
+      </p:pic>
+    </p:spTree>
+    <p:extLst>
+      <p:ext uri="{BB962C8B-B14F-4D97-AF65-F5344CB8AC3E}">
+        <p14:creationId xmlns:p14="http://schemas.microsoft.com/office/powerpoint/2010/main" val="3210960262"/>
+      </p:ext>
+    </p:extLst>
+  </p:cSld>
+  <p:clrMapOvr>
+    <a:masterClrMapping/>
+  </p:clrMapOvr>
+</p:sld>
+</file>
+
+<file path=ppt/slides/slide26.xml><?xml version="1.0" encoding="utf-8"?>
 <p:sld xmlns:a="http://schemas.openxmlformats.org/drawingml/2006/main" xmlns:r="http://schemas.openxmlformats.org/officeDocument/2006/relationships" xmlns:p="http://schemas.openxmlformats.org/presentationml/2006/main">
   <p:cSld>
     <p:spTree>
@@ -25345,158 +22216,6 @@
 </p:sld>
 </file>
 
-<file path=ppt/slides/slide25.xml><?xml version="1.0" encoding="utf-8"?>
-<p:sld xmlns:a="http://schemas.openxmlformats.org/drawingml/2006/main" xmlns:r="http://schemas.openxmlformats.org/officeDocument/2006/relationships" xmlns:p="http://schemas.openxmlformats.org/presentationml/2006/main">
-  <p:cSld>
-    <p:bg>
-      <p:bgPr>
-        <a:solidFill>
-          <a:schemeClr val="bg1"/>
-        </a:solidFill>
-        <a:effectLst/>
-      </p:bgPr>
-    </p:bg>
-    <p:spTree>
-      <p:nvGrpSpPr>
-        <p:cNvPr id="1" name=""/>
-        <p:cNvGrpSpPr/>
-        <p:nvPr/>
-      </p:nvGrpSpPr>
-      <p:grpSpPr>
-        <a:xfrm>
-          <a:off x="0" y="0"/>
-          <a:ext cx="0" cy="0"/>
-          <a:chOff x="0" y="0"/>
-          <a:chExt cx="0" cy="0"/>
-        </a:xfrm>
-      </p:grpSpPr>
-      <p:pic>
-        <p:nvPicPr>
-          <p:cNvPr id="9" name="Content Placeholder 8" descr="A picture containing graphical user interface&#10;&#10;Description automatically generated">
-            <a:extLst>
-              <a:ext uri="{FF2B5EF4-FFF2-40B4-BE49-F238E27FC236}">
-                <a16:creationId xmlns:a16="http://schemas.microsoft.com/office/drawing/2014/main" id="{470701F9-5463-4E2B-8428-34E74773CFD2}"/>
-              </a:ext>
-            </a:extLst>
-          </p:cNvPr>
-          <p:cNvPicPr>
-            <a:picLocks noGrp="1" noChangeAspect="1"/>
-          </p:cNvPicPr>
-          <p:nvPr>
-            <p:ph idx="1"/>
-          </p:nvPr>
-        </p:nvPicPr>
-        <p:blipFill>
-          <a:blip r:embed="rId3">
-            <a:extLst>
-              <a:ext uri="{28A0092B-C50C-407E-A947-70E740481C1C}">
-                <a14:useLocalDpi xmlns:a14="http://schemas.microsoft.com/office/drawing/2010/main" val="0"/>
-              </a:ext>
-            </a:extLst>
-          </a:blip>
-          <a:stretch>
-            <a:fillRect/>
-          </a:stretch>
-        </p:blipFill>
-        <p:spPr>
-          <a:xfrm>
-            <a:off x="643467" y="893571"/>
-            <a:ext cx="10905066" cy="5070856"/>
-          </a:xfrm>
-          <a:prstGeom prst="rect">
-            <a:avLst/>
-          </a:prstGeom>
-        </p:spPr>
-      </p:pic>
-    </p:spTree>
-    <p:extLst>
-      <p:ext uri="{BB962C8B-B14F-4D97-AF65-F5344CB8AC3E}">
-        <p14:creationId xmlns:p14="http://schemas.microsoft.com/office/powerpoint/2010/main" val="2953619670"/>
-      </p:ext>
-    </p:extLst>
-  </p:cSld>
-  <p:clrMapOvr>
-    <a:masterClrMapping/>
-  </p:clrMapOvr>
-</p:sld>
-</file>
-
-<file path=ppt/slides/slide26.xml><?xml version="1.0" encoding="utf-8"?>
-<p:sld xmlns:a="http://schemas.openxmlformats.org/drawingml/2006/main" xmlns:r="http://schemas.openxmlformats.org/officeDocument/2006/relationships" xmlns:p="http://schemas.openxmlformats.org/presentationml/2006/main">
-  <p:cSld>
-    <p:bg>
-      <p:bgPr>
-        <a:solidFill>
-          <a:schemeClr val="bg1"/>
-        </a:solidFill>
-        <a:effectLst/>
-      </p:bgPr>
-    </p:bg>
-    <p:spTree>
-      <p:nvGrpSpPr>
-        <p:cNvPr id="1" name=""/>
-        <p:cNvGrpSpPr/>
-        <p:nvPr/>
-      </p:nvGrpSpPr>
-      <p:grpSpPr>
-        <a:xfrm>
-          <a:off x="0" y="0"/>
-          <a:ext cx="0" cy="0"/>
-          <a:chOff x="0" y="0"/>
-          <a:chExt cx="0" cy="0"/>
-        </a:xfrm>
-      </p:grpSpPr>
-      <p:pic>
-        <p:nvPicPr>
-          <p:cNvPr id="5" name="Content Placeholder 4" descr="Chart&#10;&#10;Description automatically generated">
-            <a:extLst>
-              <a:ext uri="{FF2B5EF4-FFF2-40B4-BE49-F238E27FC236}">
-                <a16:creationId xmlns:a16="http://schemas.microsoft.com/office/drawing/2014/main" id="{70786A64-E129-4D94-AA87-A806A26DDF9D}"/>
-              </a:ext>
-            </a:extLst>
-          </p:cNvPr>
-          <p:cNvPicPr>
-            <a:picLocks noGrp="1" noChangeAspect="1"/>
-          </p:cNvPicPr>
-          <p:nvPr>
-            <p:ph idx="1"/>
-          </p:nvPr>
-        </p:nvPicPr>
-        <p:blipFill>
-          <a:blip r:embed="rId3">
-            <a:extLst>
-              <a:ext uri="{28A0092B-C50C-407E-A947-70E740481C1C}">
-                <a14:useLocalDpi xmlns:a14="http://schemas.microsoft.com/office/drawing/2010/main" val="0"/>
-              </a:ext>
-            </a:extLst>
-          </a:blip>
-          <a:stretch>
-            <a:fillRect/>
-          </a:stretch>
-        </p:blipFill>
-        <p:spPr>
-          <a:xfrm>
-            <a:off x="643467" y="784521"/>
-            <a:ext cx="10905066" cy="5288957"/>
-          </a:xfrm>
-          <a:prstGeom prst="rect">
-            <a:avLst/>
-          </a:prstGeom>
-        </p:spPr>
-      </p:pic>
-    </p:spTree>
-    <p:extLst>
-      <p:ext uri="{BB962C8B-B14F-4D97-AF65-F5344CB8AC3E}">
-        <p14:creationId xmlns:p14="http://schemas.microsoft.com/office/powerpoint/2010/main" val="498460293"/>
-      </p:ext>
-    </p:extLst>
-  </p:cSld>
-  <p:clrMapOvr>
-    <a:masterClrMapping/>
-  </p:clrMapOvr>
-</p:sld>
-</file>
-
 <file path=ppt/slides/slide27.xml><?xml version="1.0" encoding="utf-8"?>
 <p:sld xmlns:a="http://schemas.openxmlformats.org/drawingml/2006/main" xmlns:r="http://schemas.openxmlformats.org/officeDocument/2006/relationships" xmlns:p="http://schemas.openxmlformats.org/presentationml/2006/main">
   <p:cSld>
@@ -25524,10 +22243,10 @@
       </p:grpSpPr>
       <p:pic>
         <p:nvPicPr>
-          <p:cNvPr id="5" name="Content Placeholder 4" descr="Chart, box and whisker chart&#10;&#10;Description automatically generated">
+          <p:cNvPr id="8" name="Content Placeholder 7">
             <a:extLst>
               <a:ext uri="{FF2B5EF4-FFF2-40B4-BE49-F238E27FC236}">
-                <a16:creationId xmlns:a16="http://schemas.microsoft.com/office/drawing/2014/main" id="{57A1DE9C-5D7F-4945-9CBD-6DC26F1F960D}"/>
+                <a16:creationId xmlns:a16="http://schemas.microsoft.com/office/drawing/2014/main" id="{F86563FA-D445-4F87-A175-030D4C27A871}"/>
               </a:ext>
             </a:extLst>
           </p:cNvPr>
@@ -25552,18 +22271,15 @@
         </p:blipFill>
         <p:spPr>
           <a:xfrm>
-            <a:off x="643467" y="784521"/>
-            <a:ext cx="10905066" cy="5288957"/>
+            <a:off x="2038342" y="2787425"/>
+            <a:ext cx="8115316" cy="2427737"/>
           </a:xfrm>
-          <a:prstGeom prst="rect">
-            <a:avLst/>
-          </a:prstGeom>
         </p:spPr>
       </p:pic>
     </p:spTree>
     <p:extLst>
       <p:ext uri="{BB962C8B-B14F-4D97-AF65-F5344CB8AC3E}">
-        <p14:creationId xmlns:p14="http://schemas.microsoft.com/office/powerpoint/2010/main" val="4258875496"/>
+        <p14:creationId xmlns:p14="http://schemas.microsoft.com/office/powerpoint/2010/main" val="2953619670"/>
       </p:ext>
     </p:extLst>
   </p:cSld>
@@ -25600,10 +22316,10 @@
       </p:grpSpPr>
       <p:pic>
         <p:nvPicPr>
-          <p:cNvPr id="5" name="Content Placeholder 4" descr="Diagram&#10;&#10;Description automatically generated">
+          <p:cNvPr id="6" name="Content Placeholder 5">
             <a:extLst>
               <a:ext uri="{FF2B5EF4-FFF2-40B4-BE49-F238E27FC236}">
-                <a16:creationId xmlns:a16="http://schemas.microsoft.com/office/drawing/2014/main" id="{7A6BA116-F9CF-4D72-AFC0-2D973567B6A1}"/>
+                <a16:creationId xmlns:a16="http://schemas.microsoft.com/office/drawing/2014/main" id="{BC8D4D8F-85BA-46E7-BC5C-AF80CAABB45A}"/>
               </a:ext>
             </a:extLst>
           </p:cNvPr>
@@ -25628,18 +22344,15 @@
         </p:blipFill>
         <p:spPr>
           <a:xfrm>
-            <a:off x="643467" y="784521"/>
-            <a:ext cx="10905066" cy="5288957"/>
+            <a:off x="2058916" y="2046760"/>
+            <a:ext cx="8074168" cy="3909068"/>
           </a:xfrm>
-          <a:prstGeom prst="rect">
-            <a:avLst/>
-          </a:prstGeom>
         </p:spPr>
       </p:pic>
     </p:spTree>
     <p:extLst>
       <p:ext uri="{BB962C8B-B14F-4D97-AF65-F5344CB8AC3E}">
-        <p14:creationId xmlns:p14="http://schemas.microsoft.com/office/powerpoint/2010/main" val="1206508302"/>
+        <p14:creationId xmlns:p14="http://schemas.microsoft.com/office/powerpoint/2010/main" val="498460293"/>
       </p:ext>
     </p:extLst>
   </p:cSld>
@@ -25676,10 +22389,10 @@
       </p:grpSpPr>
       <p:pic>
         <p:nvPicPr>
-          <p:cNvPr id="5" name="Content Placeholder 4" descr="Chart, box and whisker chart&#10;&#10;Description automatically generated">
+          <p:cNvPr id="6" name="Content Placeholder 5">
             <a:extLst>
               <a:ext uri="{FF2B5EF4-FFF2-40B4-BE49-F238E27FC236}">
-                <a16:creationId xmlns:a16="http://schemas.microsoft.com/office/drawing/2014/main" id="{77E0DE0C-AA37-428E-AFCE-0549D4321FF9}"/>
+                <a16:creationId xmlns:a16="http://schemas.microsoft.com/office/drawing/2014/main" id="{E9B3BA73-8A13-4AC7-A20C-8B348CF4DFA9}"/>
               </a:ext>
             </a:extLst>
           </p:cNvPr>
@@ -25704,18 +22417,15 @@
         </p:blipFill>
         <p:spPr>
           <a:xfrm>
-            <a:off x="643467" y="784521"/>
-            <a:ext cx="10905066" cy="5288957"/>
+            <a:off x="2058916" y="2046760"/>
+            <a:ext cx="8074168" cy="3909068"/>
           </a:xfrm>
-          <a:prstGeom prst="rect">
-            <a:avLst/>
-          </a:prstGeom>
         </p:spPr>
       </p:pic>
     </p:spTree>
     <p:extLst>
       <p:ext uri="{BB962C8B-B14F-4D97-AF65-F5344CB8AC3E}">
-        <p14:creationId xmlns:p14="http://schemas.microsoft.com/office/powerpoint/2010/main" val="4149142854"/>
+        <p14:creationId xmlns:p14="http://schemas.microsoft.com/office/powerpoint/2010/main" val="4258875496"/>
       </p:ext>
     </p:extLst>
   </p:cSld>
@@ -25728,6 +22438,14 @@
 <file path=ppt/slides/slide3.xml><?xml version="1.0" encoding="utf-8"?>
 <p:sld xmlns:a="http://schemas.openxmlformats.org/drawingml/2006/main" xmlns:r="http://schemas.openxmlformats.org/officeDocument/2006/relationships" xmlns:p="http://schemas.openxmlformats.org/presentationml/2006/main">
   <p:cSld>
+    <p:bg>
+      <p:bgPr>
+        <a:solidFill>
+          <a:schemeClr val="bg1"/>
+        </a:solidFill>
+        <a:effectLst/>
+      </p:bgPr>
+    </p:bg>
     <p:spTree>
       <p:nvGrpSpPr>
         <p:cNvPr id="1" name=""/>
@@ -25742,40 +22460,12 @@
           <a:chExt cx="0" cy="0"/>
         </a:xfrm>
       </p:grpSpPr>
-      <p:sp>
-        <p:nvSpPr>
-          <p:cNvPr id="6" name="Title 5">
+      <p:pic>
+        <p:nvPicPr>
+          <p:cNvPr id="4" name="Picture 3" descr="A picture containing background pattern&#10;&#10;Description automatically generated">
             <a:extLst>
               <a:ext uri="{FF2B5EF4-FFF2-40B4-BE49-F238E27FC236}">
-                <a16:creationId xmlns:a16="http://schemas.microsoft.com/office/drawing/2014/main" id="{3010BD28-CE35-488D-8957-A6ADF0266298}"/>
-              </a:ext>
-            </a:extLst>
-          </p:cNvPr>
-          <p:cNvSpPr>
-            <a:spLocks noGrp="1"/>
-          </p:cNvSpPr>
-          <p:nvPr>
-            <p:ph type="title"/>
-          </p:nvPr>
-        </p:nvSpPr>
-        <p:spPr/>
-        <p:txBody>
-          <a:bodyPr/>
-          <a:lstStyle/>
-          <a:p>
-            <a:r>
-              <a:rPr lang="en-US" dirty="0"/>
-              <a:t>map from data to graphic</a:t>
-            </a:r>
-          </a:p>
-        </p:txBody>
-      </p:sp>
-      <p:pic>
-        <p:nvPicPr>
-          <p:cNvPr id="12" name="Picture 11">
-            <a:extLst>
-              <a:ext uri="{FF2B5EF4-FFF2-40B4-BE49-F238E27FC236}">
-                <a16:creationId xmlns:a16="http://schemas.microsoft.com/office/drawing/2014/main" id="{DE9D9680-7408-4363-A988-8C87F28376ED}"/>
+                <a16:creationId xmlns:a16="http://schemas.microsoft.com/office/drawing/2014/main" id="{2AAEEE3E-494E-4795-BF76-792BD1C0E2A3}"/>
               </a:ext>
             </a:extLst>
           </p:cNvPr>
@@ -25785,45 +22475,21 @@
           <p:nvPr/>
         </p:nvPicPr>
         <p:blipFill>
-          <a:blip r:embed="rId2"/>
+          <a:blip r:embed="rId2">
+            <a:extLst>
+              <a:ext uri="{28A0092B-C50C-407E-A947-70E740481C1C}">
+                <a14:useLocalDpi xmlns:a14="http://schemas.microsoft.com/office/drawing/2010/main" val="0"/>
+              </a:ext>
+            </a:extLst>
+          </a:blip>
           <a:stretch>
             <a:fillRect/>
           </a:stretch>
         </p:blipFill>
         <p:spPr>
           <a:xfrm>
-            <a:off x="722692" y="1946459"/>
-            <a:ext cx="5227149" cy="3970865"/>
-          </a:xfrm>
-          <a:prstGeom prst="rect">
-            <a:avLst/>
-          </a:prstGeom>
-        </p:spPr>
-      </p:pic>
-      <p:pic>
-        <p:nvPicPr>
-          <p:cNvPr id="14" name="Picture 13">
-            <a:extLst>
-              <a:ext uri="{FF2B5EF4-FFF2-40B4-BE49-F238E27FC236}">
-                <a16:creationId xmlns:a16="http://schemas.microsoft.com/office/drawing/2014/main" id="{E515FC66-B562-4849-9143-8F361882DD12}"/>
-              </a:ext>
-            </a:extLst>
-          </p:cNvPr>
-          <p:cNvPicPr>
-            <a:picLocks noChangeAspect="1"/>
-          </p:cNvPicPr>
-          <p:nvPr/>
-        </p:nvPicPr>
-        <p:blipFill>
-          <a:blip r:embed="rId3"/>
-          <a:stretch>
-            <a:fillRect/>
-          </a:stretch>
-        </p:blipFill>
-        <p:spPr>
-          <a:xfrm>
-            <a:off x="5949841" y="1877256"/>
-            <a:ext cx="5435244" cy="4109269"/>
+            <a:off x="643467" y="1793240"/>
+            <a:ext cx="10905066" cy="3271518"/>
           </a:xfrm>
           <a:prstGeom prst="rect">
             <a:avLst/>
@@ -25833,7 +22499,7 @@
     </p:spTree>
     <p:extLst>
       <p:ext uri="{BB962C8B-B14F-4D97-AF65-F5344CB8AC3E}">
-        <p14:creationId xmlns:p14="http://schemas.microsoft.com/office/powerpoint/2010/main" val="3192418391"/>
+        <p14:creationId xmlns:p14="http://schemas.microsoft.com/office/powerpoint/2010/main" val="3570526667"/>
       </p:ext>
     </p:extLst>
   </p:cSld>
@@ -25846,6 +22512,14 @@
 <file path=ppt/slides/slide30.xml><?xml version="1.0" encoding="utf-8"?>
 <p:sld xmlns:a="http://schemas.openxmlformats.org/drawingml/2006/main" xmlns:r="http://schemas.openxmlformats.org/officeDocument/2006/relationships" xmlns:p="http://schemas.openxmlformats.org/presentationml/2006/main">
   <p:cSld>
+    <p:bg>
+      <p:bgPr>
+        <a:solidFill>
+          <a:schemeClr val="bg1"/>
+        </a:solidFill>
+        <a:effectLst/>
+      </p:bgPr>
+    </p:bg>
     <p:spTree>
       <p:nvGrpSpPr>
         <p:cNvPr id="1" name=""/>
@@ -25860,68 +22534,45 @@
           <a:chExt cx="0" cy="0"/>
         </a:xfrm>
       </p:grpSpPr>
-      <p:sp>
-        <p:nvSpPr>
-          <p:cNvPr id="2" name="Title 1">
+      <p:pic>
+        <p:nvPicPr>
+          <p:cNvPr id="10" name="Content Placeholder 9">
             <a:extLst>
               <a:ext uri="{FF2B5EF4-FFF2-40B4-BE49-F238E27FC236}">
-                <a16:creationId xmlns:a16="http://schemas.microsoft.com/office/drawing/2014/main" id="{566E6D9C-4C70-474C-9B86-CE2E6B096D03}"/>
+                <a16:creationId xmlns:a16="http://schemas.microsoft.com/office/drawing/2014/main" id="{1EA22C17-5BAE-40FE-85E8-C7C1B63851C6}"/>
               </a:ext>
             </a:extLst>
           </p:cNvPr>
-          <p:cNvSpPr>
-            <a:spLocks noGrp="1"/>
-          </p:cNvSpPr>
+          <p:cNvPicPr>
+            <a:picLocks noGrp="1" noChangeAspect="1"/>
+          </p:cNvPicPr>
           <p:nvPr>
-            <p:ph type="title"/>
+            <p:ph idx="1"/>
           </p:nvPr>
-        </p:nvSpPr>
-        <p:spPr/>
-        <p:txBody>
-          <a:bodyPr/>
-          <a:lstStyle/>
-          <a:p>
-            <a:r>
-              <a:rPr lang="en-US" dirty="0"/>
-              <a:t>Appendix:</a:t>
-            </a:r>
-          </a:p>
-        </p:txBody>
-      </p:sp>
-      <p:sp>
-        <p:nvSpPr>
-          <p:cNvPr id="4" name="Text Placeholder 3">
+        </p:nvPicPr>
+        <p:blipFill>
+          <a:blip r:embed="rId3">
             <a:extLst>
-              <a:ext uri="{FF2B5EF4-FFF2-40B4-BE49-F238E27FC236}">
-                <a16:creationId xmlns:a16="http://schemas.microsoft.com/office/drawing/2014/main" id="{2D6EBB00-A9A0-49CC-AF3B-6329FB52BA53}"/>
+              <a:ext uri="{28A0092B-C50C-407E-A947-70E740481C1C}">
+                <a14:useLocalDpi xmlns:a14="http://schemas.microsoft.com/office/drawing/2010/main" val="0"/>
               </a:ext>
             </a:extLst>
-          </p:cNvPr>
-          <p:cNvSpPr>
-            <a:spLocks noGrp="1"/>
-          </p:cNvSpPr>
-          <p:nvPr>
-            <p:ph type="body" idx="1"/>
-          </p:nvPr>
-        </p:nvSpPr>
-        <p:spPr/>
-        <p:txBody>
-          <a:bodyPr>
-            <a:normAutofit/>
-          </a:bodyPr>
-          <a:lstStyle/>
-          <a:p>
-            <a:r>
-              <a:rPr lang="en-US" sz="4400" dirty="0"/>
-              <a:t>What does it mean for data to have topology?</a:t>
-            </a:r>
-          </a:p>
-        </p:txBody>
-      </p:sp>
+          </a:blip>
+          <a:stretch>
+            <a:fillRect/>
+          </a:stretch>
+        </p:blipFill>
+        <p:spPr>
+          <a:xfrm>
+            <a:off x="2058916" y="2046760"/>
+            <a:ext cx="8074168" cy="3909068"/>
+          </a:xfrm>
+        </p:spPr>
+      </p:pic>
     </p:spTree>
     <p:extLst>
       <p:ext uri="{BB962C8B-B14F-4D97-AF65-F5344CB8AC3E}">
-        <p14:creationId xmlns:p14="http://schemas.microsoft.com/office/powerpoint/2010/main" val="1947266957"/>
+        <p14:creationId xmlns:p14="http://schemas.microsoft.com/office/powerpoint/2010/main" val="1206508302"/>
       </p:ext>
     </p:extLst>
   </p:cSld>
@@ -25958,143 +22609,134 @@
       </p:grpSpPr>
       <p:sp>
         <p:nvSpPr>
-          <p:cNvPr id="8" name="Rectangle 9">
+          <p:cNvPr id="8" name="Title 7">
             <a:extLst>
               <a:ext uri="{FF2B5EF4-FFF2-40B4-BE49-F238E27FC236}">
-                <a16:creationId xmlns:a16="http://schemas.microsoft.com/office/drawing/2014/main" id="{32BC26D8-82FB-445E-AA49-62A77D7C1EE0}"/>
-              </a:ext>
-              <a:ext uri="{C183D7F6-B498-43B3-948B-1728B52AA6E4}">
-                <adec:decorative xmlns:adec="http://schemas.microsoft.com/office/drawing/2017/decorative" val="1"/>
+                <a16:creationId xmlns:a16="http://schemas.microsoft.com/office/drawing/2014/main" id="{8A01A57A-85D8-4A6C-9B7D-C1BB2974AFC1}"/>
               </a:ext>
             </a:extLst>
           </p:cNvPr>
           <p:cNvSpPr>
-            <a:spLocks noGrp="1" noRot="1" noChangeAspect="1" noMove="1" noResize="1" noEditPoints="1" noAdjustHandles="1" noChangeArrowheads="1" noChangeShapeType="1" noTextEdit="1"/>
+            <a:spLocks noGrp="1"/>
           </p:cNvSpPr>
           <p:nvPr>
-            <p:extLst>
-              <p:ext uri="{386F3935-93C4-4BCD-93E2-E3B085C9AB24}">
-                <p16:designElem xmlns:p16="http://schemas.microsoft.com/office/powerpoint/2015/main" val="1"/>
-              </p:ext>
-            </p:extLst>
+            <p:ph type="title"/>
           </p:nvPr>
         </p:nvSpPr>
-        <p:spPr>
-          <a:xfrm>
-            <a:off x="0" y="0"/>
-            <a:ext cx="12192000" cy="6858000"/>
-          </a:xfrm>
-          <a:prstGeom prst="rect">
-            <a:avLst/>
-          </a:prstGeom>
-          <a:solidFill>
-            <a:srgbClr val="333758"/>
-          </a:solidFill>
-          <a:ln>
-            <a:noFill/>
-          </a:ln>
-        </p:spPr>
-        <p:style>
-          <a:lnRef idx="2">
-            <a:schemeClr val="accent1">
-              <a:shade val="50000"/>
-            </a:schemeClr>
-          </a:lnRef>
-          <a:fillRef idx="1">
-            <a:schemeClr val="accent1"/>
-          </a:fillRef>
-          <a:effectRef idx="0">
-            <a:schemeClr val="accent1"/>
-          </a:effectRef>
-          <a:fontRef idx="minor">
-            <a:schemeClr val="lt1"/>
-          </a:fontRef>
-        </p:style>
+        <p:spPr/>
         <p:txBody>
-          <a:bodyPr rtlCol="0" anchor="ctr"/>
+          <a:bodyPr/>
           <a:lstStyle/>
           <a:p>
-            <a:pPr algn="ctr"/>
-            <a:endParaRPr lang="en-US"/>
-          </a:p>
-        </p:txBody>
-      </p:sp>
-      <p:sp>
-        <p:nvSpPr>
-          <p:cNvPr id="9" name="Rectangle 11">
-            <a:extLst>
-              <a:ext uri="{FF2B5EF4-FFF2-40B4-BE49-F238E27FC236}">
-                <a16:creationId xmlns:a16="http://schemas.microsoft.com/office/drawing/2014/main" id="{CB44330D-EA18-4254-AA95-EB49948539B8}"/>
-              </a:ext>
-              <a:ext uri="{C183D7F6-B498-43B3-948B-1728B52AA6E4}">
-                <adec:decorative xmlns:adec="http://schemas.microsoft.com/office/drawing/2017/decorative" val="1"/>
-              </a:ext>
-            </a:extLst>
-          </p:cNvPr>
-          <p:cNvSpPr>
-            <a:spLocks noGrp="1" noRot="1" noChangeAspect="1" noMove="1" noResize="1" noEditPoints="1" noAdjustHandles="1" noChangeArrowheads="1" noChangeShapeType="1" noTextEdit="1"/>
-          </p:cNvSpPr>
-          <p:nvPr>
-            <p:extLst>
-              <p:ext uri="{386F3935-93C4-4BCD-93E2-E3B085C9AB24}">
-                <p16:designElem xmlns:p16="http://schemas.microsoft.com/office/powerpoint/2015/main" val="1"/>
-              </p:ext>
-            </p:extLst>
-          </p:nvPr>
-        </p:nvSpPr>
-        <p:spPr>
-          <a:xfrm>
-            <a:off x="477012" y="480060"/>
-            <a:ext cx="11237976" cy="5897880"/>
-          </a:xfrm>
-          <a:prstGeom prst="rect">
-            <a:avLst/>
-          </a:prstGeom>
-          <a:solidFill>
-            <a:srgbClr val="FFFFFF"/>
-          </a:solidFill>
-          <a:ln>
-            <a:noFill/>
-          </a:ln>
-        </p:spPr>
-        <p:style>
-          <a:lnRef idx="2">
-            <a:schemeClr val="accent1">
-              <a:shade val="50000"/>
-            </a:schemeClr>
-          </a:lnRef>
-          <a:fillRef idx="1">
-            <a:schemeClr val="accent1"/>
-          </a:fillRef>
-          <a:effectRef idx="0">
-            <a:schemeClr val="accent1"/>
-          </a:effectRef>
-          <a:fontRef idx="minor">
-            <a:schemeClr val="lt1"/>
-          </a:fontRef>
-        </p:style>
-        <p:txBody>
-          <a:bodyPr rtlCol="0" anchor="ctr"/>
-          <a:lstStyle/>
-          <a:p>
-            <a:pPr algn="ctr"/>
             <a:endParaRPr lang="en-US"/>
           </a:p>
         </p:txBody>
       </p:sp>
       <p:pic>
         <p:nvPicPr>
-          <p:cNvPr id="5" name="Picture 4" descr="Graphical user interface, application&#10;&#10;Description automatically generated">
+          <p:cNvPr id="6" name="Content Placeholder 5">
             <a:extLst>
               <a:ext uri="{FF2B5EF4-FFF2-40B4-BE49-F238E27FC236}">
-                <a16:creationId xmlns:a16="http://schemas.microsoft.com/office/drawing/2014/main" id="{C769BD68-2BC2-45EB-B2C2-A4F39E021E4C}"/>
+                <a16:creationId xmlns:a16="http://schemas.microsoft.com/office/drawing/2014/main" id="{926BA8FB-AEBF-4DD4-8BB3-7F8C338CF77F}"/>
               </a:ext>
             </a:extLst>
           </p:cNvPr>
           <p:cNvPicPr>
-            <a:picLocks noChangeAspect="1"/>
+            <a:picLocks noGrp="1" noChangeAspect="1"/>
           </p:cNvPicPr>
-          <p:nvPr/>
+          <p:nvPr>
+            <p:ph idx="1"/>
+          </p:nvPr>
+        </p:nvPicPr>
+        <p:blipFill>
+          <a:blip r:embed="rId3">
+            <a:extLst>
+              <a:ext uri="{28A0092B-C50C-407E-A947-70E740481C1C}">
+                <a14:useLocalDpi xmlns:a14="http://schemas.microsoft.com/office/drawing/2010/main" val="0"/>
+              </a:ext>
+            </a:extLst>
+          </a:blip>
+          <a:stretch>
+            <a:fillRect/>
+          </a:stretch>
+        </p:blipFill>
+        <p:spPr>
+          <a:xfrm>
+            <a:off x="2058916" y="2046760"/>
+            <a:ext cx="8074168" cy="3909068"/>
+          </a:xfrm>
+        </p:spPr>
+      </p:pic>
+    </p:spTree>
+    <p:extLst>
+      <p:ext uri="{BB962C8B-B14F-4D97-AF65-F5344CB8AC3E}">
+        <p14:creationId xmlns:p14="http://schemas.microsoft.com/office/powerpoint/2010/main" val="4149142854"/>
+      </p:ext>
+    </p:extLst>
+  </p:cSld>
+  <p:clrMapOvr>
+    <a:masterClrMapping/>
+  </p:clrMapOvr>
+</p:sld>
+</file>
+
+<file path=ppt/slides/slide32.xml><?xml version="1.0" encoding="utf-8"?>
+<p:sld xmlns:a="http://schemas.openxmlformats.org/drawingml/2006/main" xmlns:r="http://schemas.openxmlformats.org/officeDocument/2006/relationships" xmlns:p="http://schemas.openxmlformats.org/presentationml/2006/main">
+  <p:cSld>
+    <p:spTree>
+      <p:nvGrpSpPr>
+        <p:cNvPr id="1" name=""/>
+        <p:cNvGrpSpPr/>
+        <p:nvPr/>
+      </p:nvGrpSpPr>
+      <p:grpSpPr>
+        <a:xfrm>
+          <a:off x="0" y="0"/>
+          <a:ext cx="0" cy="0"/>
+          <a:chOff x="0" y="0"/>
+          <a:chExt cx="0" cy="0"/>
+        </a:xfrm>
+      </p:grpSpPr>
+      <p:sp>
+        <p:nvSpPr>
+          <p:cNvPr id="6" name="Title 5">
+            <a:extLst>
+              <a:ext uri="{FF2B5EF4-FFF2-40B4-BE49-F238E27FC236}">
+                <a16:creationId xmlns:a16="http://schemas.microsoft.com/office/drawing/2014/main" id="{37366561-22D6-4DC8-9383-39823A4CA905}"/>
+              </a:ext>
+            </a:extLst>
+          </p:cNvPr>
+          <p:cNvSpPr>
+            <a:spLocks noGrp="1"/>
+          </p:cNvSpPr>
+          <p:nvPr>
+            <p:ph type="title"/>
+          </p:nvPr>
+        </p:nvSpPr>
+        <p:spPr/>
+        <p:txBody>
+          <a:bodyPr/>
+          <a:lstStyle/>
+          <a:p>
+            <a:endParaRPr lang="en-US" dirty="0"/>
+          </a:p>
+        </p:txBody>
+      </p:sp>
+      <p:pic>
+        <p:nvPicPr>
+          <p:cNvPr id="5" name="Content Placeholder 4">
+            <a:extLst>
+              <a:ext uri="{FF2B5EF4-FFF2-40B4-BE49-F238E27FC236}">
+                <a16:creationId xmlns:a16="http://schemas.microsoft.com/office/drawing/2014/main" id="{82405817-D0C5-4987-A167-CA708572DC5F}"/>
+              </a:ext>
+            </a:extLst>
+          </p:cNvPr>
+          <p:cNvPicPr>
+            <a:picLocks noGrp="1" noChangeAspect="1"/>
+          </p:cNvPicPr>
+          <p:nvPr>
+            <p:ph idx="1"/>
+          </p:nvPr>
         </p:nvPicPr>
         <p:blipFill>
           <a:blip r:embed="rId2">
@@ -26110,18 +22752,15 @@
         </p:blipFill>
         <p:spPr>
           <a:xfrm>
-            <a:off x="643467" y="1261617"/>
-            <a:ext cx="10905066" cy="4334764"/>
+            <a:off x="2058916" y="2046760"/>
+            <a:ext cx="8074168" cy="3909068"/>
           </a:xfrm>
-          <a:prstGeom prst="rect">
-            <a:avLst/>
-          </a:prstGeom>
         </p:spPr>
       </p:pic>
     </p:spTree>
     <p:extLst>
       <p:ext uri="{BB962C8B-B14F-4D97-AF65-F5344CB8AC3E}">
-        <p14:creationId xmlns:p14="http://schemas.microsoft.com/office/powerpoint/2010/main" val="906721590"/>
+        <p14:creationId xmlns:p14="http://schemas.microsoft.com/office/powerpoint/2010/main" val="133594091"/>
       </p:ext>
     </p:extLst>
   </p:cSld>
@@ -26131,7 +22770,7 @@
 </p:sld>
 </file>
 
-<file path=ppt/slides/slide32.xml><?xml version="1.0" encoding="utf-8"?>
+<file path=ppt/slides/slide4.xml><?xml version="1.0" encoding="utf-8"?>
 <p:sld xmlns:a="http://schemas.openxmlformats.org/drawingml/2006/main" xmlns:r="http://schemas.openxmlformats.org/officeDocument/2006/relationships" xmlns:p="http://schemas.openxmlformats.org/presentationml/2006/main">
   <p:cSld>
     <p:bg>
@@ -26156,138 +22795,12 @@
           <a:chExt cx="0" cy="0"/>
         </a:xfrm>
       </p:grpSpPr>
-      <p:sp>
-        <p:nvSpPr>
-          <p:cNvPr id="8" name="Rectangle 7">
+      <p:pic>
+        <p:nvPicPr>
+          <p:cNvPr id="3" name="Picture 2" descr="A picture containing background pattern&#10;&#10;Description automatically generated">
             <a:extLst>
               <a:ext uri="{FF2B5EF4-FFF2-40B4-BE49-F238E27FC236}">
-                <a16:creationId xmlns:a16="http://schemas.microsoft.com/office/drawing/2014/main" id="{32BC26D8-82FB-445E-AA49-62A77D7C1EE0}"/>
-              </a:ext>
-              <a:ext uri="{C183D7F6-B498-43B3-948B-1728B52AA6E4}">
-                <adec:decorative xmlns:adec="http://schemas.microsoft.com/office/drawing/2017/decorative" val="1"/>
-              </a:ext>
-            </a:extLst>
-          </p:cNvPr>
-          <p:cNvSpPr>
-            <a:spLocks noGrp="1" noRot="1" noChangeAspect="1" noMove="1" noResize="1" noEditPoints="1" noAdjustHandles="1" noChangeArrowheads="1" noChangeShapeType="1" noTextEdit="1"/>
-          </p:cNvSpPr>
-          <p:nvPr>
-            <p:extLst>
-              <p:ext uri="{386F3935-93C4-4BCD-93E2-E3B085C9AB24}">
-                <p16:designElem xmlns:p16="http://schemas.microsoft.com/office/powerpoint/2015/main" val="1"/>
-              </p:ext>
-            </p:extLst>
-          </p:nvPr>
-        </p:nvSpPr>
-        <p:spPr>
-          <a:xfrm>
-            <a:off x="0" y="0"/>
-            <a:ext cx="12192000" cy="6858000"/>
-          </a:xfrm>
-          <a:prstGeom prst="rect">
-            <a:avLst/>
-          </a:prstGeom>
-          <a:solidFill>
-            <a:srgbClr val="323658"/>
-          </a:solidFill>
-          <a:ln>
-            <a:noFill/>
-          </a:ln>
-        </p:spPr>
-        <p:style>
-          <a:lnRef idx="2">
-            <a:schemeClr val="accent1">
-              <a:shade val="50000"/>
-            </a:schemeClr>
-          </a:lnRef>
-          <a:fillRef idx="1">
-            <a:schemeClr val="accent1"/>
-          </a:fillRef>
-          <a:effectRef idx="0">
-            <a:schemeClr val="accent1"/>
-          </a:effectRef>
-          <a:fontRef idx="minor">
-            <a:schemeClr val="lt1"/>
-          </a:fontRef>
-        </p:style>
-        <p:txBody>
-          <a:bodyPr rtlCol="0" anchor="ctr"/>
-          <a:lstStyle/>
-          <a:p>
-            <a:pPr algn="ctr"/>
-            <a:endParaRPr lang="en-US"/>
-          </a:p>
-        </p:txBody>
-      </p:sp>
-      <p:sp>
-        <p:nvSpPr>
-          <p:cNvPr id="10" name="Rectangle 9">
-            <a:extLst>
-              <a:ext uri="{FF2B5EF4-FFF2-40B4-BE49-F238E27FC236}">
-                <a16:creationId xmlns:a16="http://schemas.microsoft.com/office/drawing/2014/main" id="{CB44330D-EA18-4254-AA95-EB49948539B8}"/>
-              </a:ext>
-              <a:ext uri="{C183D7F6-B498-43B3-948B-1728B52AA6E4}">
-                <adec:decorative xmlns:adec="http://schemas.microsoft.com/office/drawing/2017/decorative" val="1"/>
-              </a:ext>
-            </a:extLst>
-          </p:cNvPr>
-          <p:cNvSpPr>
-            <a:spLocks noGrp="1" noRot="1" noChangeAspect="1" noMove="1" noResize="1" noEditPoints="1" noAdjustHandles="1" noChangeArrowheads="1" noChangeShapeType="1" noTextEdit="1"/>
-          </p:cNvSpPr>
-          <p:nvPr>
-            <p:extLst>
-              <p:ext uri="{386F3935-93C4-4BCD-93E2-E3B085C9AB24}">
-                <p16:designElem xmlns:p16="http://schemas.microsoft.com/office/powerpoint/2015/main" val="1"/>
-              </p:ext>
-            </p:extLst>
-          </p:nvPr>
-        </p:nvSpPr>
-        <p:spPr>
-          <a:xfrm>
-            <a:off x="477012" y="480060"/>
-            <a:ext cx="11237976" cy="5897880"/>
-          </a:xfrm>
-          <a:prstGeom prst="rect">
-            <a:avLst/>
-          </a:prstGeom>
-          <a:solidFill>
-            <a:srgbClr val="FFFFFF"/>
-          </a:solidFill>
-          <a:ln>
-            <a:noFill/>
-          </a:ln>
-        </p:spPr>
-        <p:style>
-          <a:lnRef idx="2">
-            <a:schemeClr val="accent1">
-              <a:shade val="50000"/>
-            </a:schemeClr>
-          </a:lnRef>
-          <a:fillRef idx="1">
-            <a:schemeClr val="accent1"/>
-          </a:fillRef>
-          <a:effectRef idx="0">
-            <a:schemeClr val="accent1"/>
-          </a:effectRef>
-          <a:fontRef idx="minor">
-            <a:schemeClr val="lt1"/>
-          </a:fontRef>
-        </p:style>
-        <p:txBody>
-          <a:bodyPr rtlCol="0" anchor="ctr"/>
-          <a:lstStyle/>
-          <a:p>
-            <a:pPr algn="ctr"/>
-            <a:endParaRPr lang="en-US"/>
-          </a:p>
-        </p:txBody>
-      </p:sp>
-      <p:pic>
-        <p:nvPicPr>
-          <p:cNvPr id="3" name="Picture 2" descr="Diagram&#10;&#10;Description automatically generated">
-            <a:extLst>
-              <a:ext uri="{FF2B5EF4-FFF2-40B4-BE49-F238E27FC236}">
-                <a16:creationId xmlns:a16="http://schemas.microsoft.com/office/drawing/2014/main" id="{2F322FE2-A7AE-4C39-B61B-7B7AA8BC5845}"/>
+                <a16:creationId xmlns:a16="http://schemas.microsoft.com/office/drawing/2014/main" id="{80C6471F-C766-49BF-9667-F467ABA8FF0D}"/>
               </a:ext>
             </a:extLst>
           </p:cNvPr>
@@ -26310,8 +22823,8 @@
         </p:blipFill>
         <p:spPr>
           <a:xfrm>
-            <a:off x="643467" y="1261618"/>
-            <a:ext cx="10905066" cy="4334764"/>
+            <a:off x="643467" y="1793240"/>
+            <a:ext cx="10905066" cy="3271518"/>
           </a:xfrm>
           <a:prstGeom prst="rect">
             <a:avLst/>
@@ -26321,7 +22834,7 @@
     </p:spTree>
     <p:extLst>
       <p:ext uri="{BB962C8B-B14F-4D97-AF65-F5344CB8AC3E}">
-        <p14:creationId xmlns:p14="http://schemas.microsoft.com/office/powerpoint/2010/main" val="1897364629"/>
+        <p14:creationId xmlns:p14="http://schemas.microsoft.com/office/powerpoint/2010/main" val="3135384988"/>
       </p:ext>
     </p:extLst>
   </p:cSld>
@@ -26331,207 +22844,7 @@
 </p:sld>
 </file>
 
-<file path=ppt/slides/slide33.xml><?xml version="1.0" encoding="utf-8"?>
-<p:sld xmlns:a="http://schemas.openxmlformats.org/drawingml/2006/main" xmlns:r="http://schemas.openxmlformats.org/officeDocument/2006/relationships" xmlns:p="http://schemas.openxmlformats.org/presentationml/2006/main">
-  <p:cSld>
-    <p:bg>
-      <p:bgPr>
-        <a:solidFill>
-          <a:schemeClr val="bg1"/>
-        </a:solidFill>
-        <a:effectLst/>
-      </p:bgPr>
-    </p:bg>
-    <p:spTree>
-      <p:nvGrpSpPr>
-        <p:cNvPr id="1" name=""/>
-        <p:cNvGrpSpPr/>
-        <p:nvPr/>
-      </p:nvGrpSpPr>
-      <p:grpSpPr>
-        <a:xfrm>
-          <a:off x="0" y="0"/>
-          <a:ext cx="0" cy="0"/>
-          <a:chOff x="0" y="0"/>
-          <a:chExt cx="0" cy="0"/>
-        </a:xfrm>
-      </p:grpSpPr>
-      <p:sp>
-        <p:nvSpPr>
-          <p:cNvPr id="8" name="Rectangle 7">
-            <a:extLst>
-              <a:ext uri="{FF2B5EF4-FFF2-40B4-BE49-F238E27FC236}">
-                <a16:creationId xmlns:a16="http://schemas.microsoft.com/office/drawing/2014/main" id="{32BC26D8-82FB-445E-AA49-62A77D7C1EE0}"/>
-              </a:ext>
-              <a:ext uri="{C183D7F6-B498-43B3-948B-1728B52AA6E4}">
-                <adec:decorative xmlns:adec="http://schemas.microsoft.com/office/drawing/2017/decorative" val="1"/>
-              </a:ext>
-            </a:extLst>
-          </p:cNvPr>
-          <p:cNvSpPr>
-            <a:spLocks noGrp="1" noRot="1" noChangeAspect="1" noMove="1" noResize="1" noEditPoints="1" noAdjustHandles="1" noChangeArrowheads="1" noChangeShapeType="1" noTextEdit="1"/>
-          </p:cNvSpPr>
-          <p:nvPr>
-            <p:extLst>
-              <p:ext uri="{386F3935-93C4-4BCD-93E2-E3B085C9AB24}">
-                <p16:designElem xmlns:p16="http://schemas.microsoft.com/office/powerpoint/2015/main" val="1"/>
-              </p:ext>
-            </p:extLst>
-          </p:nvPr>
-        </p:nvSpPr>
-        <p:spPr>
-          <a:xfrm>
-            <a:off x="0" y="0"/>
-            <a:ext cx="12192000" cy="6858000"/>
-          </a:xfrm>
-          <a:prstGeom prst="rect">
-            <a:avLst/>
-          </a:prstGeom>
-          <a:solidFill>
-            <a:srgbClr val="323658"/>
-          </a:solidFill>
-          <a:ln>
-            <a:noFill/>
-          </a:ln>
-        </p:spPr>
-        <p:style>
-          <a:lnRef idx="2">
-            <a:schemeClr val="accent1">
-              <a:shade val="50000"/>
-            </a:schemeClr>
-          </a:lnRef>
-          <a:fillRef idx="1">
-            <a:schemeClr val="accent1"/>
-          </a:fillRef>
-          <a:effectRef idx="0">
-            <a:schemeClr val="accent1"/>
-          </a:effectRef>
-          <a:fontRef idx="minor">
-            <a:schemeClr val="lt1"/>
-          </a:fontRef>
-        </p:style>
-        <p:txBody>
-          <a:bodyPr rtlCol="0" anchor="ctr"/>
-          <a:lstStyle/>
-          <a:p>
-            <a:pPr algn="ctr"/>
-            <a:endParaRPr lang="en-US"/>
-          </a:p>
-        </p:txBody>
-      </p:sp>
-      <p:sp>
-        <p:nvSpPr>
-          <p:cNvPr id="10" name="Rectangle 9">
-            <a:extLst>
-              <a:ext uri="{FF2B5EF4-FFF2-40B4-BE49-F238E27FC236}">
-                <a16:creationId xmlns:a16="http://schemas.microsoft.com/office/drawing/2014/main" id="{CB44330D-EA18-4254-AA95-EB49948539B8}"/>
-              </a:ext>
-              <a:ext uri="{C183D7F6-B498-43B3-948B-1728B52AA6E4}">
-                <adec:decorative xmlns:adec="http://schemas.microsoft.com/office/drawing/2017/decorative" val="1"/>
-              </a:ext>
-            </a:extLst>
-          </p:cNvPr>
-          <p:cNvSpPr>
-            <a:spLocks noGrp="1" noRot="1" noChangeAspect="1" noMove="1" noResize="1" noEditPoints="1" noAdjustHandles="1" noChangeArrowheads="1" noChangeShapeType="1" noTextEdit="1"/>
-          </p:cNvSpPr>
-          <p:nvPr>
-            <p:extLst>
-              <p:ext uri="{386F3935-93C4-4BCD-93E2-E3B085C9AB24}">
-                <p16:designElem xmlns:p16="http://schemas.microsoft.com/office/powerpoint/2015/main" val="1"/>
-              </p:ext>
-            </p:extLst>
-          </p:nvPr>
-        </p:nvSpPr>
-        <p:spPr>
-          <a:xfrm>
-            <a:off x="477012" y="480060"/>
-            <a:ext cx="11237976" cy="5897880"/>
-          </a:xfrm>
-          <a:prstGeom prst="rect">
-            <a:avLst/>
-          </a:prstGeom>
-          <a:solidFill>
-            <a:srgbClr val="FFFFFF"/>
-          </a:solidFill>
-          <a:ln>
-            <a:noFill/>
-          </a:ln>
-        </p:spPr>
-        <p:style>
-          <a:lnRef idx="2">
-            <a:schemeClr val="accent1">
-              <a:shade val="50000"/>
-            </a:schemeClr>
-          </a:lnRef>
-          <a:fillRef idx="1">
-            <a:schemeClr val="accent1"/>
-          </a:fillRef>
-          <a:effectRef idx="0">
-            <a:schemeClr val="accent1"/>
-          </a:effectRef>
-          <a:fontRef idx="minor">
-            <a:schemeClr val="lt1"/>
-          </a:fontRef>
-        </p:style>
-        <p:txBody>
-          <a:bodyPr rtlCol="0" anchor="ctr"/>
-          <a:lstStyle/>
-          <a:p>
-            <a:pPr algn="ctr"/>
-            <a:endParaRPr lang="en-US"/>
-          </a:p>
-        </p:txBody>
-      </p:sp>
-      <p:pic>
-        <p:nvPicPr>
-          <p:cNvPr id="3" name="Picture 2" descr="Diagram&#10;&#10;Description automatically generated">
-            <a:extLst>
-              <a:ext uri="{FF2B5EF4-FFF2-40B4-BE49-F238E27FC236}">
-                <a16:creationId xmlns:a16="http://schemas.microsoft.com/office/drawing/2014/main" id="{B814098E-17D2-43E7-BA4E-928FE6C49078}"/>
-              </a:ext>
-            </a:extLst>
-          </p:cNvPr>
-          <p:cNvPicPr>
-            <a:picLocks noChangeAspect="1"/>
-          </p:cNvPicPr>
-          <p:nvPr/>
-        </p:nvPicPr>
-        <p:blipFill>
-          <a:blip r:embed="rId2">
-            <a:extLst>
-              <a:ext uri="{28A0092B-C50C-407E-A947-70E740481C1C}">
-                <a14:useLocalDpi xmlns:a14="http://schemas.microsoft.com/office/drawing/2010/main" val="0"/>
-              </a:ext>
-            </a:extLst>
-          </a:blip>
-          <a:stretch>
-            <a:fillRect/>
-          </a:stretch>
-        </p:blipFill>
-        <p:spPr>
-          <a:xfrm>
-            <a:off x="643467" y="1261618"/>
-            <a:ext cx="10905066" cy="4334764"/>
-          </a:xfrm>
-          <a:prstGeom prst="rect">
-            <a:avLst/>
-          </a:prstGeom>
-        </p:spPr>
-      </p:pic>
-    </p:spTree>
-    <p:extLst>
-      <p:ext uri="{BB962C8B-B14F-4D97-AF65-F5344CB8AC3E}">
-        <p14:creationId xmlns:p14="http://schemas.microsoft.com/office/powerpoint/2010/main" val="2149447457"/>
-      </p:ext>
-    </p:extLst>
-  </p:cSld>
-  <p:clrMapOvr>
-    <a:masterClrMapping/>
-  </p:clrMapOvr>
-</p:sld>
-</file>
-
-<file path=ppt/slides/slide4.xml><?xml version="1.0" encoding="utf-8"?>
+<file path=ppt/slides/slide5.xml><?xml version="1.0" encoding="utf-8"?>
 <p:sld xmlns:a="http://schemas.openxmlformats.org/drawingml/2006/main" xmlns:r="http://schemas.openxmlformats.org/officeDocument/2006/relationships" xmlns:p="http://schemas.openxmlformats.org/presentationml/2006/main">
   <p:cSld>
     <p:spTree>
@@ -26863,9 +23176,17 @@
 </p:sld>
 </file>
 
-<file path=ppt/slides/slide5.xml><?xml version="1.0" encoding="utf-8"?>
+<file path=ppt/slides/slide6.xml><?xml version="1.0" encoding="utf-8"?>
 <p:sld xmlns:a="http://schemas.openxmlformats.org/drawingml/2006/main" xmlns:r="http://schemas.openxmlformats.org/officeDocument/2006/relationships" xmlns:p="http://schemas.openxmlformats.org/presentationml/2006/main">
   <p:cSld>
+    <p:bg>
+      <p:bgPr>
+        <a:solidFill>
+          <a:schemeClr val="bg1"/>
+        </a:solidFill>
+        <a:effectLst/>
+      </p:bgPr>
+    </p:bg>
     <p:spTree>
       <p:nvGrpSpPr>
         <p:cNvPr id="1" name=""/>
@@ -26880,48 +23201,12 @@
           <a:chExt cx="0" cy="0"/>
         </a:xfrm>
       </p:grpSpPr>
-      <p:sp>
-        <p:nvSpPr>
-          <p:cNvPr id="6" name="Title 5">
+      <p:pic>
+        <p:nvPicPr>
+          <p:cNvPr id="3" name="Picture 2" descr="A picture containing graphical user interface&#10;&#10;Description automatically generated">
             <a:extLst>
               <a:ext uri="{FF2B5EF4-FFF2-40B4-BE49-F238E27FC236}">
-                <a16:creationId xmlns:a16="http://schemas.microsoft.com/office/drawing/2014/main" id="{3010BD28-CE35-488D-8957-A6ADF0266298}"/>
-              </a:ext>
-            </a:extLst>
-          </p:cNvPr>
-          <p:cNvSpPr>
-            <a:spLocks noGrp="1"/>
-          </p:cNvSpPr>
-          <p:nvPr>
-            <p:ph type="title"/>
-          </p:nvPr>
-        </p:nvSpPr>
-        <p:spPr/>
-        <p:txBody>
-          <a:bodyPr/>
-          <a:lstStyle/>
-          <a:p>
-            <a:r>
-              <a:rPr lang="en-US" dirty="0"/>
-              <a:t>can we improve how these maps are </a:t>
-            </a:r>
-            <a:r>
-              <a:rPr lang="en-US" dirty="0" err="1"/>
-              <a:t>implememented</a:t>
-            </a:r>
-            <a:r>
-              <a:rPr lang="en-US" dirty="0"/>
-              <a:t>?</a:t>
-            </a:r>
-          </a:p>
-        </p:txBody>
-      </p:sp>
-      <p:pic>
-        <p:nvPicPr>
-          <p:cNvPr id="12" name="Picture 11">
-            <a:extLst>
-              <a:ext uri="{FF2B5EF4-FFF2-40B4-BE49-F238E27FC236}">
-                <a16:creationId xmlns:a16="http://schemas.microsoft.com/office/drawing/2014/main" id="{DE9D9680-7408-4363-A988-8C87F28376ED}"/>
+                <a16:creationId xmlns:a16="http://schemas.microsoft.com/office/drawing/2014/main" id="{7DC841C5-3256-4DBF-9742-FAD2671998F4}"/>
               </a:ext>
             </a:extLst>
           </p:cNvPr>
@@ -26931,45 +23216,21 @@
           <p:nvPr/>
         </p:nvPicPr>
         <p:blipFill>
-          <a:blip r:embed="rId2"/>
+          <a:blip r:embed="rId2">
+            <a:extLst>
+              <a:ext uri="{28A0092B-C50C-407E-A947-70E740481C1C}">
+                <a14:useLocalDpi xmlns:a14="http://schemas.microsoft.com/office/drawing/2010/main" val="0"/>
+              </a:ext>
+            </a:extLst>
+          </a:blip>
           <a:stretch>
             <a:fillRect/>
           </a:stretch>
         </p:blipFill>
         <p:spPr>
           <a:xfrm>
-            <a:off x="722692" y="1946459"/>
-            <a:ext cx="5227149" cy="3970865"/>
-          </a:xfrm>
-          <a:prstGeom prst="rect">
-            <a:avLst/>
-          </a:prstGeom>
-        </p:spPr>
-      </p:pic>
-      <p:pic>
-        <p:nvPicPr>
-          <p:cNvPr id="14" name="Picture 13">
-            <a:extLst>
-              <a:ext uri="{FF2B5EF4-FFF2-40B4-BE49-F238E27FC236}">
-                <a16:creationId xmlns:a16="http://schemas.microsoft.com/office/drawing/2014/main" id="{E515FC66-B562-4849-9143-8F361882DD12}"/>
-              </a:ext>
-            </a:extLst>
-          </p:cNvPr>
-          <p:cNvPicPr>
-            <a:picLocks noChangeAspect="1"/>
-          </p:cNvPicPr>
-          <p:nvPr/>
-        </p:nvPicPr>
-        <p:blipFill>
-          <a:blip r:embed="rId3"/>
-          <a:stretch>
-            <a:fillRect/>
-          </a:stretch>
-        </p:blipFill>
-        <p:spPr>
-          <a:xfrm>
-            <a:off x="5949841" y="1877256"/>
-            <a:ext cx="5435244" cy="4109269"/>
+            <a:off x="643467" y="1561508"/>
+            <a:ext cx="10905066" cy="3734982"/>
           </a:xfrm>
           <a:prstGeom prst="rect">
             <a:avLst/>
@@ -26989,9 +23250,17 @@
 </p:sld>
 </file>
 
-<file path=ppt/slides/slide6.xml><?xml version="1.0" encoding="utf-8"?>
+<file path=ppt/slides/slide7.xml><?xml version="1.0" encoding="utf-8"?>
 <p:sld xmlns:a="http://schemas.openxmlformats.org/drawingml/2006/main" xmlns:r="http://schemas.openxmlformats.org/officeDocument/2006/relationships" xmlns:p="http://schemas.openxmlformats.org/presentationml/2006/main">
   <p:cSld>
+    <p:bg>
+      <p:bgPr>
+        <a:solidFill>
+          <a:schemeClr val="bg1"/>
+        </a:solidFill>
+        <a:effectLst/>
+      </p:bgPr>
+    </p:bg>
     <p:spTree>
       <p:nvGrpSpPr>
         <p:cNvPr id="1" name=""/>
@@ -27006,307 +23275,46 @@
           <a:chExt cx="0" cy="0"/>
         </a:xfrm>
       </p:grpSpPr>
-      <p:sp>
-        <p:nvSpPr>
-          <p:cNvPr id="2" name="Title 1">
+      <p:pic>
+        <p:nvPicPr>
+          <p:cNvPr id="3" name="Picture 2" descr="Chart, line chart&#10;&#10;Description automatically generated">
             <a:extLst>
               <a:ext uri="{FF2B5EF4-FFF2-40B4-BE49-F238E27FC236}">
-                <a16:creationId xmlns:a16="http://schemas.microsoft.com/office/drawing/2014/main" id="{9A0458DE-4AA8-4D17-B3D9-447DD4DB1018}"/>
+                <a16:creationId xmlns:a16="http://schemas.microsoft.com/office/drawing/2014/main" id="{F2EDC47C-1E7C-45C6-B65B-33BF43109D83}"/>
               </a:ext>
             </a:extLst>
           </p:cNvPr>
-          <p:cNvSpPr>
-            <a:spLocks noGrp="1"/>
-          </p:cNvSpPr>
-          <p:nvPr>
-            <p:ph type="title"/>
-          </p:nvPr>
-        </p:nvSpPr>
-        <p:spPr/>
-        <p:txBody>
-          <a:bodyPr/>
-          <a:lstStyle/>
-          <a:p>
-            <a:pPr algn="ctr"/>
-            <a:r>
-              <a:rPr lang="en-US" dirty="0"/>
-              <a:t>What properties do these arrows preserve?</a:t>
-            </a:r>
-          </a:p>
-        </p:txBody>
-      </p:sp>
-      <p:graphicFrame>
-        <p:nvGraphicFramePr>
-          <p:cNvPr id="4" name="Content Placeholder 3">
+          <p:cNvPicPr>
+            <a:picLocks noChangeAspect="1"/>
+          </p:cNvPicPr>
+          <p:nvPr/>
+        </p:nvPicPr>
+        <p:blipFill>
+          <a:blip r:embed="rId2">
             <a:extLst>
-              <a:ext uri="{FF2B5EF4-FFF2-40B4-BE49-F238E27FC236}">
-                <a16:creationId xmlns:a16="http://schemas.microsoft.com/office/drawing/2014/main" id="{27281DDF-13F9-4178-B1F8-F23A1B4A5F41}"/>
+              <a:ext uri="{28A0092B-C50C-407E-A947-70E740481C1C}">
+                <a14:useLocalDpi xmlns:a14="http://schemas.microsoft.com/office/drawing/2010/main" val="0"/>
               </a:ext>
             </a:extLst>
-          </p:cNvPr>
-          <p:cNvGraphicFramePr>
-            <a:graphicFrameLocks noGrp="1"/>
-          </p:cNvGraphicFramePr>
-          <p:nvPr>
-            <p:ph idx="1"/>
-          </p:nvPr>
-        </p:nvGraphicFramePr>
-        <p:xfrm>
-          <a:off x="958516" y="884572"/>
-          <a:ext cx="10515600" cy="2998677"/>
-        </p:xfrm>
-        <a:graphic>
-          <a:graphicData uri="http://schemas.openxmlformats.org/drawingml/2006/diagram">
-            <dgm:relIds xmlns:dgm="http://schemas.openxmlformats.org/drawingml/2006/diagram" xmlns:r="http://schemas.openxmlformats.org/officeDocument/2006/relationships" r:dm="rId2" r:lo="rId3" r:qs="rId4" r:cs="rId5"/>
-          </a:graphicData>
-        </a:graphic>
-      </p:graphicFrame>
-      <p:sp>
-        <p:nvSpPr>
-          <p:cNvPr id="3" name="Arrow: Curved Up 2">
-            <a:extLst>
-              <a:ext uri="{FF2B5EF4-FFF2-40B4-BE49-F238E27FC236}">
-                <a16:creationId xmlns:a16="http://schemas.microsoft.com/office/drawing/2014/main" id="{EBBEFB31-C822-43FD-AB3D-AC4D89978DBB}"/>
-              </a:ext>
-            </a:extLst>
-          </p:cNvPr>
-          <p:cNvSpPr/>
-          <p:nvPr/>
-        </p:nvSpPr>
-        <p:spPr>
-          <a:xfrm flipH="1">
-            <a:off x="1323474" y="2873885"/>
-            <a:ext cx="9910010" cy="3057622"/>
-          </a:xfrm>
-          <a:prstGeom prst="curvedUpArrow">
-            <a:avLst/>
-          </a:prstGeom>
-          <a:solidFill>
-            <a:srgbClr val="7030A0"/>
-          </a:solidFill>
-        </p:spPr>
-        <p:style>
-          <a:lnRef idx="2">
-            <a:schemeClr val="accent1">
-              <a:shade val="50000"/>
-            </a:schemeClr>
-          </a:lnRef>
-          <a:fillRef idx="1">
-            <a:schemeClr val="accent1"/>
-          </a:fillRef>
-          <a:effectRef idx="0">
-            <a:schemeClr val="accent1"/>
-          </a:effectRef>
-          <a:fontRef idx="minor">
-            <a:schemeClr val="lt1"/>
-          </a:fontRef>
-        </p:style>
-        <p:txBody>
-          <a:bodyPr rtlCol="0" anchor="ctr"/>
-          <a:lstStyle/>
-          <a:p>
-            <a:pPr algn="ctr"/>
-            <a:endParaRPr lang="en-US" dirty="0">
-              <a:solidFill>
-                <a:schemeClr val="tx1"/>
-              </a:solidFill>
-            </a:endParaRPr>
-          </a:p>
-        </p:txBody>
-      </p:sp>
-      <p:sp>
-        <p:nvSpPr>
-          <p:cNvPr id="13" name="Arrow: Right 12">
-            <a:extLst>
-              <a:ext uri="{FF2B5EF4-FFF2-40B4-BE49-F238E27FC236}">
-                <a16:creationId xmlns:a16="http://schemas.microsoft.com/office/drawing/2014/main" id="{C7909514-D251-4AE5-B8CF-0B3AB34EC0FE}"/>
-              </a:ext>
-            </a:extLst>
-          </p:cNvPr>
-          <p:cNvSpPr/>
-          <p:nvPr/>
-        </p:nvSpPr>
+          </a:blip>
+          <a:stretch>
+            <a:fillRect/>
+          </a:stretch>
+        </p:blipFill>
         <p:spPr>
           <a:xfrm>
-            <a:off x="3116179" y="2622884"/>
-            <a:ext cx="2033337" cy="308897"/>
-          </a:xfrm>
-          <a:prstGeom prst="rightArrow">
-            <a:avLst/>
-          </a:prstGeom>
-          <a:solidFill>
-            <a:srgbClr val="7030A0"/>
-          </a:solidFill>
-        </p:spPr>
-        <p:style>
-          <a:lnRef idx="2">
-            <a:schemeClr val="accent1">
-              <a:shade val="50000"/>
-            </a:schemeClr>
-          </a:lnRef>
-          <a:fillRef idx="1">
-            <a:schemeClr val="accent1"/>
-          </a:fillRef>
-          <a:effectRef idx="0">
-            <a:schemeClr val="accent1"/>
-          </a:effectRef>
-          <a:fontRef idx="minor">
-            <a:schemeClr val="lt1"/>
-          </a:fontRef>
-        </p:style>
-        <p:txBody>
-          <a:bodyPr rtlCol="0" anchor="ctr"/>
-          <a:lstStyle/>
-          <a:p>
-            <a:pPr algn="ctr"/>
-            <a:endParaRPr lang="en-US"/>
-          </a:p>
-        </p:txBody>
-      </p:sp>
-      <p:sp>
-        <p:nvSpPr>
-          <p:cNvPr id="10" name="Arrow: Right 9">
-            <a:extLst>
-              <a:ext uri="{FF2B5EF4-FFF2-40B4-BE49-F238E27FC236}">
-                <a16:creationId xmlns:a16="http://schemas.microsoft.com/office/drawing/2014/main" id="{8F931857-48ED-45E9-9E4A-D99026FD9901}"/>
-              </a:ext>
-            </a:extLst>
-          </p:cNvPr>
-          <p:cNvSpPr/>
-          <p:nvPr/>
-        </p:nvSpPr>
-        <p:spPr>
-          <a:xfrm>
-            <a:off x="3116179" y="2313987"/>
-            <a:ext cx="2033337" cy="308897"/>
-          </a:xfrm>
-          <a:prstGeom prst="rightArrow">
-            <a:avLst/>
-          </a:prstGeom>
-          <a:solidFill>
-            <a:srgbClr val="7030A0"/>
-          </a:solidFill>
-        </p:spPr>
-        <p:style>
-          <a:lnRef idx="2">
-            <a:schemeClr val="accent1">
-              <a:shade val="50000"/>
-            </a:schemeClr>
-          </a:lnRef>
-          <a:fillRef idx="1">
-            <a:schemeClr val="accent1"/>
-          </a:fillRef>
-          <a:effectRef idx="0">
-            <a:schemeClr val="accent1"/>
-          </a:effectRef>
-          <a:fontRef idx="minor">
-            <a:schemeClr val="lt1"/>
-          </a:fontRef>
-        </p:style>
-        <p:txBody>
-          <a:bodyPr rtlCol="0" anchor="ctr"/>
-          <a:lstStyle/>
-          <a:p>
-            <a:pPr algn="ctr"/>
-            <a:endParaRPr lang="en-US"/>
-          </a:p>
-        </p:txBody>
-      </p:sp>
-      <p:sp>
-        <p:nvSpPr>
-          <p:cNvPr id="14" name="Arrow: Right 13">
-            <a:extLst>
-              <a:ext uri="{FF2B5EF4-FFF2-40B4-BE49-F238E27FC236}">
-                <a16:creationId xmlns:a16="http://schemas.microsoft.com/office/drawing/2014/main" id="{47FEB999-FAF7-4821-9611-C908D22EC1B9}"/>
-              </a:ext>
-            </a:extLst>
-          </p:cNvPr>
-          <p:cNvSpPr/>
-          <p:nvPr/>
-        </p:nvSpPr>
-        <p:spPr>
-          <a:xfrm>
-            <a:off x="3116179" y="1976129"/>
-            <a:ext cx="2033337" cy="308897"/>
-          </a:xfrm>
-          <a:prstGeom prst="rightArrow">
-            <a:avLst/>
-          </a:prstGeom>
-          <a:solidFill>
-            <a:srgbClr val="7030A0"/>
-          </a:solidFill>
-        </p:spPr>
-        <p:style>
-          <a:lnRef idx="2">
-            <a:schemeClr val="accent1">
-              <a:shade val="50000"/>
-            </a:schemeClr>
-          </a:lnRef>
-          <a:fillRef idx="1">
-            <a:schemeClr val="accent1"/>
-          </a:fillRef>
-          <a:effectRef idx="0">
-            <a:schemeClr val="accent1"/>
-          </a:effectRef>
-          <a:fontRef idx="minor">
-            <a:schemeClr val="lt1"/>
-          </a:fontRef>
-        </p:style>
-        <p:txBody>
-          <a:bodyPr rtlCol="0" anchor="ctr"/>
-          <a:lstStyle/>
-          <a:p>
-            <a:pPr algn="ctr"/>
-            <a:endParaRPr lang="en-US"/>
-          </a:p>
-        </p:txBody>
-      </p:sp>
-      <p:sp>
-        <p:nvSpPr>
-          <p:cNvPr id="5" name="TextBox 4">
-            <a:extLst>
-              <a:ext uri="{FF2B5EF4-FFF2-40B4-BE49-F238E27FC236}">
-                <a16:creationId xmlns:a16="http://schemas.microsoft.com/office/drawing/2014/main" id="{7BFB1905-014E-4F7C-893C-8F751BC8B1B6}"/>
-              </a:ext>
-            </a:extLst>
-          </p:cNvPr>
-          <p:cNvSpPr txBox="1"/>
-          <p:nvPr/>
-        </p:nvSpPr>
-        <p:spPr>
-          <a:xfrm>
-            <a:off x="3116179" y="2153580"/>
-            <a:ext cx="1917154" cy="584775"/>
+            <a:off x="643467" y="1561508"/>
+            <a:ext cx="10905066" cy="3734982"/>
           </a:xfrm>
           <a:prstGeom prst="rect">
             <a:avLst/>
           </a:prstGeom>
-          <a:noFill/>
         </p:spPr>
-        <p:txBody>
-          <a:bodyPr wrap="square" rtlCol="0">
-            <a:spAutoFit/>
-          </a:bodyPr>
-          <a:lstStyle/>
-          <a:p>
-            <a:r>
-              <a:rPr lang="en-US" sz="3200" dirty="0">
-                <a:solidFill>
-                  <a:schemeClr val="bg1"/>
-                </a:solidFill>
-                <a:highlight>
-                  <a:srgbClr val="800080"/>
-                </a:highlight>
-              </a:rPr>
-              <a:t>Transform</a:t>
-            </a:r>
-          </a:p>
-        </p:txBody>
-      </p:sp>
+      </p:pic>
     </p:spTree>
     <p:extLst>
       <p:ext uri="{BB962C8B-B14F-4D97-AF65-F5344CB8AC3E}">
-        <p14:creationId xmlns:p14="http://schemas.microsoft.com/office/powerpoint/2010/main" val="1190897391"/>
+        <p14:creationId xmlns:p14="http://schemas.microsoft.com/office/powerpoint/2010/main" val="4214077479"/>
       </p:ext>
     </p:extLst>
   </p:cSld>
@@ -27316,9 +23324,17 @@
 </p:sld>
 </file>
 
-<file path=ppt/slides/slide7.xml><?xml version="1.0" encoding="utf-8"?>
+<file path=ppt/slides/slide8.xml><?xml version="1.0" encoding="utf-8"?>
 <p:sld xmlns:a="http://schemas.openxmlformats.org/drawingml/2006/main" xmlns:r="http://schemas.openxmlformats.org/officeDocument/2006/relationships" xmlns:p="http://schemas.openxmlformats.org/presentationml/2006/main">
   <p:cSld>
+    <p:bg>
+      <p:bgPr>
+        <a:solidFill>
+          <a:schemeClr val="bg1"/>
+        </a:solidFill>
+        <a:effectLst/>
+      </p:bgPr>
+    </p:bg>
     <p:spTree>
       <p:nvGrpSpPr>
         <p:cNvPr id="1" name=""/>
@@ -27333,291 +23349,46 @@
           <a:chExt cx="0" cy="0"/>
         </a:xfrm>
       </p:grpSpPr>
-      <p:sp>
-        <p:nvSpPr>
-          <p:cNvPr id="2" name="Title 1">
+      <p:pic>
+        <p:nvPicPr>
+          <p:cNvPr id="3" name="Picture 2" descr="Chart, line chart&#10;&#10;Description automatically generated">
             <a:extLst>
               <a:ext uri="{FF2B5EF4-FFF2-40B4-BE49-F238E27FC236}">
-                <a16:creationId xmlns:a16="http://schemas.microsoft.com/office/drawing/2014/main" id="{9A0458DE-4AA8-4D17-B3D9-447DD4DB1018}"/>
+                <a16:creationId xmlns:a16="http://schemas.microsoft.com/office/drawing/2014/main" id="{8665C139-FDDC-42A5-8605-0B8010ED9E97}"/>
               </a:ext>
             </a:extLst>
           </p:cNvPr>
-          <p:cNvSpPr>
-            <a:spLocks noGrp="1"/>
-          </p:cNvSpPr>
-          <p:nvPr>
-            <p:ph type="title"/>
-          </p:nvPr>
-        </p:nvSpPr>
-        <p:spPr/>
-        <p:txBody>
-          <a:bodyPr/>
-          <a:lstStyle/>
-          <a:p>
-            <a:pPr algn="ctr"/>
-            <a:r>
-              <a:rPr lang="en-US" dirty="0"/>
-              <a:t>Topology</a:t>
-            </a:r>
-          </a:p>
-        </p:txBody>
-      </p:sp>
-      <p:graphicFrame>
-        <p:nvGraphicFramePr>
-          <p:cNvPr id="4" name="Content Placeholder 3">
+          <p:cNvPicPr>
+            <a:picLocks noChangeAspect="1"/>
+          </p:cNvPicPr>
+          <p:nvPr/>
+        </p:nvPicPr>
+        <p:blipFill>
+          <a:blip r:embed="rId2">
             <a:extLst>
-              <a:ext uri="{FF2B5EF4-FFF2-40B4-BE49-F238E27FC236}">
-                <a16:creationId xmlns:a16="http://schemas.microsoft.com/office/drawing/2014/main" id="{27281DDF-13F9-4178-B1F8-F23A1B4A5F41}"/>
+              <a:ext uri="{28A0092B-C50C-407E-A947-70E740481C1C}">
+                <a14:useLocalDpi xmlns:a14="http://schemas.microsoft.com/office/drawing/2010/main" val="0"/>
               </a:ext>
             </a:extLst>
-          </p:cNvPr>
-          <p:cNvGraphicFramePr>
-            <a:graphicFrameLocks noGrp="1"/>
-          </p:cNvGraphicFramePr>
-          <p:nvPr>
-            <p:ph idx="1"/>
-            <p:extLst>
-              <p:ext uri="{D42A27DB-BD31-4B8C-83A1-F6EECF244321}">
-                <p14:modId xmlns:p14="http://schemas.microsoft.com/office/powerpoint/2010/main" val="431090757"/>
-              </p:ext>
-            </p:extLst>
-          </p:nvPr>
-        </p:nvGraphicFramePr>
-        <p:xfrm>
-          <a:off x="958516" y="884572"/>
-          <a:ext cx="10515600" cy="2998677"/>
-        </p:xfrm>
-        <a:graphic>
-          <a:graphicData uri="http://schemas.openxmlformats.org/drawingml/2006/diagram">
-            <dgm:relIds xmlns:dgm="http://schemas.openxmlformats.org/drawingml/2006/diagram" xmlns:r="http://schemas.openxmlformats.org/officeDocument/2006/relationships" r:dm="rId2" r:lo="rId3" r:qs="rId4" r:cs="rId5"/>
-          </a:graphicData>
-        </a:graphic>
-      </p:graphicFrame>
-      <p:sp>
-        <p:nvSpPr>
-          <p:cNvPr id="3" name="Arrow: Curved Up 2">
-            <a:extLst>
-              <a:ext uri="{FF2B5EF4-FFF2-40B4-BE49-F238E27FC236}">
-                <a16:creationId xmlns:a16="http://schemas.microsoft.com/office/drawing/2014/main" id="{EBBEFB31-C822-43FD-AB3D-AC4D89978DBB}"/>
-              </a:ext>
-            </a:extLst>
-          </p:cNvPr>
-          <p:cNvSpPr/>
-          <p:nvPr/>
-        </p:nvSpPr>
+          </a:blip>
+          <a:stretch>
+            <a:fillRect/>
+          </a:stretch>
+        </p:blipFill>
         <p:spPr>
-          <a:xfrm flipH="1">
-            <a:off x="1323474" y="2873885"/>
-            <a:ext cx="9910010" cy="3057622"/>
+          <a:xfrm>
+            <a:off x="643467" y="1561508"/>
+            <a:ext cx="10905066" cy="3734982"/>
           </a:xfrm>
-          <a:prstGeom prst="curvedUpArrow">
+          <a:prstGeom prst="rect">
             <a:avLst/>
           </a:prstGeom>
-          <a:solidFill>
-            <a:srgbClr val="7030A0"/>
-          </a:solidFill>
         </p:spPr>
-        <p:style>
-          <a:lnRef idx="2">
-            <a:schemeClr val="accent1">
-              <a:shade val="50000"/>
-            </a:schemeClr>
-          </a:lnRef>
-          <a:fillRef idx="1">
-            <a:schemeClr val="accent1"/>
-          </a:fillRef>
-          <a:effectRef idx="0">
-            <a:schemeClr val="accent1"/>
-          </a:effectRef>
-          <a:fontRef idx="minor">
-            <a:schemeClr val="lt1"/>
-          </a:fontRef>
-        </p:style>
-        <p:txBody>
-          <a:bodyPr rtlCol="0" anchor="ctr"/>
-          <a:lstStyle/>
-          <a:p>
-            <a:pPr algn="ctr"/>
-            <a:endParaRPr lang="en-US" dirty="0">
-              <a:solidFill>
-                <a:schemeClr val="tx1"/>
-              </a:solidFill>
-            </a:endParaRPr>
-          </a:p>
-        </p:txBody>
-      </p:sp>
-      <p:grpSp>
-        <p:nvGrpSpPr>
-          <p:cNvPr id="6" name="Group 5">
-            <a:extLst>
-              <a:ext uri="{FF2B5EF4-FFF2-40B4-BE49-F238E27FC236}">
-                <a16:creationId xmlns:a16="http://schemas.microsoft.com/office/drawing/2014/main" id="{B1FE0F1C-4D00-4096-9D4C-165EEAD0D24E}"/>
-              </a:ext>
-            </a:extLst>
-          </p:cNvPr>
-          <p:cNvGrpSpPr/>
-          <p:nvPr/>
-        </p:nvGrpSpPr>
-        <p:grpSpPr>
-          <a:xfrm>
-            <a:off x="2887579" y="1928094"/>
-            <a:ext cx="2033337" cy="955652"/>
-            <a:chOff x="2887579" y="1928094"/>
-            <a:chExt cx="2033337" cy="955652"/>
-          </a:xfrm>
-        </p:grpSpPr>
-        <p:sp>
-          <p:nvSpPr>
-            <p:cNvPr id="13" name="Arrow: Right 12">
-              <a:extLst>
-                <a:ext uri="{FF2B5EF4-FFF2-40B4-BE49-F238E27FC236}">
-                  <a16:creationId xmlns:a16="http://schemas.microsoft.com/office/drawing/2014/main" id="{C7909514-D251-4AE5-B8CF-0B3AB34EC0FE}"/>
-                </a:ext>
-              </a:extLst>
-            </p:cNvPr>
-            <p:cNvSpPr/>
-            <p:nvPr/>
-          </p:nvSpPr>
-          <p:spPr>
-            <a:xfrm>
-              <a:off x="2887579" y="2574849"/>
-              <a:ext cx="2033337" cy="308897"/>
-            </a:xfrm>
-            <a:prstGeom prst="rightArrow">
-              <a:avLst/>
-            </a:prstGeom>
-            <a:solidFill>
-              <a:srgbClr val="E6D5F3"/>
-            </a:solidFill>
-          </p:spPr>
-          <p:style>
-            <a:lnRef idx="2">
-              <a:schemeClr val="accent1">
-                <a:shade val="50000"/>
-              </a:schemeClr>
-            </a:lnRef>
-            <a:fillRef idx="1">
-              <a:schemeClr val="accent1"/>
-            </a:fillRef>
-            <a:effectRef idx="0">
-              <a:schemeClr val="accent1"/>
-            </a:effectRef>
-            <a:fontRef idx="minor">
-              <a:schemeClr val="lt1"/>
-            </a:fontRef>
-          </p:style>
-          <p:txBody>
-            <a:bodyPr rtlCol="0" anchor="ctr"/>
-            <a:lstStyle/>
-            <a:p>
-              <a:pPr algn="ctr"/>
-              <a:endParaRPr lang="en-US"/>
-            </a:p>
-          </p:txBody>
-        </p:sp>
-        <p:sp>
-          <p:nvSpPr>
-            <p:cNvPr id="10" name="Arrow: Right 9">
-              <a:extLst>
-                <a:ext uri="{FF2B5EF4-FFF2-40B4-BE49-F238E27FC236}">
-                  <a16:creationId xmlns:a16="http://schemas.microsoft.com/office/drawing/2014/main" id="{8F931857-48ED-45E9-9E4A-D99026FD9901}"/>
-                </a:ext>
-              </a:extLst>
-            </p:cNvPr>
-            <p:cNvSpPr/>
-            <p:nvPr/>
-          </p:nvSpPr>
-          <p:spPr>
-            <a:xfrm>
-              <a:off x="2887579" y="2265952"/>
-              <a:ext cx="2033337" cy="308897"/>
-            </a:xfrm>
-            <a:prstGeom prst="rightArrow">
-              <a:avLst/>
-            </a:prstGeom>
-            <a:solidFill>
-              <a:srgbClr val="E6D5F3"/>
-            </a:solidFill>
-          </p:spPr>
-          <p:style>
-            <a:lnRef idx="2">
-              <a:schemeClr val="accent1">
-                <a:shade val="50000"/>
-              </a:schemeClr>
-            </a:lnRef>
-            <a:fillRef idx="1">
-              <a:schemeClr val="accent1"/>
-            </a:fillRef>
-            <a:effectRef idx="0">
-              <a:schemeClr val="accent1"/>
-            </a:effectRef>
-            <a:fontRef idx="minor">
-              <a:schemeClr val="lt1"/>
-            </a:fontRef>
-          </p:style>
-          <p:txBody>
-            <a:bodyPr rtlCol="0" anchor="ctr"/>
-            <a:lstStyle/>
-            <a:p>
-              <a:pPr algn="ctr"/>
-              <a:endParaRPr lang="en-US"/>
-            </a:p>
-          </p:txBody>
-        </p:sp>
-        <p:sp>
-          <p:nvSpPr>
-            <p:cNvPr id="14" name="Arrow: Right 13">
-              <a:extLst>
-                <a:ext uri="{FF2B5EF4-FFF2-40B4-BE49-F238E27FC236}">
-                  <a16:creationId xmlns:a16="http://schemas.microsoft.com/office/drawing/2014/main" id="{47FEB999-FAF7-4821-9611-C908D22EC1B9}"/>
-                </a:ext>
-              </a:extLst>
-            </p:cNvPr>
-            <p:cNvSpPr/>
-            <p:nvPr/>
-          </p:nvSpPr>
-          <p:spPr>
-            <a:xfrm>
-              <a:off x="2887579" y="1928094"/>
-              <a:ext cx="2033337" cy="308897"/>
-            </a:xfrm>
-            <a:prstGeom prst="rightArrow">
-              <a:avLst/>
-            </a:prstGeom>
-            <a:solidFill>
-              <a:srgbClr val="E6D5F3"/>
-            </a:solidFill>
-          </p:spPr>
-          <p:style>
-            <a:lnRef idx="2">
-              <a:schemeClr val="accent1">
-                <a:shade val="50000"/>
-              </a:schemeClr>
-            </a:lnRef>
-            <a:fillRef idx="1">
-              <a:schemeClr val="accent1"/>
-            </a:fillRef>
-            <a:effectRef idx="0">
-              <a:schemeClr val="accent1"/>
-            </a:effectRef>
-            <a:fontRef idx="minor">
-              <a:schemeClr val="lt1"/>
-            </a:fontRef>
-          </p:style>
-          <p:txBody>
-            <a:bodyPr rtlCol="0" anchor="ctr"/>
-            <a:lstStyle/>
-            <a:p>
-              <a:pPr algn="ctr"/>
-              <a:endParaRPr lang="en-US"/>
-            </a:p>
-          </p:txBody>
-        </p:sp>
-      </p:grpSp>
+      </p:pic>
     </p:spTree>
     <p:extLst>
       <p:ext uri="{BB962C8B-B14F-4D97-AF65-F5344CB8AC3E}">
-        <p14:creationId xmlns:p14="http://schemas.microsoft.com/office/powerpoint/2010/main" val="2222384702"/>
+        <p14:creationId xmlns:p14="http://schemas.microsoft.com/office/powerpoint/2010/main" val="3493850719"/>
       </p:ext>
     </p:extLst>
   </p:cSld>
@@ -27627,9 +23398,17 @@
 </p:sld>
 </file>
 
-<file path=ppt/slides/slide8.xml><?xml version="1.0" encoding="utf-8"?>
+<file path=ppt/slides/slide9.xml><?xml version="1.0" encoding="utf-8"?>
 <p:sld xmlns:a="http://schemas.openxmlformats.org/drawingml/2006/main" xmlns:r="http://schemas.openxmlformats.org/officeDocument/2006/relationships" xmlns:p="http://schemas.openxmlformats.org/presentationml/2006/main">
   <p:cSld>
+    <p:bg>
+      <p:bgPr>
+        <a:solidFill>
+          <a:schemeClr val="bg1"/>
+        </a:solidFill>
+        <a:effectLst/>
+      </p:bgPr>
+    </p:bg>
     <p:spTree>
       <p:nvGrpSpPr>
         <p:cNvPr id="1" name=""/>
@@ -27644,40 +23423,12 @@
           <a:chExt cx="0" cy="0"/>
         </a:xfrm>
       </p:grpSpPr>
-      <p:sp>
-        <p:nvSpPr>
-          <p:cNvPr id="6" name="Title 5">
+      <p:pic>
+        <p:nvPicPr>
+          <p:cNvPr id="3" name="Picture 2" descr="Line chart&#10;&#10;Description automatically generated with medium confidence">
             <a:extLst>
               <a:ext uri="{FF2B5EF4-FFF2-40B4-BE49-F238E27FC236}">
-                <a16:creationId xmlns:a16="http://schemas.microsoft.com/office/drawing/2014/main" id="{3010BD28-CE35-488D-8957-A6ADF0266298}"/>
-              </a:ext>
-            </a:extLst>
-          </p:cNvPr>
-          <p:cNvSpPr>
-            <a:spLocks noGrp="1"/>
-          </p:cNvSpPr>
-          <p:nvPr>
-            <p:ph type="title"/>
-          </p:nvPr>
-        </p:nvSpPr>
-        <p:spPr/>
-        <p:txBody>
-          <a:bodyPr/>
-          <a:lstStyle/>
-          <a:p>
-            <a:r>
-              <a:rPr lang="en-US" dirty="0"/>
-              <a:t>Topology</a:t>
-            </a:r>
-          </a:p>
-        </p:txBody>
-      </p:sp>
-      <p:pic>
-        <p:nvPicPr>
-          <p:cNvPr id="12" name="Picture 11">
-            <a:extLst>
-              <a:ext uri="{FF2B5EF4-FFF2-40B4-BE49-F238E27FC236}">
-                <a16:creationId xmlns:a16="http://schemas.microsoft.com/office/drawing/2014/main" id="{DE9D9680-7408-4363-A988-8C87F28376ED}"/>
+                <a16:creationId xmlns:a16="http://schemas.microsoft.com/office/drawing/2014/main" id="{59C229D3-7BDC-42F6-BED7-BE49C9741C86}"/>
               </a:ext>
             </a:extLst>
           </p:cNvPr>
@@ -27687,497 +23438,31 @@
           <p:nvPr/>
         </p:nvPicPr>
         <p:blipFill>
-          <a:blip r:embed="rId2"/>
+          <a:blip r:embed="rId2">
+            <a:extLst>
+              <a:ext uri="{28A0092B-C50C-407E-A947-70E740481C1C}">
+                <a14:useLocalDpi xmlns:a14="http://schemas.microsoft.com/office/drawing/2010/main" val="0"/>
+              </a:ext>
+            </a:extLst>
+          </a:blip>
           <a:stretch>
             <a:fillRect/>
           </a:stretch>
         </p:blipFill>
         <p:spPr>
           <a:xfrm>
-            <a:off x="722692" y="1946459"/>
-            <a:ext cx="5227149" cy="3970865"/>
+            <a:off x="643467" y="1561508"/>
+            <a:ext cx="10905066" cy="3734982"/>
           </a:xfrm>
           <a:prstGeom prst="rect">
             <a:avLst/>
           </a:prstGeom>
         </p:spPr>
       </p:pic>
-      <p:pic>
-        <p:nvPicPr>
-          <p:cNvPr id="14" name="Picture 13">
-            <a:extLst>
-              <a:ext uri="{FF2B5EF4-FFF2-40B4-BE49-F238E27FC236}">
-                <a16:creationId xmlns:a16="http://schemas.microsoft.com/office/drawing/2014/main" id="{E515FC66-B562-4849-9143-8F361882DD12}"/>
-              </a:ext>
-            </a:extLst>
-          </p:cNvPr>
-          <p:cNvPicPr>
-            <a:picLocks noChangeAspect="1"/>
-          </p:cNvPicPr>
-          <p:nvPr/>
-        </p:nvPicPr>
-        <p:blipFill>
-          <a:blip r:embed="rId3"/>
-          <a:stretch>
-            <a:fillRect/>
-          </a:stretch>
-        </p:blipFill>
-        <p:spPr>
-          <a:xfrm>
-            <a:off x="5949841" y="1877256"/>
-            <a:ext cx="5435244" cy="4109269"/>
-          </a:xfrm>
-          <a:prstGeom prst="rect">
-            <a:avLst/>
-          </a:prstGeom>
-        </p:spPr>
-      </p:pic>
-      <p:sp>
-        <p:nvSpPr>
-          <p:cNvPr id="3" name="Oval 2">
-            <a:extLst>
-              <a:ext uri="{FF2B5EF4-FFF2-40B4-BE49-F238E27FC236}">
-                <a16:creationId xmlns:a16="http://schemas.microsoft.com/office/drawing/2014/main" id="{06E1408C-8044-42A0-A31C-93ACE2C41C05}"/>
-              </a:ext>
-            </a:extLst>
-          </p:cNvPr>
-          <p:cNvSpPr/>
-          <p:nvPr/>
-        </p:nvSpPr>
-        <p:spPr>
-          <a:xfrm>
-            <a:off x="722692" y="1776248"/>
-            <a:ext cx="1705198" cy="1870842"/>
-          </a:xfrm>
-          <a:prstGeom prst="ellipse">
-            <a:avLst/>
-          </a:prstGeom>
-          <a:noFill/>
-          <a:ln w="57150">
-            <a:solidFill>
-              <a:schemeClr val="accent2">
-                <a:lumMod val="50000"/>
-              </a:schemeClr>
-            </a:solidFill>
-          </a:ln>
-        </p:spPr>
-        <p:style>
-          <a:lnRef idx="2">
-            <a:schemeClr val="accent1">
-              <a:shade val="50000"/>
-            </a:schemeClr>
-          </a:lnRef>
-          <a:fillRef idx="1">
-            <a:schemeClr val="accent1"/>
-          </a:fillRef>
-          <a:effectRef idx="0">
-            <a:schemeClr val="accent1"/>
-          </a:effectRef>
-          <a:fontRef idx="minor">
-            <a:schemeClr val="lt1"/>
-          </a:fontRef>
-        </p:style>
-        <p:txBody>
-          <a:bodyPr rtlCol="0" anchor="ctr"/>
-          <a:lstStyle/>
-          <a:p>
-            <a:pPr algn="ctr"/>
-            <a:endParaRPr lang="en-US"/>
-          </a:p>
-        </p:txBody>
-      </p:sp>
-      <p:sp>
-        <p:nvSpPr>
-          <p:cNvPr id="7" name="Oval 6">
-            <a:extLst>
-              <a:ext uri="{FF2B5EF4-FFF2-40B4-BE49-F238E27FC236}">
-                <a16:creationId xmlns:a16="http://schemas.microsoft.com/office/drawing/2014/main" id="{EFB4BB1A-803E-4658-B279-788A54AC01FA}"/>
-              </a:ext>
-            </a:extLst>
-          </p:cNvPr>
-          <p:cNvSpPr/>
-          <p:nvPr/>
-        </p:nvSpPr>
-        <p:spPr>
-          <a:xfrm>
-            <a:off x="2483668" y="4115683"/>
-            <a:ext cx="1705198" cy="1870842"/>
-          </a:xfrm>
-          <a:prstGeom prst="ellipse">
-            <a:avLst/>
-          </a:prstGeom>
-          <a:noFill/>
-          <a:ln w="57150">
-            <a:solidFill>
-              <a:schemeClr val="accent2">
-                <a:lumMod val="50000"/>
-              </a:schemeClr>
-            </a:solidFill>
-          </a:ln>
-        </p:spPr>
-        <p:style>
-          <a:lnRef idx="2">
-            <a:schemeClr val="accent1">
-              <a:shade val="50000"/>
-            </a:schemeClr>
-          </a:lnRef>
-          <a:fillRef idx="1">
-            <a:schemeClr val="accent1"/>
-          </a:fillRef>
-          <a:effectRef idx="0">
-            <a:schemeClr val="accent1"/>
-          </a:effectRef>
-          <a:fontRef idx="minor">
-            <a:schemeClr val="lt1"/>
-          </a:fontRef>
-        </p:style>
-        <p:txBody>
-          <a:bodyPr rtlCol="0" anchor="ctr"/>
-          <a:lstStyle/>
-          <a:p>
-            <a:pPr algn="ctr"/>
-            <a:endParaRPr lang="en-US"/>
-          </a:p>
-        </p:txBody>
-      </p:sp>
     </p:spTree>
     <p:extLst>
       <p:ext uri="{BB962C8B-B14F-4D97-AF65-F5344CB8AC3E}">
-        <p14:creationId xmlns:p14="http://schemas.microsoft.com/office/powerpoint/2010/main" val="4141428929"/>
-      </p:ext>
-    </p:extLst>
-  </p:cSld>
-  <p:clrMapOvr>
-    <a:masterClrMapping/>
-  </p:clrMapOvr>
-</p:sld>
-</file>
-
-<file path=ppt/slides/slide9.xml><?xml version="1.0" encoding="utf-8"?>
-<p:sld xmlns:a="http://schemas.openxmlformats.org/drawingml/2006/main" xmlns:r="http://schemas.openxmlformats.org/officeDocument/2006/relationships" xmlns:p="http://schemas.openxmlformats.org/presentationml/2006/main">
-  <p:cSld>
-    <p:spTree>
-      <p:nvGrpSpPr>
-        <p:cNvPr id="1" name=""/>
-        <p:cNvGrpSpPr/>
-        <p:nvPr/>
-      </p:nvGrpSpPr>
-      <p:grpSpPr>
-        <a:xfrm>
-          <a:off x="0" y="0"/>
-          <a:ext cx="0" cy="0"/>
-          <a:chOff x="0" y="0"/>
-          <a:chExt cx="0" cy="0"/>
-        </a:xfrm>
-      </p:grpSpPr>
-      <p:sp>
-        <p:nvSpPr>
-          <p:cNvPr id="6" name="Title 5">
-            <a:extLst>
-              <a:ext uri="{FF2B5EF4-FFF2-40B4-BE49-F238E27FC236}">
-                <a16:creationId xmlns:a16="http://schemas.microsoft.com/office/drawing/2014/main" id="{3010BD28-CE35-488D-8957-A6ADF0266298}"/>
-              </a:ext>
-            </a:extLst>
-          </p:cNvPr>
-          <p:cNvSpPr>
-            <a:spLocks noGrp="1"/>
-          </p:cNvSpPr>
-          <p:nvPr>
-            <p:ph type="title"/>
-          </p:nvPr>
-        </p:nvSpPr>
-        <p:spPr/>
-        <p:txBody>
-          <a:bodyPr/>
-          <a:lstStyle/>
-          <a:p>
-            <a:r>
-              <a:rPr lang="en-US" dirty="0"/>
-              <a:t>Topology</a:t>
-            </a:r>
-          </a:p>
-        </p:txBody>
-      </p:sp>
-      <p:pic>
-        <p:nvPicPr>
-          <p:cNvPr id="12" name="Picture 11">
-            <a:extLst>
-              <a:ext uri="{FF2B5EF4-FFF2-40B4-BE49-F238E27FC236}">
-                <a16:creationId xmlns:a16="http://schemas.microsoft.com/office/drawing/2014/main" id="{DE9D9680-7408-4363-A988-8C87F28376ED}"/>
-              </a:ext>
-            </a:extLst>
-          </p:cNvPr>
-          <p:cNvPicPr>
-            <a:picLocks noChangeAspect="1"/>
-          </p:cNvPicPr>
-          <p:nvPr/>
-        </p:nvPicPr>
-        <p:blipFill>
-          <a:blip r:embed="rId2"/>
-          <a:stretch>
-            <a:fillRect/>
-          </a:stretch>
-        </p:blipFill>
-        <p:spPr>
-          <a:xfrm>
-            <a:off x="722692" y="1946459"/>
-            <a:ext cx="5227149" cy="3970865"/>
-          </a:xfrm>
-          <a:prstGeom prst="rect">
-            <a:avLst/>
-          </a:prstGeom>
-        </p:spPr>
-      </p:pic>
-      <p:pic>
-        <p:nvPicPr>
-          <p:cNvPr id="14" name="Picture 13">
-            <a:extLst>
-              <a:ext uri="{FF2B5EF4-FFF2-40B4-BE49-F238E27FC236}">
-                <a16:creationId xmlns:a16="http://schemas.microsoft.com/office/drawing/2014/main" id="{E515FC66-B562-4849-9143-8F361882DD12}"/>
-              </a:ext>
-            </a:extLst>
-          </p:cNvPr>
-          <p:cNvPicPr>
-            <a:picLocks noChangeAspect="1"/>
-          </p:cNvPicPr>
-          <p:nvPr/>
-        </p:nvPicPr>
-        <p:blipFill>
-          <a:blip r:embed="rId3"/>
-          <a:stretch>
-            <a:fillRect/>
-          </a:stretch>
-        </p:blipFill>
-        <p:spPr>
-          <a:xfrm>
-            <a:off x="5949841" y="1877256"/>
-            <a:ext cx="5435244" cy="4109269"/>
-          </a:xfrm>
-          <a:prstGeom prst="rect">
-            <a:avLst/>
-          </a:prstGeom>
-        </p:spPr>
-      </p:pic>
-      <p:sp>
-        <p:nvSpPr>
-          <p:cNvPr id="3" name="Oval 2">
-            <a:extLst>
-              <a:ext uri="{FF2B5EF4-FFF2-40B4-BE49-F238E27FC236}">
-                <a16:creationId xmlns:a16="http://schemas.microsoft.com/office/drawing/2014/main" id="{06E1408C-8044-42A0-A31C-93ACE2C41C05}"/>
-              </a:ext>
-            </a:extLst>
-          </p:cNvPr>
-          <p:cNvSpPr/>
-          <p:nvPr/>
-        </p:nvSpPr>
-        <p:spPr>
-          <a:xfrm>
-            <a:off x="722692" y="1776248"/>
-            <a:ext cx="1705198" cy="1870842"/>
-          </a:xfrm>
-          <a:prstGeom prst="ellipse">
-            <a:avLst/>
-          </a:prstGeom>
-          <a:noFill/>
-          <a:ln w="57150">
-            <a:solidFill>
-              <a:schemeClr val="accent2">
-                <a:lumMod val="50000"/>
-              </a:schemeClr>
-            </a:solidFill>
-          </a:ln>
-        </p:spPr>
-        <p:style>
-          <a:lnRef idx="2">
-            <a:schemeClr val="accent1">
-              <a:shade val="50000"/>
-            </a:schemeClr>
-          </a:lnRef>
-          <a:fillRef idx="1">
-            <a:schemeClr val="accent1"/>
-          </a:fillRef>
-          <a:effectRef idx="0">
-            <a:schemeClr val="accent1"/>
-          </a:effectRef>
-          <a:fontRef idx="minor">
-            <a:schemeClr val="lt1"/>
-          </a:fontRef>
-        </p:style>
-        <p:txBody>
-          <a:bodyPr rtlCol="0" anchor="ctr"/>
-          <a:lstStyle/>
-          <a:p>
-            <a:pPr algn="ctr"/>
-            <a:endParaRPr lang="en-US"/>
-          </a:p>
-        </p:txBody>
-      </p:sp>
-      <p:sp>
-        <p:nvSpPr>
-          <p:cNvPr id="7" name="Oval 6">
-            <a:extLst>
-              <a:ext uri="{FF2B5EF4-FFF2-40B4-BE49-F238E27FC236}">
-                <a16:creationId xmlns:a16="http://schemas.microsoft.com/office/drawing/2014/main" id="{EFB4BB1A-803E-4658-B279-788A54AC01FA}"/>
-              </a:ext>
-            </a:extLst>
-          </p:cNvPr>
-          <p:cNvSpPr/>
-          <p:nvPr/>
-        </p:nvSpPr>
-        <p:spPr>
-          <a:xfrm>
-            <a:off x="2483668" y="4115683"/>
-            <a:ext cx="1705198" cy="1870842"/>
-          </a:xfrm>
-          <a:prstGeom prst="ellipse">
-            <a:avLst/>
-          </a:prstGeom>
-          <a:noFill/>
-          <a:ln w="57150">
-            <a:solidFill>
-              <a:schemeClr val="accent2">
-                <a:lumMod val="50000"/>
-              </a:schemeClr>
-            </a:solidFill>
-          </a:ln>
-        </p:spPr>
-        <p:style>
-          <a:lnRef idx="2">
-            <a:schemeClr val="accent1">
-              <a:shade val="50000"/>
-            </a:schemeClr>
-          </a:lnRef>
-          <a:fillRef idx="1">
-            <a:schemeClr val="accent1"/>
-          </a:fillRef>
-          <a:effectRef idx="0">
-            <a:schemeClr val="accent1"/>
-          </a:effectRef>
-          <a:fontRef idx="minor">
-            <a:schemeClr val="lt1"/>
-          </a:fontRef>
-        </p:style>
-        <p:txBody>
-          <a:bodyPr rtlCol="0" anchor="ctr"/>
-          <a:lstStyle/>
-          <a:p>
-            <a:pPr algn="ctr"/>
-            <a:endParaRPr lang="en-US"/>
-          </a:p>
-        </p:txBody>
-      </p:sp>
-      <p:sp>
-        <p:nvSpPr>
-          <p:cNvPr id="8" name="Oval 7">
-            <a:extLst>
-              <a:ext uri="{FF2B5EF4-FFF2-40B4-BE49-F238E27FC236}">
-                <a16:creationId xmlns:a16="http://schemas.microsoft.com/office/drawing/2014/main" id="{BA004490-FF99-41F6-8777-36A090C99249}"/>
-              </a:ext>
-            </a:extLst>
-          </p:cNvPr>
-          <p:cNvSpPr/>
-          <p:nvPr/>
-        </p:nvSpPr>
-        <p:spPr>
-          <a:xfrm>
-            <a:off x="6096000" y="1836692"/>
-            <a:ext cx="1705198" cy="1870842"/>
-          </a:xfrm>
-          <a:prstGeom prst="ellipse">
-            <a:avLst/>
-          </a:prstGeom>
-          <a:noFill/>
-          <a:ln w="57150">
-            <a:solidFill>
-              <a:schemeClr val="accent2">
-                <a:lumMod val="75000"/>
-              </a:schemeClr>
-            </a:solidFill>
-          </a:ln>
-        </p:spPr>
-        <p:style>
-          <a:lnRef idx="2">
-            <a:schemeClr val="accent1">
-              <a:shade val="50000"/>
-            </a:schemeClr>
-          </a:lnRef>
-          <a:fillRef idx="1">
-            <a:schemeClr val="accent1"/>
-          </a:fillRef>
-          <a:effectRef idx="0">
-            <a:schemeClr val="accent1"/>
-          </a:effectRef>
-          <a:fontRef idx="minor">
-            <a:schemeClr val="lt1"/>
-          </a:fontRef>
-        </p:style>
-        <p:txBody>
-          <a:bodyPr rtlCol="0" anchor="ctr"/>
-          <a:lstStyle/>
-          <a:p>
-            <a:pPr algn="ctr"/>
-            <a:endParaRPr lang="en-US"/>
-          </a:p>
-        </p:txBody>
-      </p:sp>
-      <p:sp>
-        <p:nvSpPr>
-          <p:cNvPr id="9" name="Oval 8">
-            <a:extLst>
-              <a:ext uri="{FF2B5EF4-FFF2-40B4-BE49-F238E27FC236}">
-                <a16:creationId xmlns:a16="http://schemas.microsoft.com/office/drawing/2014/main" id="{D9A5D717-6BFC-4D95-AB9C-810C0A41714C}"/>
-              </a:ext>
-            </a:extLst>
-          </p:cNvPr>
-          <p:cNvSpPr/>
-          <p:nvPr/>
-        </p:nvSpPr>
-        <p:spPr>
-          <a:xfrm>
-            <a:off x="7856975" y="1946459"/>
-            <a:ext cx="1705198" cy="1870842"/>
-          </a:xfrm>
-          <a:prstGeom prst="ellipse">
-            <a:avLst/>
-          </a:prstGeom>
-          <a:noFill/>
-          <a:ln w="57150">
-            <a:solidFill>
-              <a:schemeClr val="accent2">
-                <a:lumMod val="75000"/>
-              </a:schemeClr>
-            </a:solidFill>
-          </a:ln>
-        </p:spPr>
-        <p:style>
-          <a:lnRef idx="2">
-            <a:schemeClr val="accent1">
-              <a:shade val="50000"/>
-            </a:schemeClr>
-          </a:lnRef>
-          <a:fillRef idx="1">
-            <a:schemeClr val="accent1"/>
-          </a:fillRef>
-          <a:effectRef idx="0">
-            <a:schemeClr val="accent1"/>
-          </a:effectRef>
-          <a:fontRef idx="minor">
-            <a:schemeClr val="lt1"/>
-          </a:fontRef>
-        </p:style>
-        <p:txBody>
-          <a:bodyPr rtlCol="0" anchor="ctr"/>
-          <a:lstStyle/>
-          <a:p>
-            <a:pPr algn="ctr"/>
-            <a:endParaRPr lang="en-US"/>
-          </a:p>
-        </p:txBody>
-      </p:sp>
-    </p:spTree>
-    <p:extLst>
-      <p:ext uri="{BB962C8B-B14F-4D97-AF65-F5344CB8AC3E}">
-        <p14:creationId xmlns:p14="http://schemas.microsoft.com/office/powerpoint/2010/main" val="3279398010"/>
+        <p14:creationId xmlns:p14="http://schemas.microsoft.com/office/powerpoint/2010/main" val="4120575620"/>
       </p:ext>
     </p:extLst>
   </p:cSld>
@@ -28989,18 +24274,18 @@
 </file>
 
 <file path=customXml/item2.xml><?xml version="1.0" encoding="utf-8"?>
-<p:properties xmlns:p="http://schemas.microsoft.com/office/2006/metadata/properties" xmlns:xsi="http://www.w3.org/2001/XMLSchema-instance" xmlns:pc="http://schemas.microsoft.com/office/infopath/2007/PartnerControls">
-  <documentManagement/>
-</p:properties>
-</file>
-
-<file path=customXml/item3.xml><?xml version="1.0" encoding="utf-8"?>
 <?mso-contentType ?>
 <FormTemplates xmlns="http://schemas.microsoft.com/sharepoint/v3/contenttype/forms">
   <Display>DocumentLibraryForm</Display>
   <Edit>DocumentLibraryForm</Edit>
   <New>DocumentLibraryForm</New>
 </FormTemplates>
+</file>
+
+<file path=customXml/item3.xml><?xml version="1.0" encoding="utf-8"?>
+<p:properties xmlns:p="http://schemas.microsoft.com/office/2006/metadata/properties" xmlns:xsi="http://www.w3.org/2001/XMLSchema-instance" xmlns:pc="http://schemas.microsoft.com/office/infopath/2007/PartnerControls">
+  <documentManagement/>
+</p:properties>
 </file>
 
 <file path=customXml/itemProps1.xml><?xml version="1.0" encoding="utf-8"?>
@@ -29023,6 +24308,14 @@
 </file>
 
 <file path=customXml/itemProps2.xml><?xml version="1.0" encoding="utf-8"?>
+<ds:datastoreItem xmlns:ds="http://schemas.openxmlformats.org/officeDocument/2006/customXml" ds:itemID="{6CE1072D-2121-45C3-B9C1-1F6332EA7BCD}">
+  <ds:schemaRefs>
+    <ds:schemaRef ds:uri="http://schemas.microsoft.com/sharepoint/v3/contenttype/forms"/>
+  </ds:schemaRefs>
+</ds:datastoreItem>
+</file>
+
+<file path=customXml/itemProps3.xml><?xml version="1.0" encoding="utf-8"?>
 <ds:datastoreItem xmlns:ds="http://schemas.openxmlformats.org/officeDocument/2006/customXml" ds:itemID="{F76D876A-133A-4ADC-A6AC-83F86922D172}">
   <ds:schemaRefs>
     <ds:schemaRef ds:uri="http://schemas.microsoft.com/office/2006/documentManagement/types"/>
@@ -29037,12 +24330,4 @@
     <ds:schemaRef ds:uri="e897f0a5-a1a6-4565-940d-5f035e21d854"/>
   </ds:schemaRefs>
 </ds:datastoreItem>
-</file>
-
-<file path=customXml/itemProps3.xml><?xml version="1.0" encoding="utf-8"?>
-<ds:datastoreItem xmlns:ds="http://schemas.openxmlformats.org/officeDocument/2006/customXml" ds:itemID="{6CE1072D-2121-45C3-B9C1-1F6332EA7BCD}">
-  <ds:schemaRefs>
-    <ds:schemaRef ds:uri="http://schemas.microsoft.com/sharepoint/v3/contenttype/forms"/>
-  </ds:schemaRefs>
-</ds:datastoreItem>
 </file>